--- a/ゲーム科1年/00_前期/ゲームプログラミングⅠ/02_ひな形(最低限のプログラム).pptx
+++ b/ゲーム科1年/00_前期/ゲームプログラミングⅠ/02_ひな形(最低限のプログラム).pptx
@@ -271,7 +271,7 @@
           <a:p>
             <a:fld id="{E9CC885B-4903-4D54-9A93-00025F12DED9}" type="datetimeFigureOut">
               <a:rPr kumimoji="1" lang="ja-JP" altLang="en-US" smtClean="0"/>
-              <a:t>2024/8/28</a:t>
+              <a:t>2025/3/3</a:t>
             </a:fld>
             <a:endParaRPr kumimoji="1" lang="ja-JP" altLang="en-US"/>
           </a:p>
@@ -501,7 +501,7 @@
           <a:p>
             <a:fld id="{E9CC885B-4903-4D54-9A93-00025F12DED9}" type="datetimeFigureOut">
               <a:rPr kumimoji="1" lang="ja-JP" altLang="en-US" smtClean="0"/>
-              <a:t>2024/8/28</a:t>
+              <a:t>2025/3/3</a:t>
             </a:fld>
             <a:endParaRPr kumimoji="1" lang="ja-JP" altLang="en-US"/>
           </a:p>
@@ -741,7 +741,7 @@
           <a:p>
             <a:fld id="{E9CC885B-4903-4D54-9A93-00025F12DED9}" type="datetimeFigureOut">
               <a:rPr kumimoji="1" lang="ja-JP" altLang="en-US" smtClean="0"/>
-              <a:t>2024/8/28</a:t>
+              <a:t>2025/3/3</a:t>
             </a:fld>
             <a:endParaRPr kumimoji="1" lang="ja-JP" altLang="en-US"/>
           </a:p>
@@ -971,7 +971,7 @@
           <a:p>
             <a:fld id="{E9CC885B-4903-4D54-9A93-00025F12DED9}" type="datetimeFigureOut">
               <a:rPr kumimoji="1" lang="ja-JP" altLang="en-US" smtClean="0"/>
-              <a:t>2024/8/28</a:t>
+              <a:t>2025/3/3</a:t>
             </a:fld>
             <a:endParaRPr kumimoji="1" lang="ja-JP" altLang="en-US"/>
           </a:p>
@@ -1246,7 +1246,7 @@
           <a:p>
             <a:fld id="{E9CC885B-4903-4D54-9A93-00025F12DED9}" type="datetimeFigureOut">
               <a:rPr kumimoji="1" lang="ja-JP" altLang="en-US" smtClean="0"/>
-              <a:t>2024/8/28</a:t>
+              <a:t>2025/3/3</a:t>
             </a:fld>
             <a:endParaRPr kumimoji="1" lang="ja-JP" altLang="en-US"/>
           </a:p>
@@ -1575,7 +1575,7 @@
           <a:p>
             <a:fld id="{E9CC885B-4903-4D54-9A93-00025F12DED9}" type="datetimeFigureOut">
               <a:rPr kumimoji="1" lang="ja-JP" altLang="en-US" smtClean="0"/>
-              <a:t>2024/8/28</a:t>
+              <a:t>2025/3/3</a:t>
             </a:fld>
             <a:endParaRPr kumimoji="1" lang="ja-JP" altLang="en-US"/>
           </a:p>
@@ -2051,7 +2051,7 @@
           <a:p>
             <a:fld id="{E9CC885B-4903-4D54-9A93-00025F12DED9}" type="datetimeFigureOut">
               <a:rPr kumimoji="1" lang="ja-JP" altLang="en-US" smtClean="0"/>
-              <a:t>2024/8/28</a:t>
+              <a:t>2025/3/3</a:t>
             </a:fld>
             <a:endParaRPr kumimoji="1" lang="ja-JP" altLang="en-US"/>
           </a:p>
@@ -2192,7 +2192,7 @@
           <a:p>
             <a:fld id="{E9CC885B-4903-4D54-9A93-00025F12DED9}" type="datetimeFigureOut">
               <a:rPr kumimoji="1" lang="ja-JP" altLang="en-US" smtClean="0"/>
-              <a:t>2024/8/28</a:t>
+              <a:t>2025/3/3</a:t>
             </a:fld>
             <a:endParaRPr kumimoji="1" lang="ja-JP" altLang="en-US"/>
           </a:p>
@@ -2305,7 +2305,7 @@
           <a:p>
             <a:fld id="{E9CC885B-4903-4D54-9A93-00025F12DED9}" type="datetimeFigureOut">
               <a:rPr kumimoji="1" lang="ja-JP" altLang="en-US" smtClean="0"/>
-              <a:t>2024/8/28</a:t>
+              <a:t>2025/3/3</a:t>
             </a:fld>
             <a:endParaRPr kumimoji="1" lang="ja-JP" altLang="en-US"/>
           </a:p>
@@ -2648,7 +2648,7 @@
           <a:p>
             <a:fld id="{E9CC885B-4903-4D54-9A93-00025F12DED9}" type="datetimeFigureOut">
               <a:rPr kumimoji="1" lang="ja-JP" altLang="en-US" smtClean="0"/>
-              <a:t>2024/8/28</a:t>
+              <a:t>2025/3/3</a:t>
             </a:fld>
             <a:endParaRPr kumimoji="1" lang="ja-JP" altLang="en-US"/>
           </a:p>
@@ -2936,7 +2936,7 @@
           <a:p>
             <a:fld id="{E9CC885B-4903-4D54-9A93-00025F12DED9}" type="datetimeFigureOut">
               <a:rPr kumimoji="1" lang="ja-JP" altLang="en-US" smtClean="0"/>
-              <a:t>2024/8/28</a:t>
+              <a:t>2025/3/3</a:t>
             </a:fld>
             <a:endParaRPr kumimoji="1" lang="ja-JP" altLang="en-US"/>
           </a:p>
@@ -3209,7 +3209,7 @@
           <a:p>
             <a:fld id="{E9CC885B-4903-4D54-9A93-00025F12DED9}" type="datetimeFigureOut">
               <a:rPr kumimoji="1" lang="ja-JP" altLang="en-US" smtClean="0"/>
-              <a:t>2024/8/28</a:t>
+              <a:t>2025/3/3</a:t>
             </a:fld>
             <a:endParaRPr kumimoji="1" lang="ja-JP" altLang="en-US"/>
           </a:p>
@@ -4087,7 +4087,7 @@
         <p:spPr>
           <a:xfrm>
             <a:off x="567541" y="3187700"/>
-            <a:ext cx="9725739" cy="830997"/>
+            <a:ext cx="10956846" cy="1938992"/>
           </a:xfrm>
           <a:prstGeom prst="rect">
             <a:avLst/>
@@ -4126,6 +4126,38 @@
             <a:r>
               <a:rPr lang="ja-JP" altLang="en-US" sz="2400" dirty="0"/>
               <a:t>裏画面に全部描画した後はこの関数を使って画面を裏返しましょう。</a:t>
+            </a:r>
+            <a:endParaRPr lang="en-US" altLang="ja-JP" sz="2400" dirty="0"/>
+          </a:p>
+          <a:p>
+            <a:endParaRPr lang="en-US" altLang="ja-JP" sz="2400" dirty="0"/>
+          </a:p>
+          <a:p>
+            <a:r>
+              <a:rPr lang="en-US" altLang="ja-JP" sz="2400" b="1" dirty="0">
+                <a:solidFill>
+                  <a:srgbClr val="00B050"/>
+                </a:solidFill>
+              </a:rPr>
+              <a:t>MEMO</a:t>
+            </a:r>
+          </a:p>
+          <a:p>
+            <a:r>
+              <a:rPr lang="ja-JP" altLang="en-US" sz="2400" dirty="0"/>
+              <a:t>表裏の両面を使って画面を描画することを</a:t>
+            </a:r>
+            <a:r>
+              <a:rPr lang="ja-JP" altLang="en-US" sz="2400" b="1" dirty="0">
+                <a:solidFill>
+                  <a:srgbClr val="FF0000"/>
+                </a:solidFill>
+              </a:rPr>
+              <a:t>ダブルバッファリング</a:t>
+            </a:r>
+            <a:r>
+              <a:rPr lang="ja-JP" altLang="en-US" sz="2400" dirty="0"/>
+              <a:t>と言います。</a:t>
             </a:r>
             <a:endParaRPr lang="en-US" altLang="ja-JP" sz="2400" dirty="0"/>
           </a:p>
@@ -4925,7 +4957,7 @@
         <p:spPr>
           <a:xfrm>
             <a:off x="567542" y="3198167"/>
-            <a:ext cx="9110186" cy="1938992"/>
+            <a:ext cx="7879080" cy="1938992"/>
           </a:xfrm>
           <a:prstGeom prst="rect">
             <a:avLst/>
@@ -4970,7 +5002,7 @@
           <a:p>
             <a:r>
               <a:rPr kumimoji="1" lang="ja-JP" altLang="en-US" sz="2400" dirty="0"/>
-              <a:t>失敗したらその時点で終了という風にプログラムされています。</a:t>
+              <a:t>失敗したらその時点で終了とプログラムされています。</a:t>
             </a:r>
             <a:endParaRPr kumimoji="1" lang="en-US" altLang="ja-JP" sz="2400" dirty="0"/>
           </a:p>
@@ -5319,7 +5351,7 @@
             </a:r>
             <a:r>
               <a:rPr lang="ja-JP" altLang="en-US" sz="2400" dirty="0"/>
-              <a:t>などを、この１枚の板に</a:t>
+              <a:t>などをこの１枚の板に</a:t>
             </a:r>
             <a:r>
               <a:rPr lang="ja-JP" altLang="en-US" sz="2400" b="1" dirty="0">
@@ -11160,7 +11192,7 @@
           <a:p>
             <a:r>
               <a:rPr lang="ja-JP" altLang="en-US" sz="2400" dirty="0"/>
-              <a:t>逆に言えば、問題がなければ無限にループします。</a:t>
+              <a:t>逆に問題がなければ無限にループします。</a:t>
             </a:r>
             <a:endParaRPr lang="en-US" altLang="ja-JP" sz="2400" dirty="0"/>
           </a:p>

--- a/ゲーム科1年/00_前期/ゲームプログラミングⅠ/02_ひな形(最低限のプログラム).pptx
+++ b/ゲーム科1年/00_前期/ゲームプログラミングⅠ/02_ひな形(最低限のプログラム).pptx
@@ -12,12 +12,14 @@
     <p:sldId id="263" r:id="rId6"/>
     <p:sldId id="264" r:id="rId7"/>
     <p:sldId id="265" r:id="rId8"/>
-    <p:sldId id="266" r:id="rId9"/>
-    <p:sldId id="267" r:id="rId10"/>
-    <p:sldId id="268" r:id="rId11"/>
-    <p:sldId id="269" r:id="rId12"/>
-    <p:sldId id="270" r:id="rId13"/>
-    <p:sldId id="271" r:id="rId14"/>
+    <p:sldId id="272" r:id="rId9"/>
+    <p:sldId id="266" r:id="rId10"/>
+    <p:sldId id="267" r:id="rId11"/>
+    <p:sldId id="268" r:id="rId12"/>
+    <p:sldId id="269" r:id="rId13"/>
+    <p:sldId id="270" r:id="rId14"/>
+    <p:sldId id="273" r:id="rId15"/>
+    <p:sldId id="271" r:id="rId16"/>
   </p:sldIdLst>
   <p:sldSz cx="12192000" cy="6858000"/>
   <p:notesSz cx="6858000" cy="9144000"/>
@@ -271,7 +273,7 @@
           <a:p>
             <a:fld id="{E9CC885B-4903-4D54-9A93-00025F12DED9}" type="datetimeFigureOut">
               <a:rPr kumimoji="1" lang="ja-JP" altLang="en-US" smtClean="0"/>
-              <a:t>2025/3/3</a:t>
+              <a:t>2026/6/4</a:t>
             </a:fld>
             <a:endParaRPr kumimoji="1" lang="ja-JP" altLang="en-US"/>
           </a:p>
@@ -501,7 +503,7 @@
           <a:p>
             <a:fld id="{E9CC885B-4903-4D54-9A93-00025F12DED9}" type="datetimeFigureOut">
               <a:rPr kumimoji="1" lang="ja-JP" altLang="en-US" smtClean="0"/>
-              <a:t>2025/3/3</a:t>
+              <a:t>2026/6/4</a:t>
             </a:fld>
             <a:endParaRPr kumimoji="1" lang="ja-JP" altLang="en-US"/>
           </a:p>
@@ -741,7 +743,7 @@
           <a:p>
             <a:fld id="{E9CC885B-4903-4D54-9A93-00025F12DED9}" type="datetimeFigureOut">
               <a:rPr kumimoji="1" lang="ja-JP" altLang="en-US" smtClean="0"/>
-              <a:t>2025/3/3</a:t>
+              <a:t>2026/6/4</a:t>
             </a:fld>
             <a:endParaRPr kumimoji="1" lang="ja-JP" altLang="en-US"/>
           </a:p>
@@ -971,7 +973,7 @@
           <a:p>
             <a:fld id="{E9CC885B-4903-4D54-9A93-00025F12DED9}" type="datetimeFigureOut">
               <a:rPr kumimoji="1" lang="ja-JP" altLang="en-US" smtClean="0"/>
-              <a:t>2025/3/3</a:t>
+              <a:t>2026/6/4</a:t>
             </a:fld>
             <a:endParaRPr kumimoji="1" lang="ja-JP" altLang="en-US"/>
           </a:p>
@@ -1246,7 +1248,7 @@
           <a:p>
             <a:fld id="{E9CC885B-4903-4D54-9A93-00025F12DED9}" type="datetimeFigureOut">
               <a:rPr kumimoji="1" lang="ja-JP" altLang="en-US" smtClean="0"/>
-              <a:t>2025/3/3</a:t>
+              <a:t>2026/6/4</a:t>
             </a:fld>
             <a:endParaRPr kumimoji="1" lang="ja-JP" altLang="en-US"/>
           </a:p>
@@ -1575,7 +1577,7 @@
           <a:p>
             <a:fld id="{E9CC885B-4903-4D54-9A93-00025F12DED9}" type="datetimeFigureOut">
               <a:rPr kumimoji="1" lang="ja-JP" altLang="en-US" smtClean="0"/>
-              <a:t>2025/3/3</a:t>
+              <a:t>2026/6/4</a:t>
             </a:fld>
             <a:endParaRPr kumimoji="1" lang="ja-JP" altLang="en-US"/>
           </a:p>
@@ -2051,7 +2053,7 @@
           <a:p>
             <a:fld id="{E9CC885B-4903-4D54-9A93-00025F12DED9}" type="datetimeFigureOut">
               <a:rPr kumimoji="1" lang="ja-JP" altLang="en-US" smtClean="0"/>
-              <a:t>2025/3/3</a:t>
+              <a:t>2026/6/4</a:t>
             </a:fld>
             <a:endParaRPr kumimoji="1" lang="ja-JP" altLang="en-US"/>
           </a:p>
@@ -2192,7 +2194,7 @@
           <a:p>
             <a:fld id="{E9CC885B-4903-4D54-9A93-00025F12DED9}" type="datetimeFigureOut">
               <a:rPr kumimoji="1" lang="ja-JP" altLang="en-US" smtClean="0"/>
-              <a:t>2025/3/3</a:t>
+              <a:t>2026/6/4</a:t>
             </a:fld>
             <a:endParaRPr kumimoji="1" lang="ja-JP" altLang="en-US"/>
           </a:p>
@@ -2305,7 +2307,7 @@
           <a:p>
             <a:fld id="{E9CC885B-4903-4D54-9A93-00025F12DED9}" type="datetimeFigureOut">
               <a:rPr kumimoji="1" lang="ja-JP" altLang="en-US" smtClean="0"/>
-              <a:t>2025/3/3</a:t>
+              <a:t>2026/6/4</a:t>
             </a:fld>
             <a:endParaRPr kumimoji="1" lang="ja-JP" altLang="en-US"/>
           </a:p>
@@ -2648,7 +2650,7 @@
           <a:p>
             <a:fld id="{E9CC885B-4903-4D54-9A93-00025F12DED9}" type="datetimeFigureOut">
               <a:rPr kumimoji="1" lang="ja-JP" altLang="en-US" smtClean="0"/>
-              <a:t>2025/3/3</a:t>
+              <a:t>2026/6/4</a:t>
             </a:fld>
             <a:endParaRPr kumimoji="1" lang="ja-JP" altLang="en-US"/>
           </a:p>
@@ -2936,7 +2938,7 @@
           <a:p>
             <a:fld id="{E9CC885B-4903-4D54-9A93-00025F12DED9}" type="datetimeFigureOut">
               <a:rPr kumimoji="1" lang="ja-JP" altLang="en-US" smtClean="0"/>
-              <a:t>2025/3/3</a:t>
+              <a:t>2026/6/4</a:t>
             </a:fld>
             <a:endParaRPr kumimoji="1" lang="ja-JP" altLang="en-US"/>
           </a:p>
@@ -3209,7 +3211,7 @@
           <a:p>
             <a:fld id="{E9CC885B-4903-4D54-9A93-00025F12DED9}" type="datetimeFigureOut">
               <a:rPr kumimoji="1" lang="ja-JP" altLang="en-US" smtClean="0"/>
-              <a:t>2025/3/3</a:t>
+              <a:t>2026/6/4</a:t>
             </a:fld>
             <a:endParaRPr kumimoji="1" lang="ja-JP" altLang="en-US"/>
           </a:p>
@@ -3830,7 +3832,7 @@
         <p:spPr>
           <a:xfrm>
             <a:off x="567542" y="1216429"/>
-            <a:ext cx="6955750" cy="461665"/>
+            <a:ext cx="3262432" cy="461665"/>
           </a:xfrm>
           <a:prstGeom prst="rect">
             <a:avLst/>
@@ -3845,102 +3847,18 @@
           <a:p>
             <a:r>
               <a:rPr lang="ja-JP" altLang="en-US" sz="2400" dirty="0"/>
-              <a:t>描画先画面に描かれているものを消す関数です。</a:t>
+              <a:t>ループ文になります。</a:t>
             </a:r>
             <a:endParaRPr kumimoji="1" lang="en-US" altLang="ja-JP" sz="2400" dirty="0"/>
-          </a:p>
-        </p:txBody>
-      </p:sp>
-      <p:sp>
-        <p:nvSpPr>
-          <p:cNvPr id="8" name="テキスト ボックス 7">
-            <a:extLst>
-              <a:ext uri="{FF2B5EF4-FFF2-40B4-BE49-F238E27FC236}">
-                <a16:creationId xmlns:a16="http://schemas.microsoft.com/office/drawing/2014/main" id="{F8D103E3-5102-42E0-9CDB-309B97844FA3}"/>
-              </a:ext>
-            </a:extLst>
-          </p:cNvPr>
-          <p:cNvSpPr txBox="1"/>
-          <p:nvPr/>
-        </p:nvSpPr>
-        <p:spPr>
-          <a:xfrm>
-            <a:off x="567541" y="3187700"/>
-            <a:ext cx="11126764" cy="1938992"/>
-          </a:xfrm>
-          <a:prstGeom prst="rect">
-            <a:avLst/>
-          </a:prstGeom>
-          <a:noFill/>
-        </p:spPr>
-        <p:txBody>
-          <a:bodyPr wrap="none" rtlCol="0">
-            <a:spAutoFit/>
-          </a:bodyPr>
-          <a:lstStyle/>
-          <a:p>
-            <a:r>
-              <a:rPr lang="en-US" altLang="ja-JP" sz="2400" b="1" dirty="0" err="1">
-                <a:solidFill>
-                  <a:srgbClr val="FF0000"/>
-                </a:solidFill>
-              </a:rPr>
-              <a:t>ClearDrawScreen</a:t>
-            </a:r>
-            <a:r>
-              <a:rPr lang="ja-JP" altLang="en-US" sz="2400" b="1" dirty="0">
-                <a:solidFill>
-                  <a:srgbClr val="FF0000"/>
-                </a:solidFill>
-              </a:rPr>
-              <a:t>関数</a:t>
-            </a:r>
-            <a:r>
-              <a:rPr lang="ja-JP" altLang="en-US" sz="2400" dirty="0"/>
-              <a:t>は、描画先の画面に描かれているものを消す関数です。</a:t>
-            </a:r>
-            <a:endParaRPr lang="en-US" altLang="ja-JP" sz="2400" dirty="0"/>
-          </a:p>
-          <a:p>
-            <a:r>
-              <a:rPr kumimoji="1" lang="ja-JP" altLang="en-US" sz="2400" dirty="0"/>
-              <a:t>描画先は裏画面となっているので、裏画面が消されます。</a:t>
-            </a:r>
-            <a:endParaRPr kumimoji="1" lang="en-US" altLang="ja-JP" sz="2400" dirty="0"/>
-          </a:p>
-          <a:p>
-            <a:endParaRPr lang="en-US" altLang="ja-JP" sz="2400" dirty="0"/>
-          </a:p>
-          <a:p>
-            <a:r>
-              <a:rPr kumimoji="1" lang="ja-JP" altLang="en-US" sz="2400" dirty="0"/>
-              <a:t>この関数を呼ばないと、次から次へと上書きされてしまうので、</a:t>
-            </a:r>
-            <a:endParaRPr kumimoji="1" lang="en-US" altLang="ja-JP" sz="2400" dirty="0"/>
-          </a:p>
-          <a:p>
-            <a:r>
-              <a:rPr kumimoji="1" lang="ja-JP" altLang="en-US" sz="2400" b="1" dirty="0">
-                <a:solidFill>
-                  <a:srgbClr val="FF0000"/>
-                </a:solidFill>
-              </a:rPr>
-              <a:t>ループの頭に戻った時に、一度裏画面をきれいにしています。</a:t>
-            </a:r>
-            <a:endParaRPr kumimoji="1" lang="en-US" altLang="ja-JP" sz="2400" b="1" dirty="0">
-              <a:solidFill>
-                <a:srgbClr val="FF0000"/>
-              </a:solidFill>
-            </a:endParaRPr>
           </a:p>
         </p:txBody>
       </p:sp>
       <p:pic>
         <p:nvPicPr>
-          <p:cNvPr id="3" name="図 2">
+          <p:cNvPr id="5" name="図 4">
             <a:extLst>
               <a:ext uri="{FF2B5EF4-FFF2-40B4-BE49-F238E27FC236}">
-                <a16:creationId xmlns:a16="http://schemas.microsoft.com/office/drawing/2014/main" id="{28CE7052-6304-4919-B707-236D89911C74}"/>
+                <a16:creationId xmlns:a16="http://schemas.microsoft.com/office/drawing/2014/main" id="{566B14F4-A437-40DD-AB80-98211DA5A98B}"/>
               </a:ext>
             </a:extLst>
           </p:cNvPr>
@@ -3963,18 +3881,123 @@
         </p:blipFill>
         <p:spPr>
           <a:xfrm>
-            <a:off x="567540" y="1817794"/>
-            <a:ext cx="3404419" cy="938106"/>
+            <a:off x="567541" y="1817794"/>
+            <a:ext cx="5361265" cy="1230206"/>
           </a:xfrm>
           <a:prstGeom prst="rect">
             <a:avLst/>
           </a:prstGeom>
         </p:spPr>
       </p:pic>
+      <p:sp>
+        <p:nvSpPr>
+          <p:cNvPr id="8" name="テキスト ボックス 7">
+            <a:extLst>
+              <a:ext uri="{FF2B5EF4-FFF2-40B4-BE49-F238E27FC236}">
+                <a16:creationId xmlns:a16="http://schemas.microsoft.com/office/drawing/2014/main" id="{F8D103E3-5102-42E0-9CDB-309B97844FA3}"/>
+              </a:ext>
+            </a:extLst>
+          </p:cNvPr>
+          <p:cNvSpPr txBox="1"/>
+          <p:nvPr/>
+        </p:nvSpPr>
+        <p:spPr>
+          <a:xfrm>
+            <a:off x="567541" y="3187700"/>
+            <a:ext cx="10722807" cy="3046988"/>
+          </a:xfrm>
+          <a:prstGeom prst="rect">
+            <a:avLst/>
+          </a:prstGeom>
+          <a:noFill/>
+        </p:spPr>
+        <p:txBody>
+          <a:bodyPr wrap="none" rtlCol="0">
+            <a:spAutoFit/>
+          </a:bodyPr>
+          <a:lstStyle/>
+          <a:p>
+            <a:r>
+              <a:rPr lang="en-US" altLang="ja-JP" sz="2400" b="1" dirty="0" err="1">
+                <a:solidFill>
+                  <a:srgbClr val="FF0000"/>
+                </a:solidFill>
+              </a:rPr>
+              <a:t>ProcessMessage</a:t>
+            </a:r>
+            <a:r>
+              <a:rPr lang="ja-JP" altLang="en-US" sz="2400" b="1" dirty="0">
+                <a:solidFill>
+                  <a:srgbClr val="FF0000"/>
+                </a:solidFill>
+              </a:rPr>
+              <a:t>関数</a:t>
+            </a:r>
+            <a:r>
+              <a:rPr lang="ja-JP" altLang="en-US" sz="2400" dirty="0"/>
+              <a:t>は、ゲームが正常に動いているかを見張る関数です。</a:t>
+            </a:r>
+            <a:endParaRPr lang="en-US" altLang="ja-JP" sz="2400" dirty="0"/>
+          </a:p>
+          <a:p>
+            <a:r>
+              <a:rPr kumimoji="1" lang="en-US" altLang="ja-JP" sz="2400" dirty="0"/>
+              <a:t>while</a:t>
+            </a:r>
+            <a:r>
+              <a:rPr kumimoji="1" lang="ja-JP" altLang="en-US" sz="2400" dirty="0"/>
+              <a:t>文の中に書かれているので、何度も呼ばれることになります。</a:t>
+            </a:r>
+            <a:endParaRPr kumimoji="1" lang="en-US" altLang="ja-JP" sz="2400" dirty="0"/>
+          </a:p>
+          <a:p>
+            <a:endParaRPr kumimoji="1" lang="en-US" altLang="ja-JP" sz="2400" dirty="0"/>
+          </a:p>
+          <a:p>
+            <a:r>
+              <a:rPr kumimoji="1" lang="ja-JP" altLang="en-US" sz="2400" dirty="0"/>
+              <a:t>何らかの原因で問題が発生した場合はこのループを抜けて、</a:t>
+            </a:r>
+            <a:endParaRPr kumimoji="1" lang="en-US" altLang="ja-JP" sz="2400" dirty="0"/>
+          </a:p>
+          <a:p>
+            <a:r>
+              <a:rPr lang="ja-JP" altLang="en-US" sz="2400" dirty="0"/>
+              <a:t>ゲームが終了します。</a:t>
+            </a:r>
+            <a:endParaRPr kumimoji="1" lang="en-US" altLang="ja-JP" sz="2400" dirty="0"/>
+          </a:p>
+          <a:p>
+            <a:r>
+              <a:rPr lang="ja-JP" altLang="en-US" sz="2400" dirty="0"/>
+              <a:t>逆に問題がなければ無限にループします。</a:t>
+            </a:r>
+            <a:endParaRPr lang="en-US" altLang="ja-JP" sz="2400" dirty="0"/>
+          </a:p>
+          <a:p>
+            <a:endParaRPr kumimoji="1" lang="en-US" altLang="ja-JP" sz="2400" dirty="0"/>
+          </a:p>
+          <a:p>
+            <a:r>
+              <a:rPr kumimoji="1" lang="ja-JP" altLang="en-US" sz="2400" b="1" dirty="0">
+                <a:solidFill>
+                  <a:srgbClr val="00B050"/>
+                </a:solidFill>
+              </a:rPr>
+              <a:t>補足：もともとゲームは無限ループの中で動いています。</a:t>
+            </a:r>
+            <a:endParaRPr kumimoji="1" lang="en-US" altLang="ja-JP" sz="2400" b="1" dirty="0">
+              <a:solidFill>
+                <a:srgbClr val="00B050"/>
+              </a:solidFill>
+            </a:endParaRPr>
+          </a:p>
+        </p:txBody>
+      </p:sp>
     </p:spTree>
     <p:extLst>
       <p:ext uri="{BB962C8B-B14F-4D97-AF65-F5344CB8AC3E}">
-        <p14:creationId xmlns:p14="http://schemas.microsoft.com/office/powerpoint/2010/main" val="991515955"/>
+        <p14:creationId xmlns:p14="http://schemas.microsoft.com/office/powerpoint/2010/main" val="1967729018"/>
       </p:ext>
     </p:extLst>
   </p:cSld>
@@ -4051,7 +4074,7 @@
         <p:spPr>
           <a:xfrm>
             <a:off x="567542" y="1216429"/>
-            <a:ext cx="3570208" cy="461665"/>
+            <a:ext cx="6955750" cy="461665"/>
           </a:xfrm>
           <a:prstGeom prst="rect">
             <a:avLst/>
@@ -4066,9 +4089,9 @@
           <a:p>
             <a:r>
               <a:rPr lang="ja-JP" altLang="en-US" sz="2400" dirty="0"/>
-              <a:t>画面を裏返す関数です。</a:t>
-            </a:r>
-            <a:endParaRPr lang="en-US" altLang="ja-JP" sz="2400" dirty="0"/>
+              <a:t>描画先画面に描かれているものを消す関数です。</a:t>
+            </a:r>
+            <a:endParaRPr kumimoji="1" lang="en-US" altLang="ja-JP" sz="2400" dirty="0"/>
           </a:p>
         </p:txBody>
       </p:sp>
@@ -4087,7 +4110,7 @@
         <p:spPr>
           <a:xfrm>
             <a:off x="567541" y="3187700"/>
-            <a:ext cx="10956846" cy="1938992"/>
+            <a:ext cx="11126764" cy="1938992"/>
           </a:xfrm>
           <a:prstGeom prst="rect">
             <a:avLst/>
@@ -4106,7 +4129,7 @@
                   <a:srgbClr val="FF0000"/>
                 </a:solidFill>
               </a:rPr>
-              <a:t>ScreenFlip</a:t>
+              <a:t>ClearDrawScreen</a:t>
             </a:r>
             <a:r>
               <a:rPr lang="ja-JP" altLang="en-US" sz="2400" b="1" dirty="0">
@@ -4118,57 +4141,50 @@
             </a:r>
             <a:r>
               <a:rPr lang="ja-JP" altLang="en-US" sz="2400" dirty="0"/>
-              <a:t>は、画面を裏返す関数です。</a:t>
+              <a:t>は、描画先の画面に描かれているものを消す関数です。</a:t>
             </a:r>
             <a:endParaRPr lang="en-US" altLang="ja-JP" sz="2400" dirty="0"/>
           </a:p>
           <a:p>
             <a:r>
-              <a:rPr lang="ja-JP" altLang="en-US" sz="2400" dirty="0"/>
-              <a:t>裏画面に全部描画した後はこの関数を使って画面を裏返しましょう。</a:t>
-            </a:r>
+              <a:rPr kumimoji="1" lang="ja-JP" altLang="en-US" sz="2400" dirty="0"/>
+              <a:t>描画先は裏画面となっているので、裏画面が消されます。</a:t>
+            </a:r>
+            <a:endParaRPr kumimoji="1" lang="en-US" altLang="ja-JP" sz="2400" dirty="0"/>
+          </a:p>
+          <a:p>
             <a:endParaRPr lang="en-US" altLang="ja-JP" sz="2400" dirty="0"/>
           </a:p>
           <a:p>
-            <a:endParaRPr lang="en-US" altLang="ja-JP" sz="2400" dirty="0"/>
-          </a:p>
-          <a:p>
-            <a:r>
-              <a:rPr lang="en-US" altLang="ja-JP" sz="2400" b="1" dirty="0">
-                <a:solidFill>
-                  <a:srgbClr val="00B050"/>
-                </a:solidFill>
-              </a:rPr>
-              <a:t>MEMO</a:t>
-            </a:r>
-          </a:p>
-          <a:p>
-            <a:r>
-              <a:rPr lang="ja-JP" altLang="en-US" sz="2400" dirty="0"/>
-              <a:t>表裏の両面を使って画面を描画することを</a:t>
-            </a:r>
-            <a:r>
-              <a:rPr lang="ja-JP" altLang="en-US" sz="2400" b="1" dirty="0">
+            <a:r>
+              <a:rPr kumimoji="1" lang="ja-JP" altLang="en-US" sz="2400" dirty="0"/>
+              <a:t>この関数を呼ばないと、次から次へと上書きされてしまうので、</a:t>
+            </a:r>
+            <a:endParaRPr kumimoji="1" lang="en-US" altLang="ja-JP" sz="2400" dirty="0"/>
+          </a:p>
+          <a:p>
+            <a:r>
+              <a:rPr kumimoji="1" lang="ja-JP" altLang="en-US" sz="2400" b="1" dirty="0">
                 <a:solidFill>
                   <a:srgbClr val="FF0000"/>
                 </a:solidFill>
               </a:rPr>
-              <a:t>ダブルバッファリング</a:t>
-            </a:r>
-            <a:r>
-              <a:rPr lang="ja-JP" altLang="en-US" sz="2400" dirty="0"/>
-              <a:t>と言います。</a:t>
-            </a:r>
-            <a:endParaRPr lang="en-US" altLang="ja-JP" sz="2400" dirty="0"/>
+              <a:t>ループの頭に戻った時に、一度裏画面をきれいにしています。</a:t>
+            </a:r>
+            <a:endParaRPr kumimoji="1" lang="en-US" altLang="ja-JP" sz="2400" b="1" dirty="0">
+              <a:solidFill>
+                <a:srgbClr val="FF0000"/>
+              </a:solidFill>
+            </a:endParaRPr>
           </a:p>
         </p:txBody>
       </p:sp>
       <p:pic>
         <p:nvPicPr>
-          <p:cNvPr id="5" name="図 4">
+          <p:cNvPr id="3" name="図 2">
             <a:extLst>
               <a:ext uri="{FF2B5EF4-FFF2-40B4-BE49-F238E27FC236}">
-                <a16:creationId xmlns:a16="http://schemas.microsoft.com/office/drawing/2014/main" id="{77195ADB-7B86-4CBC-9551-3CB73D68C0AB}"/>
+                <a16:creationId xmlns:a16="http://schemas.microsoft.com/office/drawing/2014/main" id="{28CE7052-6304-4919-B707-236D89911C74}"/>
               </a:ext>
             </a:extLst>
           </p:cNvPr>
@@ -4191,8 +4207,8 @@
         </p:blipFill>
         <p:spPr>
           <a:xfrm>
-            <a:off x="567541" y="1817794"/>
-            <a:ext cx="2810660" cy="796603"/>
+            <a:off x="567540" y="1817794"/>
+            <a:ext cx="3404419" cy="938106"/>
           </a:xfrm>
           <a:prstGeom prst="rect">
             <a:avLst/>
@@ -4202,7 +4218,7 @@
     </p:spTree>
     <p:extLst>
       <p:ext uri="{BB962C8B-B14F-4D97-AF65-F5344CB8AC3E}">
-        <p14:creationId xmlns:p14="http://schemas.microsoft.com/office/powerpoint/2010/main" val="2520806651"/>
+        <p14:creationId xmlns:p14="http://schemas.microsoft.com/office/powerpoint/2010/main" val="991515955"/>
       </p:ext>
     </p:extLst>
   </p:cSld>
@@ -4279,7 +4295,7 @@
         <p:spPr>
           <a:xfrm>
             <a:off x="567542" y="1216429"/>
-            <a:ext cx="6955750" cy="461665"/>
+            <a:ext cx="3570208" cy="461665"/>
           </a:xfrm>
           <a:prstGeom prst="rect">
             <a:avLst/>
@@ -4294,7 +4310,7 @@
           <a:p>
             <a:r>
               <a:rPr lang="ja-JP" altLang="en-US" sz="2400" dirty="0"/>
-              <a:t>メインループを抜けるとゲーム終了となります。</a:t>
+              <a:t>画面を裏返す関数です。</a:t>
             </a:r>
             <a:endParaRPr lang="en-US" altLang="ja-JP" sz="2400" dirty="0"/>
           </a:p>
@@ -4315,7 +4331,7 @@
         <p:spPr>
           <a:xfrm>
             <a:off x="567541" y="3187700"/>
-            <a:ext cx="6918882" cy="830997"/>
+            <a:ext cx="9725739" cy="830997"/>
           </a:xfrm>
           <a:prstGeom prst="rect">
             <a:avLst/>
@@ -4334,7 +4350,7 @@
                   <a:srgbClr val="FF0000"/>
                 </a:solidFill>
               </a:rPr>
-              <a:t>DxLib_End</a:t>
+              <a:t>ScreenFlip</a:t>
             </a:r>
             <a:r>
               <a:rPr lang="ja-JP" altLang="en-US" sz="2400" b="1" dirty="0">
@@ -4346,26 +4362,14 @@
             </a:r>
             <a:r>
               <a:rPr lang="ja-JP" altLang="en-US" sz="2400" dirty="0"/>
-              <a:t>は、</a:t>
-            </a:r>
-            <a:r>
-              <a:rPr lang="en-US" altLang="ja-JP" sz="2400" dirty="0" err="1"/>
-              <a:t>DxLib</a:t>
-            </a:r>
+              <a:t>は、画面を裏返す関数です。</a:t>
+            </a:r>
+            <a:endParaRPr lang="en-US" altLang="ja-JP" sz="2400" dirty="0"/>
+          </a:p>
+          <a:p>
             <a:r>
               <a:rPr lang="ja-JP" altLang="en-US" sz="2400" dirty="0"/>
-              <a:t>を終了する関数です。</a:t>
-            </a:r>
-            <a:endParaRPr lang="en-US" altLang="ja-JP" sz="2400" dirty="0"/>
-          </a:p>
-          <a:p>
-            <a:r>
-              <a:rPr lang="en-US" altLang="ja-JP" sz="2400" dirty="0" err="1"/>
-              <a:t>DxLib</a:t>
-            </a:r>
-            <a:r>
-              <a:rPr lang="ja-JP" altLang="en-US" sz="2400" dirty="0"/>
-              <a:t>側で処理したものの後片付けをします。</a:t>
+              <a:t>裏画面に全部描画した後はこの関数を使って画面を裏返しましょう。</a:t>
             </a:r>
             <a:endParaRPr lang="en-US" altLang="ja-JP" sz="2400" dirty="0"/>
           </a:p>
@@ -4373,10 +4377,10 @@
       </p:sp>
       <p:pic>
         <p:nvPicPr>
-          <p:cNvPr id="3" name="図 2">
+          <p:cNvPr id="5" name="図 4">
             <a:extLst>
               <a:ext uri="{FF2B5EF4-FFF2-40B4-BE49-F238E27FC236}">
-                <a16:creationId xmlns:a16="http://schemas.microsoft.com/office/drawing/2014/main" id="{5785B779-CF2B-46A1-ADAB-144AFD8102E1}"/>
+                <a16:creationId xmlns:a16="http://schemas.microsoft.com/office/drawing/2014/main" id="{77195ADB-7B86-4CBC-9551-3CB73D68C0AB}"/>
               </a:ext>
             </a:extLst>
           </p:cNvPr>
@@ -4399,8 +4403,8 @@
         </p:blipFill>
         <p:spPr>
           <a:xfrm>
-            <a:off x="567541" y="1678093"/>
-            <a:ext cx="9855586" cy="584775"/>
+            <a:off x="567541" y="1817794"/>
+            <a:ext cx="2810660" cy="796603"/>
           </a:xfrm>
           <a:prstGeom prst="rect">
             <a:avLst/>
@@ -4410,7 +4414,7 @@
     </p:spTree>
     <p:extLst>
       <p:ext uri="{BB962C8B-B14F-4D97-AF65-F5344CB8AC3E}">
-        <p14:creationId xmlns:p14="http://schemas.microsoft.com/office/powerpoint/2010/main" val="2401277647"/>
+        <p14:creationId xmlns:p14="http://schemas.microsoft.com/office/powerpoint/2010/main" val="2520806651"/>
       </p:ext>
     </p:extLst>
   </p:cSld>
@@ -4468,6 +4472,810 @@
             <a:r>
               <a:rPr kumimoji="1" lang="ja-JP" altLang="en-US" sz="3200" b="1" u="sng" dirty="0"/>
               <a:t>最低限のプログラム 解説</a:t>
+            </a:r>
+          </a:p>
+        </p:txBody>
+      </p:sp>
+      <p:sp>
+        <p:nvSpPr>
+          <p:cNvPr id="6" name="テキスト ボックス 5">
+            <a:extLst>
+              <a:ext uri="{FF2B5EF4-FFF2-40B4-BE49-F238E27FC236}">
+                <a16:creationId xmlns:a16="http://schemas.microsoft.com/office/drawing/2014/main" id="{55830AD6-028B-4C4E-80BF-B70DFC1C3A46}"/>
+              </a:ext>
+            </a:extLst>
+          </p:cNvPr>
+          <p:cNvSpPr txBox="1"/>
+          <p:nvPr/>
+        </p:nvSpPr>
+        <p:spPr>
+          <a:xfrm>
+            <a:off x="567542" y="1216429"/>
+            <a:ext cx="6955750" cy="461665"/>
+          </a:xfrm>
+          <a:prstGeom prst="rect">
+            <a:avLst/>
+          </a:prstGeom>
+          <a:noFill/>
+        </p:spPr>
+        <p:txBody>
+          <a:bodyPr wrap="none" rtlCol="0">
+            <a:spAutoFit/>
+          </a:bodyPr>
+          <a:lstStyle/>
+          <a:p>
+            <a:r>
+              <a:rPr lang="ja-JP" altLang="en-US" sz="2400" dirty="0"/>
+              <a:t>メインループを抜けるとゲーム終了となります。</a:t>
+            </a:r>
+            <a:endParaRPr lang="en-US" altLang="ja-JP" sz="2400" dirty="0"/>
+          </a:p>
+        </p:txBody>
+      </p:sp>
+      <p:sp>
+        <p:nvSpPr>
+          <p:cNvPr id="8" name="テキスト ボックス 7">
+            <a:extLst>
+              <a:ext uri="{FF2B5EF4-FFF2-40B4-BE49-F238E27FC236}">
+                <a16:creationId xmlns:a16="http://schemas.microsoft.com/office/drawing/2014/main" id="{F8D103E3-5102-42E0-9CDB-309B97844FA3}"/>
+              </a:ext>
+            </a:extLst>
+          </p:cNvPr>
+          <p:cNvSpPr txBox="1"/>
+          <p:nvPr/>
+        </p:nvSpPr>
+        <p:spPr>
+          <a:xfrm>
+            <a:off x="567541" y="3187700"/>
+            <a:ext cx="6918882" cy="830997"/>
+          </a:xfrm>
+          <a:prstGeom prst="rect">
+            <a:avLst/>
+          </a:prstGeom>
+          <a:noFill/>
+        </p:spPr>
+        <p:txBody>
+          <a:bodyPr wrap="none" rtlCol="0">
+            <a:spAutoFit/>
+          </a:bodyPr>
+          <a:lstStyle/>
+          <a:p>
+            <a:r>
+              <a:rPr lang="en-US" altLang="ja-JP" sz="2400" b="1" dirty="0" err="1">
+                <a:solidFill>
+                  <a:srgbClr val="FF0000"/>
+                </a:solidFill>
+              </a:rPr>
+              <a:t>DxLib_End</a:t>
+            </a:r>
+            <a:r>
+              <a:rPr lang="ja-JP" altLang="en-US" sz="2400" b="1" dirty="0">
+                <a:solidFill>
+                  <a:srgbClr val="FF0000"/>
+                </a:solidFill>
+              </a:rPr>
+              <a:t>関数</a:t>
+            </a:r>
+            <a:r>
+              <a:rPr lang="ja-JP" altLang="en-US" sz="2400" dirty="0"/>
+              <a:t>は、</a:t>
+            </a:r>
+            <a:r>
+              <a:rPr lang="en-US" altLang="ja-JP" sz="2400" dirty="0" err="1"/>
+              <a:t>DxLib</a:t>
+            </a:r>
+            <a:r>
+              <a:rPr lang="ja-JP" altLang="en-US" sz="2400" dirty="0"/>
+              <a:t>を終了する関数です。</a:t>
+            </a:r>
+            <a:endParaRPr lang="en-US" altLang="ja-JP" sz="2400" dirty="0"/>
+          </a:p>
+          <a:p>
+            <a:r>
+              <a:rPr lang="en-US" altLang="ja-JP" sz="2400" dirty="0" err="1"/>
+              <a:t>DxLib</a:t>
+            </a:r>
+            <a:r>
+              <a:rPr lang="ja-JP" altLang="en-US" sz="2400" dirty="0"/>
+              <a:t>側で処理したものの後片付けをします。</a:t>
+            </a:r>
+            <a:endParaRPr lang="en-US" altLang="ja-JP" sz="2400" dirty="0"/>
+          </a:p>
+        </p:txBody>
+      </p:sp>
+      <p:pic>
+        <p:nvPicPr>
+          <p:cNvPr id="3" name="図 2">
+            <a:extLst>
+              <a:ext uri="{FF2B5EF4-FFF2-40B4-BE49-F238E27FC236}">
+                <a16:creationId xmlns:a16="http://schemas.microsoft.com/office/drawing/2014/main" id="{5785B779-CF2B-46A1-ADAB-144AFD8102E1}"/>
+              </a:ext>
+            </a:extLst>
+          </p:cNvPr>
+          <p:cNvPicPr>
+            <a:picLocks noChangeAspect="1"/>
+          </p:cNvPicPr>
+          <p:nvPr/>
+        </p:nvPicPr>
+        <p:blipFill>
+          <a:blip r:embed="rId2">
+            <a:extLst>
+              <a:ext uri="{28A0092B-C50C-407E-A947-70E740481C1C}">
+                <a14:useLocalDpi xmlns:a14="http://schemas.microsoft.com/office/drawing/2010/main" val="0"/>
+              </a:ext>
+            </a:extLst>
+          </a:blip>
+          <a:stretch>
+            <a:fillRect/>
+          </a:stretch>
+        </p:blipFill>
+        <p:spPr>
+          <a:xfrm>
+            <a:off x="567541" y="1678093"/>
+            <a:ext cx="9855586" cy="584775"/>
+          </a:xfrm>
+          <a:prstGeom prst="rect">
+            <a:avLst/>
+          </a:prstGeom>
+        </p:spPr>
+      </p:pic>
+    </p:spTree>
+    <p:extLst>
+      <p:ext uri="{BB962C8B-B14F-4D97-AF65-F5344CB8AC3E}">
+        <p14:creationId xmlns:p14="http://schemas.microsoft.com/office/powerpoint/2010/main" val="2401277647"/>
+      </p:ext>
+    </p:extLst>
+  </p:cSld>
+  <p:clrMapOvr>
+    <a:masterClrMapping/>
+  </p:clrMapOvr>
+</p:sld>
+</file>
+
+<file path=ppt/slides/slide14.xml><?xml version="1.0" encoding="utf-8"?>
+<p:sld xmlns:a="http://schemas.openxmlformats.org/drawingml/2006/main" xmlns:r="http://schemas.openxmlformats.org/officeDocument/2006/relationships" xmlns:p="http://schemas.openxmlformats.org/presentationml/2006/main">
+  <p:cSld>
+    <p:spTree>
+      <p:nvGrpSpPr>
+        <p:cNvPr id="1" name=""/>
+        <p:cNvGrpSpPr/>
+        <p:nvPr/>
+      </p:nvGrpSpPr>
+      <p:grpSpPr>
+        <a:xfrm>
+          <a:off x="0" y="0"/>
+          <a:ext cx="0" cy="0"/>
+          <a:chOff x="0" y="0"/>
+          <a:chExt cx="0" cy="0"/>
+        </a:xfrm>
+      </p:grpSpPr>
+      <p:sp>
+        <p:nvSpPr>
+          <p:cNvPr id="4" name="テキスト ボックス 3">
+            <a:extLst>
+              <a:ext uri="{FF2B5EF4-FFF2-40B4-BE49-F238E27FC236}">
+                <a16:creationId xmlns:a16="http://schemas.microsoft.com/office/drawing/2014/main" id="{5A13BF46-B8C5-48AA-8308-C9ECFF431A18}"/>
+              </a:ext>
+            </a:extLst>
+          </p:cNvPr>
+          <p:cNvSpPr txBox="1"/>
+          <p:nvPr/>
+        </p:nvSpPr>
+        <p:spPr>
+          <a:xfrm>
+            <a:off x="567542" y="491954"/>
+            <a:ext cx="5226111" cy="584775"/>
+          </a:xfrm>
+          <a:prstGeom prst="rect">
+            <a:avLst/>
+          </a:prstGeom>
+          <a:noFill/>
+        </p:spPr>
+        <p:txBody>
+          <a:bodyPr wrap="none" rtlCol="0">
+            <a:spAutoFit/>
+          </a:bodyPr>
+          <a:lstStyle/>
+          <a:p>
+            <a:r>
+              <a:rPr kumimoji="1" lang="ja-JP" altLang="en-US" sz="3200" b="1" u="sng" dirty="0"/>
+              <a:t>最低限のプログラム まとめ</a:t>
+            </a:r>
+          </a:p>
+        </p:txBody>
+      </p:sp>
+      <p:sp>
+        <p:nvSpPr>
+          <p:cNvPr id="6" name="テキスト ボックス 5">
+            <a:extLst>
+              <a:ext uri="{FF2B5EF4-FFF2-40B4-BE49-F238E27FC236}">
+                <a16:creationId xmlns:a16="http://schemas.microsoft.com/office/drawing/2014/main" id="{55830AD6-028B-4C4E-80BF-B70DFC1C3A46}"/>
+              </a:ext>
+            </a:extLst>
+          </p:cNvPr>
+          <p:cNvSpPr txBox="1"/>
+          <p:nvPr/>
+        </p:nvSpPr>
+        <p:spPr>
+          <a:xfrm>
+            <a:off x="567542" y="1216429"/>
+            <a:ext cx="5724644" cy="461665"/>
+          </a:xfrm>
+          <a:prstGeom prst="rect">
+            <a:avLst/>
+          </a:prstGeom>
+          <a:noFill/>
+        </p:spPr>
+        <p:txBody>
+          <a:bodyPr wrap="none" rtlCol="0">
+            <a:spAutoFit/>
+          </a:bodyPr>
+          <a:lstStyle/>
+          <a:p>
+            <a:r>
+              <a:rPr lang="ja-JP" altLang="en-US" sz="2400" dirty="0"/>
+              <a:t>ゲームのプログラムの流れになります。</a:t>
+            </a:r>
+            <a:endParaRPr lang="en-US" altLang="ja-JP" sz="2400" dirty="0"/>
+          </a:p>
+        </p:txBody>
+      </p:sp>
+      <p:grpSp>
+        <p:nvGrpSpPr>
+          <p:cNvPr id="26" name="グループ化 25">
+            <a:extLst>
+              <a:ext uri="{FF2B5EF4-FFF2-40B4-BE49-F238E27FC236}">
+                <a16:creationId xmlns:a16="http://schemas.microsoft.com/office/drawing/2014/main" id="{18BF4D8E-B4D4-4E8D-9E69-88114544336F}"/>
+              </a:ext>
+            </a:extLst>
+          </p:cNvPr>
+          <p:cNvGrpSpPr/>
+          <p:nvPr/>
+        </p:nvGrpSpPr>
+        <p:grpSpPr>
+          <a:xfrm>
+            <a:off x="567542" y="2345266"/>
+            <a:ext cx="9643258" cy="2726268"/>
+            <a:chOff x="567542" y="2260599"/>
+            <a:chExt cx="8505262" cy="1608668"/>
+          </a:xfrm>
+        </p:grpSpPr>
+        <p:sp>
+          <p:nvSpPr>
+            <p:cNvPr id="7" name="正方形/長方形 6">
+              <a:extLst>
+                <a:ext uri="{FF2B5EF4-FFF2-40B4-BE49-F238E27FC236}">
+                  <a16:creationId xmlns:a16="http://schemas.microsoft.com/office/drawing/2014/main" id="{25A40E44-E042-41F7-B66B-7CB4AB7533FD}"/>
+                </a:ext>
+              </a:extLst>
+            </p:cNvPr>
+            <p:cNvSpPr/>
+            <p:nvPr/>
+          </p:nvSpPr>
+          <p:spPr>
+            <a:xfrm>
+              <a:off x="2584379" y="3327399"/>
+              <a:ext cx="1192436" cy="541867"/>
+            </a:xfrm>
+            <a:prstGeom prst="rect">
+              <a:avLst/>
+            </a:prstGeom>
+          </p:spPr>
+          <p:style>
+            <a:lnRef idx="2">
+              <a:schemeClr val="accent6">
+                <a:shade val="50000"/>
+              </a:schemeClr>
+            </a:lnRef>
+            <a:fillRef idx="1">
+              <a:schemeClr val="accent6"/>
+            </a:fillRef>
+            <a:effectRef idx="0">
+              <a:schemeClr val="accent6"/>
+            </a:effectRef>
+            <a:fontRef idx="minor">
+              <a:schemeClr val="lt1"/>
+            </a:fontRef>
+          </p:style>
+          <p:txBody>
+            <a:bodyPr rtlCol="0" anchor="ctr"/>
+            <a:lstStyle/>
+            <a:p>
+              <a:pPr algn="ctr"/>
+              <a:r>
+                <a:rPr kumimoji="1" lang="ja-JP" altLang="en-US" b="1" dirty="0"/>
+                <a:t>裏面消す</a:t>
+              </a:r>
+            </a:p>
+          </p:txBody>
+        </p:sp>
+        <p:sp>
+          <p:nvSpPr>
+            <p:cNvPr id="9" name="正方形/長方形 8">
+              <a:extLst>
+                <a:ext uri="{FF2B5EF4-FFF2-40B4-BE49-F238E27FC236}">
+                  <a16:creationId xmlns:a16="http://schemas.microsoft.com/office/drawing/2014/main" id="{0B6EE79A-623B-4B04-B8A9-21006527032C}"/>
+                </a:ext>
+              </a:extLst>
+            </p:cNvPr>
+            <p:cNvSpPr/>
+            <p:nvPr/>
+          </p:nvSpPr>
+          <p:spPr>
+            <a:xfrm>
+              <a:off x="4129546" y="2260599"/>
+              <a:ext cx="1192436" cy="541867"/>
+            </a:xfrm>
+            <a:prstGeom prst="rect">
+              <a:avLst/>
+            </a:prstGeom>
+          </p:spPr>
+          <p:style>
+            <a:lnRef idx="2">
+              <a:schemeClr val="accent6">
+                <a:shade val="50000"/>
+              </a:schemeClr>
+            </a:lnRef>
+            <a:fillRef idx="1">
+              <a:schemeClr val="accent6"/>
+            </a:fillRef>
+            <a:effectRef idx="0">
+              <a:schemeClr val="accent6"/>
+            </a:effectRef>
+            <a:fontRef idx="minor">
+              <a:schemeClr val="lt1"/>
+            </a:fontRef>
+          </p:style>
+          <p:txBody>
+            <a:bodyPr rtlCol="0" anchor="ctr"/>
+            <a:lstStyle/>
+            <a:p>
+              <a:pPr algn="ctr"/>
+              <a:r>
+                <a:rPr kumimoji="1" lang="ja-JP" altLang="en-US" b="1" dirty="0"/>
+                <a:t>裏面描く</a:t>
+              </a:r>
+            </a:p>
+          </p:txBody>
+        </p:sp>
+        <p:sp>
+          <p:nvSpPr>
+            <p:cNvPr id="10" name="正方形/長方形 9">
+              <a:extLst>
+                <a:ext uri="{FF2B5EF4-FFF2-40B4-BE49-F238E27FC236}">
+                  <a16:creationId xmlns:a16="http://schemas.microsoft.com/office/drawing/2014/main" id="{EFB735B8-DE41-4691-8CB9-98C619EEA417}"/>
+                </a:ext>
+              </a:extLst>
+            </p:cNvPr>
+            <p:cNvSpPr/>
+            <p:nvPr/>
+          </p:nvSpPr>
+          <p:spPr>
+            <a:xfrm>
+              <a:off x="5602835" y="3327399"/>
+              <a:ext cx="1192436" cy="541867"/>
+            </a:xfrm>
+            <a:prstGeom prst="rect">
+              <a:avLst/>
+            </a:prstGeom>
+          </p:spPr>
+          <p:style>
+            <a:lnRef idx="2">
+              <a:schemeClr val="accent6">
+                <a:shade val="50000"/>
+              </a:schemeClr>
+            </a:lnRef>
+            <a:fillRef idx="1">
+              <a:schemeClr val="accent6"/>
+            </a:fillRef>
+            <a:effectRef idx="0">
+              <a:schemeClr val="accent6"/>
+            </a:effectRef>
+            <a:fontRef idx="minor">
+              <a:schemeClr val="lt1"/>
+            </a:fontRef>
+          </p:style>
+          <p:txBody>
+            <a:bodyPr rtlCol="0" anchor="ctr"/>
+            <a:lstStyle/>
+            <a:p>
+              <a:pPr algn="ctr"/>
+              <a:r>
+                <a:rPr kumimoji="1" lang="ja-JP" altLang="en-US" b="1" dirty="0"/>
+                <a:t>フリップ</a:t>
+              </a:r>
+            </a:p>
+          </p:txBody>
+        </p:sp>
+        <p:sp>
+          <p:nvSpPr>
+            <p:cNvPr id="11" name="正方形/長方形 10">
+              <a:extLst>
+                <a:ext uri="{FF2B5EF4-FFF2-40B4-BE49-F238E27FC236}">
+                  <a16:creationId xmlns:a16="http://schemas.microsoft.com/office/drawing/2014/main" id="{1DEB1432-6CC0-48D7-A0BD-05C78E046839}"/>
+                </a:ext>
+              </a:extLst>
+            </p:cNvPr>
+            <p:cNvSpPr/>
+            <p:nvPr/>
+          </p:nvSpPr>
+          <p:spPr>
+            <a:xfrm>
+              <a:off x="7880368" y="3318932"/>
+              <a:ext cx="1192436" cy="541867"/>
+            </a:xfrm>
+            <a:prstGeom prst="rect">
+              <a:avLst/>
+            </a:prstGeom>
+          </p:spPr>
+          <p:style>
+            <a:lnRef idx="2">
+              <a:schemeClr val="accent1">
+                <a:shade val="50000"/>
+              </a:schemeClr>
+            </a:lnRef>
+            <a:fillRef idx="1">
+              <a:schemeClr val="accent1"/>
+            </a:fillRef>
+            <a:effectRef idx="0">
+              <a:schemeClr val="accent1"/>
+            </a:effectRef>
+            <a:fontRef idx="minor">
+              <a:schemeClr val="lt1"/>
+            </a:fontRef>
+          </p:style>
+          <p:txBody>
+            <a:bodyPr rtlCol="0" anchor="ctr"/>
+            <a:lstStyle/>
+            <a:p>
+              <a:pPr algn="ctr"/>
+              <a:r>
+                <a:rPr kumimoji="1" lang="ja-JP" altLang="en-US" b="1" dirty="0"/>
+                <a:t>終了</a:t>
+              </a:r>
+            </a:p>
+          </p:txBody>
+        </p:sp>
+        <p:sp>
+          <p:nvSpPr>
+            <p:cNvPr id="12" name="正方形/長方形 11">
+              <a:extLst>
+                <a:ext uri="{FF2B5EF4-FFF2-40B4-BE49-F238E27FC236}">
+                  <a16:creationId xmlns:a16="http://schemas.microsoft.com/office/drawing/2014/main" id="{90711078-D57A-4718-9945-D82DB095FCB7}"/>
+                </a:ext>
+              </a:extLst>
+            </p:cNvPr>
+            <p:cNvSpPr/>
+            <p:nvPr/>
+          </p:nvSpPr>
+          <p:spPr>
+            <a:xfrm>
+              <a:off x="567542" y="3327400"/>
+              <a:ext cx="1192436" cy="541867"/>
+            </a:xfrm>
+            <a:prstGeom prst="rect">
+              <a:avLst/>
+            </a:prstGeom>
+          </p:spPr>
+          <p:style>
+            <a:lnRef idx="2">
+              <a:schemeClr val="accent1">
+                <a:shade val="50000"/>
+              </a:schemeClr>
+            </a:lnRef>
+            <a:fillRef idx="1">
+              <a:schemeClr val="accent1"/>
+            </a:fillRef>
+            <a:effectRef idx="0">
+              <a:schemeClr val="accent1"/>
+            </a:effectRef>
+            <a:fontRef idx="minor">
+              <a:schemeClr val="lt1"/>
+            </a:fontRef>
+          </p:style>
+          <p:txBody>
+            <a:bodyPr rtlCol="0" anchor="ctr"/>
+            <a:lstStyle/>
+            <a:p>
+              <a:pPr algn="ctr"/>
+              <a:r>
+                <a:rPr kumimoji="1" lang="ja-JP" altLang="en-US" b="1" dirty="0"/>
+                <a:t>初期化</a:t>
+              </a:r>
+            </a:p>
+          </p:txBody>
+        </p:sp>
+        <p:cxnSp>
+          <p:nvCxnSpPr>
+            <p:cNvPr id="13" name="直線矢印コネクタ 12">
+              <a:extLst>
+                <a:ext uri="{FF2B5EF4-FFF2-40B4-BE49-F238E27FC236}">
+                  <a16:creationId xmlns:a16="http://schemas.microsoft.com/office/drawing/2014/main" id="{123A7E4D-0912-4B72-A770-C9353BF3152F}"/>
+                </a:ext>
+              </a:extLst>
+            </p:cNvPr>
+            <p:cNvCxnSpPr>
+              <a:stCxn id="12" idx="3"/>
+              <a:endCxn id="7" idx="1"/>
+            </p:cNvCxnSpPr>
+            <p:nvPr/>
+          </p:nvCxnSpPr>
+          <p:spPr>
+            <a:xfrm flipV="1">
+              <a:off x="1759978" y="3598333"/>
+              <a:ext cx="824401" cy="1"/>
+            </a:xfrm>
+            <a:prstGeom prst="straightConnector1">
+              <a:avLst/>
+            </a:prstGeom>
+            <a:ln w="38100">
+              <a:solidFill>
+                <a:srgbClr val="FF0000"/>
+              </a:solidFill>
+              <a:tailEnd type="triangle"/>
+            </a:ln>
+          </p:spPr>
+          <p:style>
+            <a:lnRef idx="1">
+              <a:schemeClr val="accent1"/>
+            </a:lnRef>
+            <a:fillRef idx="0">
+              <a:schemeClr val="accent1"/>
+            </a:fillRef>
+            <a:effectRef idx="0">
+              <a:schemeClr val="accent1"/>
+            </a:effectRef>
+            <a:fontRef idx="minor">
+              <a:schemeClr val="tx1"/>
+            </a:fontRef>
+          </p:style>
+        </p:cxnSp>
+        <p:cxnSp>
+          <p:nvCxnSpPr>
+            <p:cNvPr id="14" name="直線矢印コネクタ 13">
+              <a:extLst>
+                <a:ext uri="{FF2B5EF4-FFF2-40B4-BE49-F238E27FC236}">
+                  <a16:creationId xmlns:a16="http://schemas.microsoft.com/office/drawing/2014/main" id="{FB97BE37-0BA6-47CC-8949-916AD7A20657}"/>
+                </a:ext>
+              </a:extLst>
+            </p:cNvPr>
+            <p:cNvCxnSpPr>
+              <a:cxnSpLocks/>
+              <a:stCxn id="7" idx="0"/>
+              <a:endCxn id="9" idx="1"/>
+            </p:cNvCxnSpPr>
+            <p:nvPr/>
+          </p:nvCxnSpPr>
+          <p:spPr>
+            <a:xfrm flipV="1">
+              <a:off x="3180597" y="2531533"/>
+              <a:ext cx="948949" cy="795866"/>
+            </a:xfrm>
+            <a:prstGeom prst="straightConnector1">
+              <a:avLst/>
+            </a:prstGeom>
+            <a:ln w="38100">
+              <a:solidFill>
+                <a:srgbClr val="7030A0"/>
+              </a:solidFill>
+              <a:tailEnd type="triangle"/>
+            </a:ln>
+          </p:spPr>
+          <p:style>
+            <a:lnRef idx="1">
+              <a:schemeClr val="accent1"/>
+            </a:lnRef>
+            <a:fillRef idx="0">
+              <a:schemeClr val="accent1"/>
+            </a:fillRef>
+            <a:effectRef idx="0">
+              <a:schemeClr val="accent1"/>
+            </a:effectRef>
+            <a:fontRef idx="minor">
+              <a:schemeClr val="tx1"/>
+            </a:fontRef>
+          </p:style>
+        </p:cxnSp>
+        <p:cxnSp>
+          <p:nvCxnSpPr>
+            <p:cNvPr id="17" name="直線矢印コネクタ 16">
+              <a:extLst>
+                <a:ext uri="{FF2B5EF4-FFF2-40B4-BE49-F238E27FC236}">
+                  <a16:creationId xmlns:a16="http://schemas.microsoft.com/office/drawing/2014/main" id="{E16230E4-B4A6-4231-9295-85D8B4C67AD4}"/>
+                </a:ext>
+              </a:extLst>
+            </p:cNvPr>
+            <p:cNvCxnSpPr>
+              <a:cxnSpLocks/>
+              <a:stCxn id="9" idx="3"/>
+              <a:endCxn id="10" idx="0"/>
+            </p:cNvCxnSpPr>
+            <p:nvPr/>
+          </p:nvCxnSpPr>
+          <p:spPr>
+            <a:xfrm>
+              <a:off x="5321982" y="2531533"/>
+              <a:ext cx="877071" cy="795866"/>
+            </a:xfrm>
+            <a:prstGeom prst="straightConnector1">
+              <a:avLst/>
+            </a:prstGeom>
+            <a:ln w="38100">
+              <a:solidFill>
+                <a:srgbClr val="7030A0"/>
+              </a:solidFill>
+              <a:tailEnd type="triangle"/>
+            </a:ln>
+          </p:spPr>
+          <p:style>
+            <a:lnRef idx="1">
+              <a:schemeClr val="accent1"/>
+            </a:lnRef>
+            <a:fillRef idx="0">
+              <a:schemeClr val="accent1"/>
+            </a:fillRef>
+            <a:effectRef idx="0">
+              <a:schemeClr val="accent1"/>
+            </a:effectRef>
+            <a:fontRef idx="minor">
+              <a:schemeClr val="tx1"/>
+            </a:fontRef>
+          </p:style>
+        </p:cxnSp>
+        <p:cxnSp>
+          <p:nvCxnSpPr>
+            <p:cNvPr id="20" name="直線矢印コネクタ 19">
+              <a:extLst>
+                <a:ext uri="{FF2B5EF4-FFF2-40B4-BE49-F238E27FC236}">
+                  <a16:creationId xmlns:a16="http://schemas.microsoft.com/office/drawing/2014/main" id="{EDEFF9E7-0DD4-4B84-A5C5-103D8FB08317}"/>
+                </a:ext>
+              </a:extLst>
+            </p:cNvPr>
+            <p:cNvCxnSpPr>
+              <a:cxnSpLocks/>
+              <a:stCxn id="10" idx="1"/>
+              <a:endCxn id="7" idx="3"/>
+            </p:cNvCxnSpPr>
+            <p:nvPr/>
+          </p:nvCxnSpPr>
+          <p:spPr>
+            <a:xfrm flipH="1">
+              <a:off x="3776815" y="3598333"/>
+              <a:ext cx="1826020" cy="0"/>
+            </a:xfrm>
+            <a:prstGeom prst="straightConnector1">
+              <a:avLst/>
+            </a:prstGeom>
+            <a:ln w="38100">
+              <a:solidFill>
+                <a:srgbClr val="7030A0"/>
+              </a:solidFill>
+              <a:tailEnd type="triangle"/>
+            </a:ln>
+          </p:spPr>
+          <p:style>
+            <a:lnRef idx="1">
+              <a:schemeClr val="accent1"/>
+            </a:lnRef>
+            <a:fillRef idx="0">
+              <a:schemeClr val="accent1"/>
+            </a:fillRef>
+            <a:effectRef idx="0">
+              <a:schemeClr val="accent1"/>
+            </a:effectRef>
+            <a:fontRef idx="minor">
+              <a:schemeClr val="tx1"/>
+            </a:fontRef>
+          </p:style>
+        </p:cxnSp>
+        <p:cxnSp>
+          <p:nvCxnSpPr>
+            <p:cNvPr id="23" name="直線矢印コネクタ 22">
+              <a:extLst>
+                <a:ext uri="{FF2B5EF4-FFF2-40B4-BE49-F238E27FC236}">
+                  <a16:creationId xmlns:a16="http://schemas.microsoft.com/office/drawing/2014/main" id="{AC304E6D-BDFF-4A69-8298-0F4A2478007C}"/>
+                </a:ext>
+              </a:extLst>
+            </p:cNvPr>
+            <p:cNvCxnSpPr>
+              <a:cxnSpLocks/>
+              <a:stCxn id="10" idx="3"/>
+              <a:endCxn id="11" idx="1"/>
+            </p:cNvCxnSpPr>
+            <p:nvPr/>
+          </p:nvCxnSpPr>
+          <p:spPr>
+            <a:xfrm flipV="1">
+              <a:off x="6795271" y="3589866"/>
+              <a:ext cx="1085097" cy="8467"/>
+            </a:xfrm>
+            <a:prstGeom prst="straightConnector1">
+              <a:avLst/>
+            </a:prstGeom>
+            <a:ln w="38100">
+              <a:solidFill>
+                <a:srgbClr val="FF0000"/>
+              </a:solidFill>
+              <a:tailEnd type="triangle"/>
+            </a:ln>
+          </p:spPr>
+          <p:style>
+            <a:lnRef idx="1">
+              <a:schemeClr val="accent1"/>
+            </a:lnRef>
+            <a:fillRef idx="0">
+              <a:schemeClr val="accent1"/>
+            </a:fillRef>
+            <a:effectRef idx="0">
+              <a:schemeClr val="accent1"/>
+            </a:effectRef>
+            <a:fontRef idx="minor">
+              <a:schemeClr val="tx1"/>
+            </a:fontRef>
+          </p:style>
+        </p:cxnSp>
+      </p:grpSp>
+    </p:spTree>
+    <p:extLst>
+      <p:ext uri="{BB962C8B-B14F-4D97-AF65-F5344CB8AC3E}">
+        <p14:creationId xmlns:p14="http://schemas.microsoft.com/office/powerpoint/2010/main" val="2807041243"/>
+      </p:ext>
+    </p:extLst>
+  </p:cSld>
+  <p:clrMapOvr>
+    <a:masterClrMapping/>
+  </p:clrMapOvr>
+</p:sld>
+</file>
+
+<file path=ppt/slides/slide15.xml><?xml version="1.0" encoding="utf-8"?>
+<p:sld xmlns:a="http://schemas.openxmlformats.org/drawingml/2006/main" xmlns:r="http://schemas.openxmlformats.org/officeDocument/2006/relationships" xmlns:p="http://schemas.openxmlformats.org/presentationml/2006/main">
+  <p:cSld>
+    <p:spTree>
+      <p:nvGrpSpPr>
+        <p:cNvPr id="1" name=""/>
+        <p:cNvGrpSpPr/>
+        <p:nvPr/>
+      </p:nvGrpSpPr>
+      <p:grpSpPr>
+        <a:xfrm>
+          <a:off x="0" y="0"/>
+          <a:ext cx="0" cy="0"/>
+          <a:chOff x="0" y="0"/>
+          <a:chExt cx="0" cy="0"/>
+        </a:xfrm>
+      </p:grpSpPr>
+      <p:sp>
+        <p:nvSpPr>
+          <p:cNvPr id="4" name="テキスト ボックス 3">
+            <a:extLst>
+              <a:ext uri="{FF2B5EF4-FFF2-40B4-BE49-F238E27FC236}">
+                <a16:creationId xmlns:a16="http://schemas.microsoft.com/office/drawing/2014/main" id="{5A13BF46-B8C5-48AA-8308-C9ECFF431A18}"/>
+              </a:ext>
+            </a:extLst>
+          </p:cNvPr>
+          <p:cNvSpPr txBox="1"/>
+          <p:nvPr/>
+        </p:nvSpPr>
+        <p:spPr>
+          <a:xfrm>
+            <a:off x="567542" y="491954"/>
+            <a:ext cx="3877985" cy="584775"/>
+          </a:xfrm>
+          <a:prstGeom prst="rect">
+            <a:avLst/>
+          </a:prstGeom>
+          <a:noFill/>
+        </p:spPr>
+        <p:txBody>
+          <a:bodyPr wrap="none" rtlCol="0">
+            <a:spAutoFit/>
+          </a:bodyPr>
+          <a:lstStyle/>
+          <a:p>
+            <a:r>
+              <a:rPr kumimoji="1" lang="ja-JP" altLang="en-US" sz="3200" b="1" u="sng" dirty="0"/>
+              <a:t>最低限のプログラム</a:t>
             </a:r>
           </a:p>
         </p:txBody>
@@ -5138,7 +5946,7 @@
         <p:spPr>
           <a:xfrm>
             <a:off x="567542" y="3198167"/>
-            <a:ext cx="5724644" cy="461665"/>
+            <a:ext cx="5724644" cy="830997"/>
           </a:xfrm>
           <a:prstGeom prst="rect">
             <a:avLst/>
@@ -5150,6 +5958,13 @@
             <a:spAutoFit/>
           </a:bodyPr>
           <a:lstStyle/>
+          <a:p>
+            <a:r>
+              <a:rPr kumimoji="1" lang="ja-JP" altLang="en-US" sz="2400" dirty="0"/>
+              <a:t>そもそも裏画面って何でしょう？</a:t>
+            </a:r>
+            <a:endParaRPr kumimoji="1" lang="en-US" altLang="ja-JP" sz="2400" dirty="0"/>
+          </a:p>
           <a:p>
             <a:r>
               <a:rPr kumimoji="1" lang="ja-JP" altLang="en-US" sz="2400" dirty="0"/>
@@ -7598,7 +8413,7 @@
         <p:spPr>
           <a:xfrm>
             <a:off x="567542" y="1216429"/>
-            <a:ext cx="8802410" cy="830997"/>
+            <a:ext cx="10341293" cy="1200329"/>
           </a:xfrm>
           <a:prstGeom prst="rect">
             <a:avLst/>
@@ -7625,7 +8440,7 @@
             </a:r>
             <a:r>
               <a:rPr kumimoji="1" lang="ja-JP" altLang="en-US" sz="2400" dirty="0"/>
-              <a:t>に描いていくと、</a:t>
+              <a:t>に直接画像を描いていくと、</a:t>
             </a:r>
             <a:endParaRPr kumimoji="1" lang="en-US" altLang="ja-JP" sz="2400" dirty="0"/>
           </a:p>
@@ -7643,6 +8458,13 @@
                 <a:srgbClr val="FF0000"/>
               </a:solidFill>
             </a:endParaRPr>
+          </a:p>
+          <a:p>
+            <a:r>
+              <a:rPr lang="ja-JP" altLang="en-US" sz="2400" dirty="0"/>
+              <a:t>結果的に画面にちらつきが発生してしまします。</a:t>
+            </a:r>
+            <a:endParaRPr lang="en-US" altLang="ja-JP" sz="2400" dirty="0"/>
           </a:p>
         </p:txBody>
       </p:sp>
@@ -8460,7 +9282,7 @@
         <p:spPr>
           <a:xfrm>
             <a:off x="6985000" y="6240254"/>
-            <a:ext cx="4288353" cy="400110"/>
+            <a:ext cx="3775393" cy="400110"/>
           </a:xfrm>
           <a:prstGeom prst="rect">
             <a:avLst/>
@@ -8479,7 +9301,7 @@
                   <a:srgbClr val="FF0000"/>
                 </a:solidFill>
               </a:rPr>
-              <a:t>まだほかのものが描けてない。。。</a:t>
+              <a:t>まだ描きかけなんだけど。。。</a:t>
             </a:r>
             <a:endParaRPr kumimoji="1" lang="en-US" altLang="ja-JP" sz="2000" b="1" dirty="0">
               <a:solidFill>
@@ -10728,10 +11550,10 @@
           <a:lstStyle/>
           <a:p>
             <a:r>
-              <a:rPr kumimoji="1" lang="ja-JP" altLang="en-US" sz="2400" dirty="0"/>
+              <a:rPr kumimoji="1" lang="ja-JP" altLang="en-US" sz="2400" b="1" dirty="0"/>
               <a:t>裏側</a:t>
             </a:r>
-            <a:endParaRPr kumimoji="1" lang="en-US" altLang="ja-JP" sz="2400" dirty="0"/>
+            <a:endParaRPr kumimoji="1" lang="en-US" altLang="ja-JP" sz="2400" b="1" dirty="0"/>
           </a:p>
         </p:txBody>
       </p:sp>
@@ -10797,7 +11619,7 @@
               <a:rPr lang="ja-JP" altLang="en-US" sz="2400" dirty="0"/>
               <a:t>（裏返すプログラムは後程。。）</a:t>
             </a:r>
-            <a:endParaRPr kumimoji="1" lang="en-US" altLang="ja-JP" sz="2400" dirty="0"/>
+            <a:endParaRPr lang="en-US" altLang="ja-JP" sz="2400" dirty="0"/>
           </a:p>
         </p:txBody>
       </p:sp>
@@ -10815,6 +11637,4519 @@
 </file>
 
 <file path=ppt/slides/slide8.xml><?xml version="1.0" encoding="utf-8"?>
+<p:sld xmlns:a="http://schemas.openxmlformats.org/drawingml/2006/main" xmlns:r="http://schemas.openxmlformats.org/officeDocument/2006/relationships" xmlns:p="http://schemas.openxmlformats.org/presentationml/2006/main">
+  <p:cSld>
+    <p:spTree>
+      <p:nvGrpSpPr>
+        <p:cNvPr id="1" name=""/>
+        <p:cNvGrpSpPr/>
+        <p:nvPr/>
+      </p:nvGrpSpPr>
+      <p:grpSpPr>
+        <a:xfrm>
+          <a:off x="0" y="0"/>
+          <a:ext cx="0" cy="0"/>
+          <a:chOff x="0" y="0"/>
+          <a:chExt cx="0" cy="0"/>
+        </a:xfrm>
+      </p:grpSpPr>
+      <p:sp>
+        <p:nvSpPr>
+          <p:cNvPr id="4" name="テキスト ボックス 3">
+            <a:extLst>
+              <a:ext uri="{FF2B5EF4-FFF2-40B4-BE49-F238E27FC236}">
+                <a16:creationId xmlns:a16="http://schemas.microsoft.com/office/drawing/2014/main" id="{5A13BF46-B8C5-48AA-8308-C9ECFF431A18}"/>
+              </a:ext>
+            </a:extLst>
+          </p:cNvPr>
+          <p:cNvSpPr txBox="1"/>
+          <p:nvPr/>
+        </p:nvSpPr>
+        <p:spPr>
+          <a:xfrm>
+            <a:off x="567542" y="491954"/>
+            <a:ext cx="4815742" cy="584775"/>
+          </a:xfrm>
+          <a:prstGeom prst="rect">
+            <a:avLst/>
+          </a:prstGeom>
+          <a:noFill/>
+        </p:spPr>
+        <p:txBody>
+          <a:bodyPr wrap="none" rtlCol="0">
+            <a:spAutoFit/>
+          </a:bodyPr>
+          <a:lstStyle/>
+          <a:p>
+            <a:r>
+              <a:rPr kumimoji="1" lang="ja-JP" altLang="en-US" sz="3200" b="1" u="sng" dirty="0"/>
+              <a:t>最低限のプログラム 解説</a:t>
+            </a:r>
+          </a:p>
+        </p:txBody>
+      </p:sp>
+      <p:sp>
+        <p:nvSpPr>
+          <p:cNvPr id="6" name="テキスト ボックス 5">
+            <a:extLst>
+              <a:ext uri="{FF2B5EF4-FFF2-40B4-BE49-F238E27FC236}">
+                <a16:creationId xmlns:a16="http://schemas.microsoft.com/office/drawing/2014/main" id="{55830AD6-028B-4C4E-80BF-B70DFC1C3A46}"/>
+              </a:ext>
+            </a:extLst>
+          </p:cNvPr>
+          <p:cNvSpPr txBox="1"/>
+          <p:nvPr/>
+        </p:nvSpPr>
+        <p:spPr>
+          <a:xfrm>
+            <a:off x="567542" y="1216429"/>
+            <a:ext cx="10956846" cy="1569660"/>
+          </a:xfrm>
+          <a:prstGeom prst="rect">
+            <a:avLst/>
+          </a:prstGeom>
+          <a:noFill/>
+        </p:spPr>
+        <p:txBody>
+          <a:bodyPr wrap="none" rtlCol="0">
+            <a:spAutoFit/>
+          </a:bodyPr>
+          <a:lstStyle/>
+          <a:p>
+            <a:r>
+              <a:rPr kumimoji="1" lang="ja-JP" altLang="en-US" sz="2400" dirty="0"/>
+              <a:t>ゲームの画面は</a:t>
+            </a:r>
+            <a:endParaRPr kumimoji="1" lang="en-US" altLang="ja-JP" sz="2400" dirty="0"/>
+          </a:p>
+          <a:p>
+            <a:r>
+              <a:rPr kumimoji="1" lang="ja-JP" altLang="en-US" sz="2400" dirty="0"/>
+              <a:t>「</a:t>
+            </a:r>
+            <a:r>
+              <a:rPr kumimoji="1" lang="ja-JP" altLang="en-US" sz="2400" b="1" dirty="0">
+                <a:solidFill>
+                  <a:srgbClr val="FF0000"/>
+                </a:solidFill>
+              </a:rPr>
+              <a:t>裏面描画→フリップ→裏面描画→フリップ</a:t>
+            </a:r>
+            <a:r>
+              <a:rPr kumimoji="1" lang="ja-JP" altLang="en-US" sz="2400" dirty="0"/>
+              <a:t>」の繰り返しを高速で行い、</a:t>
+            </a:r>
+            <a:endParaRPr kumimoji="1" lang="en-US" altLang="ja-JP" sz="2400" dirty="0"/>
+          </a:p>
+          <a:p>
+            <a:r>
+              <a:rPr lang="ja-JP" altLang="en-US" sz="2400" dirty="0"/>
+              <a:t>パラパラ漫画の方法で動かします。</a:t>
+            </a:r>
+            <a:endParaRPr lang="en-US" altLang="ja-JP" sz="2400" dirty="0"/>
+          </a:p>
+          <a:p>
+            <a:r>
+              <a:rPr kumimoji="1" lang="ja-JP" altLang="en-US" sz="2400" dirty="0"/>
+              <a:t>このように板の両面を使用した描画方法を、</a:t>
+            </a:r>
+            <a:r>
+              <a:rPr lang="ja-JP" altLang="en-US" sz="2400" b="1" dirty="0">
+                <a:solidFill>
+                  <a:srgbClr val="FF0000"/>
+                </a:solidFill>
+              </a:rPr>
+              <a:t>ダブルバッファリング</a:t>
+            </a:r>
+            <a:r>
+              <a:rPr lang="ja-JP" altLang="en-US" sz="2400" dirty="0"/>
+              <a:t>と言います</a:t>
+            </a:r>
+            <a:endParaRPr kumimoji="1" lang="en-US" altLang="ja-JP" sz="2400" dirty="0"/>
+          </a:p>
+        </p:txBody>
+      </p:sp>
+      <p:grpSp>
+        <p:nvGrpSpPr>
+          <p:cNvPr id="26" name="グループ化 25">
+            <a:extLst>
+              <a:ext uri="{FF2B5EF4-FFF2-40B4-BE49-F238E27FC236}">
+                <a16:creationId xmlns:a16="http://schemas.microsoft.com/office/drawing/2014/main" id="{BE1DCCF8-EC03-47F9-8AEC-D92F29485CAE}"/>
+              </a:ext>
+            </a:extLst>
+          </p:cNvPr>
+          <p:cNvGrpSpPr/>
+          <p:nvPr/>
+        </p:nvGrpSpPr>
+        <p:grpSpPr>
+          <a:xfrm>
+            <a:off x="583500" y="2938215"/>
+            <a:ext cx="3153833" cy="2057400"/>
+            <a:chOff x="673100" y="3429000"/>
+            <a:chExt cx="6311900" cy="3200400"/>
+          </a:xfrm>
+        </p:grpSpPr>
+        <p:sp>
+          <p:nvSpPr>
+            <p:cNvPr id="27" name="正方形/長方形 26">
+              <a:extLst>
+                <a:ext uri="{FF2B5EF4-FFF2-40B4-BE49-F238E27FC236}">
+                  <a16:creationId xmlns:a16="http://schemas.microsoft.com/office/drawing/2014/main" id="{0F9EDAF3-1324-4E86-B1EE-095BECF00F0C}"/>
+                </a:ext>
+              </a:extLst>
+            </p:cNvPr>
+            <p:cNvSpPr/>
+            <p:nvPr/>
+          </p:nvSpPr>
+          <p:spPr>
+            <a:xfrm>
+              <a:off x="673100" y="3429000"/>
+              <a:ext cx="6311900" cy="3200400"/>
+            </a:xfrm>
+            <a:prstGeom prst="rect">
+              <a:avLst/>
+            </a:prstGeom>
+            <a:solidFill>
+              <a:schemeClr val="accent4">
+                <a:lumMod val="40000"/>
+                <a:lumOff val="60000"/>
+              </a:schemeClr>
+            </a:solidFill>
+          </p:spPr>
+          <p:style>
+            <a:lnRef idx="2">
+              <a:schemeClr val="accent1">
+                <a:shade val="50000"/>
+              </a:schemeClr>
+            </a:lnRef>
+            <a:fillRef idx="1">
+              <a:schemeClr val="accent1"/>
+            </a:fillRef>
+            <a:effectRef idx="0">
+              <a:schemeClr val="accent1"/>
+            </a:effectRef>
+            <a:fontRef idx="minor">
+              <a:schemeClr val="lt1"/>
+            </a:fontRef>
+          </p:style>
+          <p:txBody>
+            <a:bodyPr rtlCol="0" anchor="ctr"/>
+            <a:lstStyle/>
+            <a:p>
+              <a:pPr algn="ctr"/>
+              <a:endParaRPr kumimoji="1" lang="ja-JP" altLang="en-US"/>
+            </a:p>
+          </p:txBody>
+        </p:sp>
+        <p:sp>
+          <p:nvSpPr>
+            <p:cNvPr id="28" name="正方形/長方形 27">
+              <a:extLst>
+                <a:ext uri="{FF2B5EF4-FFF2-40B4-BE49-F238E27FC236}">
+                  <a16:creationId xmlns:a16="http://schemas.microsoft.com/office/drawing/2014/main" id="{D5181914-3B6B-4043-BA35-E9AF32453D56}"/>
+                </a:ext>
+              </a:extLst>
+            </p:cNvPr>
+            <p:cNvSpPr/>
+            <p:nvPr/>
+          </p:nvSpPr>
+          <p:spPr>
+            <a:xfrm>
+              <a:off x="673100" y="5715000"/>
+              <a:ext cx="6311900" cy="914400"/>
+            </a:xfrm>
+            <a:prstGeom prst="rect">
+              <a:avLst/>
+            </a:prstGeom>
+            <a:solidFill>
+              <a:schemeClr val="accent2">
+                <a:lumMod val="75000"/>
+              </a:schemeClr>
+            </a:solidFill>
+          </p:spPr>
+          <p:style>
+            <a:lnRef idx="2">
+              <a:schemeClr val="accent1">
+                <a:shade val="50000"/>
+              </a:schemeClr>
+            </a:lnRef>
+            <a:fillRef idx="1">
+              <a:schemeClr val="accent1"/>
+            </a:fillRef>
+            <a:effectRef idx="0">
+              <a:schemeClr val="accent1"/>
+            </a:effectRef>
+            <a:fontRef idx="minor">
+              <a:schemeClr val="lt1"/>
+            </a:fontRef>
+          </p:style>
+          <p:txBody>
+            <a:bodyPr rtlCol="0" anchor="ctr"/>
+            <a:lstStyle/>
+            <a:p>
+              <a:pPr algn="ctr"/>
+              <a:endParaRPr kumimoji="1" lang="ja-JP" altLang="en-US"/>
+            </a:p>
+          </p:txBody>
+        </p:sp>
+        <p:sp>
+          <p:nvSpPr>
+            <p:cNvPr id="32" name="正方形/長方形 31">
+              <a:extLst>
+                <a:ext uri="{FF2B5EF4-FFF2-40B4-BE49-F238E27FC236}">
+                  <a16:creationId xmlns:a16="http://schemas.microsoft.com/office/drawing/2014/main" id="{1ED12367-7E54-418C-AB1C-119E8540F208}"/>
+                </a:ext>
+              </a:extLst>
+            </p:cNvPr>
+            <p:cNvSpPr/>
+            <p:nvPr/>
+          </p:nvSpPr>
+          <p:spPr>
+            <a:xfrm>
+              <a:off x="673100" y="5511800"/>
+              <a:ext cx="6311900" cy="203200"/>
+            </a:xfrm>
+            <a:prstGeom prst="rect">
+              <a:avLst/>
+            </a:prstGeom>
+            <a:solidFill>
+              <a:schemeClr val="accent6">
+                <a:lumMod val="75000"/>
+              </a:schemeClr>
+            </a:solidFill>
+          </p:spPr>
+          <p:style>
+            <a:lnRef idx="2">
+              <a:schemeClr val="accent1">
+                <a:shade val="50000"/>
+              </a:schemeClr>
+            </a:lnRef>
+            <a:fillRef idx="1">
+              <a:schemeClr val="accent1"/>
+            </a:fillRef>
+            <a:effectRef idx="0">
+              <a:schemeClr val="accent1"/>
+            </a:effectRef>
+            <a:fontRef idx="minor">
+              <a:schemeClr val="lt1"/>
+            </a:fontRef>
+          </p:style>
+          <p:txBody>
+            <a:bodyPr rtlCol="0" anchor="ctr"/>
+            <a:lstStyle/>
+            <a:p>
+              <a:pPr algn="ctr"/>
+              <a:endParaRPr kumimoji="1" lang="ja-JP" altLang="en-US"/>
+            </a:p>
+          </p:txBody>
+        </p:sp>
+        <p:grpSp>
+          <p:nvGrpSpPr>
+            <p:cNvPr id="33" name="グループ化 32">
+              <a:extLst>
+                <a:ext uri="{FF2B5EF4-FFF2-40B4-BE49-F238E27FC236}">
+                  <a16:creationId xmlns:a16="http://schemas.microsoft.com/office/drawing/2014/main" id="{0E07D0AA-6FCC-46CC-9040-0C1B213B4F84}"/>
+                </a:ext>
+              </a:extLst>
+            </p:cNvPr>
+            <p:cNvGrpSpPr/>
+            <p:nvPr/>
+          </p:nvGrpSpPr>
+          <p:grpSpPr>
+            <a:xfrm>
+              <a:off x="1333500" y="5133182"/>
+              <a:ext cx="263525" cy="375179"/>
+              <a:chOff x="1333500" y="5133182"/>
+              <a:chExt cx="263525" cy="375179"/>
+            </a:xfrm>
+          </p:grpSpPr>
+          <p:sp>
+            <p:nvSpPr>
+              <p:cNvPr id="74" name="二等辺三角形 73">
+                <a:extLst>
+                  <a:ext uri="{FF2B5EF4-FFF2-40B4-BE49-F238E27FC236}">
+                    <a16:creationId xmlns:a16="http://schemas.microsoft.com/office/drawing/2014/main" id="{4C285A94-1E31-468C-84A0-F3EF6D4554F8}"/>
+                  </a:ext>
+                </a:extLst>
+              </p:cNvPr>
+              <p:cNvSpPr/>
+              <p:nvPr/>
+            </p:nvSpPr>
+            <p:spPr>
+              <a:xfrm rot="5400000">
+                <a:off x="1534980" y="5222082"/>
+                <a:ext cx="66940" cy="57150"/>
+              </a:xfrm>
+              <a:prstGeom prst="triangle">
+                <a:avLst/>
+              </a:prstGeom>
+            </p:spPr>
+            <p:style>
+              <a:lnRef idx="2">
+                <a:schemeClr val="accent1">
+                  <a:shade val="50000"/>
+                </a:schemeClr>
+              </a:lnRef>
+              <a:fillRef idx="1">
+                <a:schemeClr val="accent1"/>
+              </a:fillRef>
+              <a:effectRef idx="0">
+                <a:schemeClr val="accent1"/>
+              </a:effectRef>
+              <a:fontRef idx="minor">
+                <a:schemeClr val="lt1"/>
+              </a:fontRef>
+            </p:style>
+            <p:txBody>
+              <a:bodyPr rtlCol="0" anchor="ctr"/>
+              <a:lstStyle/>
+              <a:p>
+                <a:pPr algn="ctr"/>
+                <a:endParaRPr kumimoji="1" lang="ja-JP" altLang="en-US"/>
+              </a:p>
+            </p:txBody>
+          </p:sp>
+          <p:grpSp>
+            <p:nvGrpSpPr>
+              <p:cNvPr id="75" name="グループ化 74">
+                <a:extLst>
+                  <a:ext uri="{FF2B5EF4-FFF2-40B4-BE49-F238E27FC236}">
+                    <a16:creationId xmlns:a16="http://schemas.microsoft.com/office/drawing/2014/main" id="{E1EC1963-18C7-4A19-8455-7903E8FC2F0F}"/>
+                  </a:ext>
+                </a:extLst>
+              </p:cNvPr>
+              <p:cNvGrpSpPr/>
+              <p:nvPr/>
+            </p:nvGrpSpPr>
+            <p:grpSpPr>
+              <a:xfrm>
+                <a:off x="1333500" y="5133182"/>
+                <a:ext cx="234950" cy="375179"/>
+                <a:chOff x="2470150" y="4146021"/>
+                <a:chExt cx="234950" cy="375179"/>
+              </a:xfrm>
+            </p:grpSpPr>
+            <p:sp>
+              <p:nvSpPr>
+                <p:cNvPr id="76" name="二等辺三角形 75">
+                  <a:extLst>
+                    <a:ext uri="{FF2B5EF4-FFF2-40B4-BE49-F238E27FC236}">
+                      <a16:creationId xmlns:a16="http://schemas.microsoft.com/office/drawing/2014/main" id="{A99234B7-7ED5-4440-920B-ED5EF79EC756}"/>
+                    </a:ext>
+                  </a:extLst>
+                </p:cNvPr>
+                <p:cNvSpPr/>
+                <p:nvPr/>
+              </p:nvSpPr>
+              <p:spPr>
+                <a:xfrm>
+                  <a:off x="2470150" y="4286250"/>
+                  <a:ext cx="234950" cy="234950"/>
+                </a:xfrm>
+                <a:prstGeom prst="triangle">
+                  <a:avLst/>
+                </a:prstGeom>
+              </p:spPr>
+              <p:style>
+                <a:lnRef idx="2">
+                  <a:schemeClr val="accent1">
+                    <a:shade val="50000"/>
+                  </a:schemeClr>
+                </a:lnRef>
+                <a:fillRef idx="1">
+                  <a:schemeClr val="accent1"/>
+                </a:fillRef>
+                <a:effectRef idx="0">
+                  <a:schemeClr val="accent1"/>
+                </a:effectRef>
+                <a:fontRef idx="minor">
+                  <a:schemeClr val="lt1"/>
+                </a:fontRef>
+              </p:style>
+              <p:txBody>
+                <a:bodyPr rtlCol="0" anchor="ctr"/>
+                <a:lstStyle/>
+                <a:p>
+                  <a:pPr algn="ctr"/>
+                  <a:endParaRPr kumimoji="1" lang="ja-JP" altLang="en-US"/>
+                </a:p>
+              </p:txBody>
+            </p:sp>
+            <p:sp>
+              <p:nvSpPr>
+                <p:cNvPr id="77" name="楕円 76">
+                  <a:extLst>
+                    <a:ext uri="{FF2B5EF4-FFF2-40B4-BE49-F238E27FC236}">
+                      <a16:creationId xmlns:a16="http://schemas.microsoft.com/office/drawing/2014/main" id="{C5E31C0E-CBD9-433F-9587-44082DA10C5B}"/>
+                    </a:ext>
+                  </a:extLst>
+                </p:cNvPr>
+                <p:cNvSpPr/>
+                <p:nvPr/>
+              </p:nvSpPr>
+              <p:spPr>
+                <a:xfrm>
+                  <a:off x="2470150" y="4146021"/>
+                  <a:ext cx="234950" cy="234950"/>
+                </a:xfrm>
+                <a:prstGeom prst="ellipse">
+                  <a:avLst/>
+                </a:prstGeom>
+              </p:spPr>
+              <p:style>
+                <a:lnRef idx="2">
+                  <a:schemeClr val="accent1">
+                    <a:shade val="50000"/>
+                  </a:schemeClr>
+                </a:lnRef>
+                <a:fillRef idx="1">
+                  <a:schemeClr val="accent1"/>
+                </a:fillRef>
+                <a:effectRef idx="0">
+                  <a:schemeClr val="accent1"/>
+                </a:effectRef>
+                <a:fontRef idx="minor">
+                  <a:schemeClr val="lt1"/>
+                </a:fontRef>
+              </p:style>
+              <p:txBody>
+                <a:bodyPr rtlCol="0" anchor="ctr"/>
+                <a:lstStyle/>
+                <a:p>
+                  <a:pPr algn="ctr"/>
+                  <a:endParaRPr kumimoji="1" lang="ja-JP" altLang="en-US"/>
+                </a:p>
+              </p:txBody>
+            </p:sp>
+          </p:grpSp>
+        </p:grpSp>
+        <p:grpSp>
+          <p:nvGrpSpPr>
+            <p:cNvPr id="34" name="グループ化 33">
+              <a:extLst>
+                <a:ext uri="{FF2B5EF4-FFF2-40B4-BE49-F238E27FC236}">
+                  <a16:creationId xmlns:a16="http://schemas.microsoft.com/office/drawing/2014/main" id="{772489CB-4117-4489-96BD-5FF33B324616}"/>
+                </a:ext>
+              </a:extLst>
+            </p:cNvPr>
+            <p:cNvGrpSpPr/>
+            <p:nvPr/>
+          </p:nvGrpSpPr>
+          <p:grpSpPr>
+            <a:xfrm>
+              <a:off x="2651760" y="4234921"/>
+              <a:ext cx="523240" cy="1276879"/>
+              <a:chOff x="2457450" y="4234921"/>
+              <a:chExt cx="717550" cy="1276879"/>
+            </a:xfrm>
+          </p:grpSpPr>
+          <p:sp>
+            <p:nvSpPr>
+              <p:cNvPr id="72" name="正方形/長方形 71">
+                <a:extLst>
+                  <a:ext uri="{FF2B5EF4-FFF2-40B4-BE49-F238E27FC236}">
+                    <a16:creationId xmlns:a16="http://schemas.microsoft.com/office/drawing/2014/main" id="{01C8316E-2315-4F47-8FE6-C7D322424664}"/>
+                  </a:ext>
+                </a:extLst>
+              </p:cNvPr>
+              <p:cNvSpPr/>
+              <p:nvPr/>
+            </p:nvSpPr>
+            <p:spPr>
+              <a:xfrm>
+                <a:off x="2717800" y="4508500"/>
+                <a:ext cx="196850" cy="1003300"/>
+              </a:xfrm>
+              <a:prstGeom prst="rect">
+                <a:avLst/>
+              </a:prstGeom>
+              <a:solidFill>
+                <a:schemeClr val="accent2">
+                  <a:lumMod val="50000"/>
+                </a:schemeClr>
+              </a:solidFill>
+            </p:spPr>
+            <p:style>
+              <a:lnRef idx="2">
+                <a:schemeClr val="accent1">
+                  <a:shade val="50000"/>
+                </a:schemeClr>
+              </a:lnRef>
+              <a:fillRef idx="1">
+                <a:schemeClr val="accent1"/>
+              </a:fillRef>
+              <a:effectRef idx="0">
+                <a:schemeClr val="accent1"/>
+              </a:effectRef>
+              <a:fontRef idx="minor">
+                <a:schemeClr val="lt1"/>
+              </a:fontRef>
+            </p:style>
+            <p:txBody>
+              <a:bodyPr rtlCol="0" anchor="ctr"/>
+              <a:lstStyle/>
+              <a:p>
+                <a:pPr algn="ctr"/>
+                <a:endParaRPr kumimoji="1" lang="ja-JP" altLang="en-US"/>
+              </a:p>
+            </p:txBody>
+          </p:sp>
+          <p:sp>
+            <p:nvSpPr>
+              <p:cNvPr id="73" name="楕円 72">
+                <a:extLst>
+                  <a:ext uri="{FF2B5EF4-FFF2-40B4-BE49-F238E27FC236}">
+                    <a16:creationId xmlns:a16="http://schemas.microsoft.com/office/drawing/2014/main" id="{AAF0BCC2-720D-4A44-8A41-0CAA116E8723}"/>
+                  </a:ext>
+                </a:extLst>
+              </p:cNvPr>
+              <p:cNvSpPr/>
+              <p:nvPr/>
+            </p:nvSpPr>
+            <p:spPr>
+              <a:xfrm>
+                <a:off x="2457450" y="4234921"/>
+                <a:ext cx="717550" cy="670454"/>
+              </a:xfrm>
+              <a:prstGeom prst="ellipse">
+                <a:avLst/>
+              </a:prstGeom>
+              <a:solidFill>
+                <a:schemeClr val="accent6">
+                  <a:lumMod val="60000"/>
+                  <a:lumOff val="40000"/>
+                </a:schemeClr>
+              </a:solidFill>
+              <a:ln>
+                <a:solidFill>
+                  <a:schemeClr val="tx1"/>
+                </a:solidFill>
+              </a:ln>
+            </p:spPr>
+            <p:style>
+              <a:lnRef idx="2">
+                <a:schemeClr val="accent1">
+                  <a:shade val="50000"/>
+                </a:schemeClr>
+              </a:lnRef>
+              <a:fillRef idx="1">
+                <a:schemeClr val="accent1"/>
+              </a:fillRef>
+              <a:effectRef idx="0">
+                <a:schemeClr val="accent1"/>
+              </a:effectRef>
+              <a:fontRef idx="minor">
+                <a:schemeClr val="lt1"/>
+              </a:fontRef>
+            </p:style>
+            <p:txBody>
+              <a:bodyPr rtlCol="0" anchor="ctr"/>
+              <a:lstStyle/>
+              <a:p>
+                <a:pPr algn="ctr"/>
+                <a:endParaRPr kumimoji="1" lang="ja-JP" altLang="en-US"/>
+              </a:p>
+            </p:txBody>
+          </p:sp>
+        </p:grpSp>
+        <p:grpSp>
+          <p:nvGrpSpPr>
+            <p:cNvPr id="35" name="グループ化 34">
+              <a:extLst>
+                <a:ext uri="{FF2B5EF4-FFF2-40B4-BE49-F238E27FC236}">
+                  <a16:creationId xmlns:a16="http://schemas.microsoft.com/office/drawing/2014/main" id="{32744834-9ACF-470D-9D90-0F67E844740A}"/>
+                </a:ext>
+              </a:extLst>
+            </p:cNvPr>
+            <p:cNvGrpSpPr/>
+            <p:nvPr/>
+          </p:nvGrpSpPr>
+          <p:grpSpPr>
+            <a:xfrm>
+              <a:off x="2874963" y="4009038"/>
+              <a:ext cx="717550" cy="1497280"/>
+              <a:chOff x="2457450" y="4173273"/>
+              <a:chExt cx="717550" cy="1338527"/>
+            </a:xfrm>
+          </p:grpSpPr>
+          <p:sp>
+            <p:nvSpPr>
+              <p:cNvPr id="70" name="正方形/長方形 69">
+                <a:extLst>
+                  <a:ext uri="{FF2B5EF4-FFF2-40B4-BE49-F238E27FC236}">
+                    <a16:creationId xmlns:a16="http://schemas.microsoft.com/office/drawing/2014/main" id="{0D5478ED-5A1D-4208-9FB6-E91C680A0C3A}"/>
+                  </a:ext>
+                </a:extLst>
+              </p:cNvPr>
+              <p:cNvSpPr/>
+              <p:nvPr/>
+            </p:nvSpPr>
+            <p:spPr>
+              <a:xfrm>
+                <a:off x="2717800" y="4508500"/>
+                <a:ext cx="196850" cy="1003300"/>
+              </a:xfrm>
+              <a:prstGeom prst="rect">
+                <a:avLst/>
+              </a:prstGeom>
+              <a:solidFill>
+                <a:schemeClr val="accent2">
+                  <a:lumMod val="50000"/>
+                </a:schemeClr>
+              </a:solidFill>
+            </p:spPr>
+            <p:style>
+              <a:lnRef idx="2">
+                <a:schemeClr val="accent1">
+                  <a:shade val="50000"/>
+                </a:schemeClr>
+              </a:lnRef>
+              <a:fillRef idx="1">
+                <a:schemeClr val="accent1"/>
+              </a:fillRef>
+              <a:effectRef idx="0">
+                <a:schemeClr val="accent1"/>
+              </a:effectRef>
+              <a:fontRef idx="minor">
+                <a:schemeClr val="lt1"/>
+              </a:fontRef>
+            </p:style>
+            <p:txBody>
+              <a:bodyPr rtlCol="0" anchor="ctr"/>
+              <a:lstStyle/>
+              <a:p>
+                <a:pPr algn="ctr"/>
+                <a:endParaRPr kumimoji="1" lang="ja-JP" altLang="en-US"/>
+              </a:p>
+            </p:txBody>
+          </p:sp>
+          <p:sp>
+            <p:nvSpPr>
+              <p:cNvPr id="71" name="楕円 70">
+                <a:extLst>
+                  <a:ext uri="{FF2B5EF4-FFF2-40B4-BE49-F238E27FC236}">
+                    <a16:creationId xmlns:a16="http://schemas.microsoft.com/office/drawing/2014/main" id="{040A60E1-EADF-467E-9288-306901602178}"/>
+                  </a:ext>
+                </a:extLst>
+              </p:cNvPr>
+              <p:cNvSpPr/>
+              <p:nvPr/>
+            </p:nvSpPr>
+            <p:spPr>
+              <a:xfrm>
+                <a:off x="2457450" y="4173273"/>
+                <a:ext cx="717550" cy="670454"/>
+              </a:xfrm>
+              <a:prstGeom prst="ellipse">
+                <a:avLst/>
+              </a:prstGeom>
+              <a:solidFill>
+                <a:schemeClr val="accent6">
+                  <a:lumMod val="60000"/>
+                  <a:lumOff val="40000"/>
+                </a:schemeClr>
+              </a:solidFill>
+              <a:ln>
+                <a:solidFill>
+                  <a:schemeClr val="tx1"/>
+                </a:solidFill>
+              </a:ln>
+            </p:spPr>
+            <p:style>
+              <a:lnRef idx="2">
+                <a:schemeClr val="accent1">
+                  <a:shade val="50000"/>
+                </a:schemeClr>
+              </a:lnRef>
+              <a:fillRef idx="1">
+                <a:schemeClr val="accent1"/>
+              </a:fillRef>
+              <a:effectRef idx="0">
+                <a:schemeClr val="accent1"/>
+              </a:effectRef>
+              <a:fontRef idx="minor">
+                <a:schemeClr val="lt1"/>
+              </a:fontRef>
+            </p:style>
+            <p:txBody>
+              <a:bodyPr rtlCol="0" anchor="ctr"/>
+              <a:lstStyle/>
+              <a:p>
+                <a:pPr algn="ctr"/>
+                <a:endParaRPr kumimoji="1" lang="ja-JP" altLang="en-US"/>
+              </a:p>
+            </p:txBody>
+          </p:sp>
+        </p:grpSp>
+        <p:grpSp>
+          <p:nvGrpSpPr>
+            <p:cNvPr id="36" name="グループ化 35">
+              <a:extLst>
+                <a:ext uri="{FF2B5EF4-FFF2-40B4-BE49-F238E27FC236}">
+                  <a16:creationId xmlns:a16="http://schemas.microsoft.com/office/drawing/2014/main" id="{F46E83AB-A3B4-4C2F-BA55-78A06F8F714D}"/>
+                </a:ext>
+              </a:extLst>
+            </p:cNvPr>
+            <p:cNvGrpSpPr/>
+            <p:nvPr/>
+          </p:nvGrpSpPr>
+          <p:grpSpPr>
+            <a:xfrm>
+              <a:off x="2710498" y="3759745"/>
+              <a:ext cx="717550" cy="1741091"/>
+              <a:chOff x="2457450" y="4173273"/>
+              <a:chExt cx="717550" cy="1338527"/>
+            </a:xfrm>
+          </p:grpSpPr>
+          <p:sp>
+            <p:nvSpPr>
+              <p:cNvPr id="68" name="正方形/長方形 67">
+                <a:extLst>
+                  <a:ext uri="{FF2B5EF4-FFF2-40B4-BE49-F238E27FC236}">
+                    <a16:creationId xmlns:a16="http://schemas.microsoft.com/office/drawing/2014/main" id="{FB26C45F-19E7-4784-87D9-DB716EA6614F}"/>
+                  </a:ext>
+                </a:extLst>
+              </p:cNvPr>
+              <p:cNvSpPr/>
+              <p:nvPr/>
+            </p:nvSpPr>
+            <p:spPr>
+              <a:xfrm>
+                <a:off x="2717800" y="4508500"/>
+                <a:ext cx="196850" cy="1003300"/>
+              </a:xfrm>
+              <a:prstGeom prst="rect">
+                <a:avLst/>
+              </a:prstGeom>
+              <a:solidFill>
+                <a:schemeClr val="accent2">
+                  <a:lumMod val="50000"/>
+                </a:schemeClr>
+              </a:solidFill>
+            </p:spPr>
+            <p:style>
+              <a:lnRef idx="2">
+                <a:schemeClr val="accent1">
+                  <a:shade val="50000"/>
+                </a:schemeClr>
+              </a:lnRef>
+              <a:fillRef idx="1">
+                <a:schemeClr val="accent1"/>
+              </a:fillRef>
+              <a:effectRef idx="0">
+                <a:schemeClr val="accent1"/>
+              </a:effectRef>
+              <a:fontRef idx="minor">
+                <a:schemeClr val="lt1"/>
+              </a:fontRef>
+            </p:style>
+            <p:txBody>
+              <a:bodyPr rtlCol="0" anchor="ctr"/>
+              <a:lstStyle/>
+              <a:p>
+                <a:pPr algn="ctr"/>
+                <a:endParaRPr kumimoji="1" lang="ja-JP" altLang="en-US"/>
+              </a:p>
+            </p:txBody>
+          </p:sp>
+          <p:sp>
+            <p:nvSpPr>
+              <p:cNvPr id="69" name="楕円 68">
+                <a:extLst>
+                  <a:ext uri="{FF2B5EF4-FFF2-40B4-BE49-F238E27FC236}">
+                    <a16:creationId xmlns:a16="http://schemas.microsoft.com/office/drawing/2014/main" id="{C9AB9D78-A3C9-47A2-826F-87CFC12CCE38}"/>
+                  </a:ext>
+                </a:extLst>
+              </p:cNvPr>
+              <p:cNvSpPr/>
+              <p:nvPr/>
+            </p:nvSpPr>
+            <p:spPr>
+              <a:xfrm>
+                <a:off x="2457450" y="4173273"/>
+                <a:ext cx="717550" cy="670454"/>
+              </a:xfrm>
+              <a:prstGeom prst="ellipse">
+                <a:avLst/>
+              </a:prstGeom>
+              <a:solidFill>
+                <a:schemeClr val="accent6">
+                  <a:lumMod val="60000"/>
+                  <a:lumOff val="40000"/>
+                </a:schemeClr>
+              </a:solidFill>
+              <a:ln>
+                <a:solidFill>
+                  <a:schemeClr val="tx1"/>
+                </a:solidFill>
+              </a:ln>
+            </p:spPr>
+            <p:style>
+              <a:lnRef idx="2">
+                <a:schemeClr val="accent1">
+                  <a:shade val="50000"/>
+                </a:schemeClr>
+              </a:lnRef>
+              <a:fillRef idx="1">
+                <a:schemeClr val="accent1"/>
+              </a:fillRef>
+              <a:effectRef idx="0">
+                <a:schemeClr val="accent1"/>
+              </a:effectRef>
+              <a:fontRef idx="minor">
+                <a:schemeClr val="lt1"/>
+              </a:fontRef>
+            </p:style>
+            <p:txBody>
+              <a:bodyPr rtlCol="0" anchor="ctr"/>
+              <a:lstStyle/>
+              <a:p>
+                <a:pPr algn="ctr"/>
+                <a:endParaRPr kumimoji="1" lang="ja-JP" altLang="en-US"/>
+              </a:p>
+            </p:txBody>
+          </p:sp>
+        </p:grpSp>
+        <p:grpSp>
+          <p:nvGrpSpPr>
+            <p:cNvPr id="37" name="グループ化 36">
+              <a:extLst>
+                <a:ext uri="{FF2B5EF4-FFF2-40B4-BE49-F238E27FC236}">
+                  <a16:creationId xmlns:a16="http://schemas.microsoft.com/office/drawing/2014/main" id="{C8BB772D-A8C3-4553-A0D6-BA1162DE8A69}"/>
+                </a:ext>
+              </a:extLst>
+            </p:cNvPr>
+            <p:cNvGrpSpPr/>
+            <p:nvPr/>
+          </p:nvGrpSpPr>
+          <p:grpSpPr>
+            <a:xfrm>
+              <a:off x="3285490" y="4223957"/>
+              <a:ext cx="523240" cy="1276879"/>
+              <a:chOff x="2457450" y="4234921"/>
+              <a:chExt cx="717550" cy="1276879"/>
+            </a:xfrm>
+          </p:grpSpPr>
+          <p:sp>
+            <p:nvSpPr>
+              <p:cNvPr id="66" name="正方形/長方形 65">
+                <a:extLst>
+                  <a:ext uri="{FF2B5EF4-FFF2-40B4-BE49-F238E27FC236}">
+                    <a16:creationId xmlns:a16="http://schemas.microsoft.com/office/drawing/2014/main" id="{B604506A-492E-40B2-BAD9-95D3AAB52930}"/>
+                  </a:ext>
+                </a:extLst>
+              </p:cNvPr>
+              <p:cNvSpPr/>
+              <p:nvPr/>
+            </p:nvSpPr>
+            <p:spPr>
+              <a:xfrm>
+                <a:off x="2717800" y="4508500"/>
+                <a:ext cx="196850" cy="1003300"/>
+              </a:xfrm>
+              <a:prstGeom prst="rect">
+                <a:avLst/>
+              </a:prstGeom>
+              <a:solidFill>
+                <a:schemeClr val="accent2">
+                  <a:lumMod val="50000"/>
+                </a:schemeClr>
+              </a:solidFill>
+            </p:spPr>
+            <p:style>
+              <a:lnRef idx="2">
+                <a:schemeClr val="accent1">
+                  <a:shade val="50000"/>
+                </a:schemeClr>
+              </a:lnRef>
+              <a:fillRef idx="1">
+                <a:schemeClr val="accent1"/>
+              </a:fillRef>
+              <a:effectRef idx="0">
+                <a:schemeClr val="accent1"/>
+              </a:effectRef>
+              <a:fontRef idx="minor">
+                <a:schemeClr val="lt1"/>
+              </a:fontRef>
+            </p:style>
+            <p:txBody>
+              <a:bodyPr rtlCol="0" anchor="ctr"/>
+              <a:lstStyle/>
+              <a:p>
+                <a:pPr algn="ctr"/>
+                <a:endParaRPr kumimoji="1" lang="ja-JP" altLang="en-US"/>
+              </a:p>
+            </p:txBody>
+          </p:sp>
+          <p:sp>
+            <p:nvSpPr>
+              <p:cNvPr id="67" name="楕円 66">
+                <a:extLst>
+                  <a:ext uri="{FF2B5EF4-FFF2-40B4-BE49-F238E27FC236}">
+                    <a16:creationId xmlns:a16="http://schemas.microsoft.com/office/drawing/2014/main" id="{44305A5C-A462-4BC7-A849-4C2A7FEB88FE}"/>
+                  </a:ext>
+                </a:extLst>
+              </p:cNvPr>
+              <p:cNvSpPr/>
+              <p:nvPr/>
+            </p:nvSpPr>
+            <p:spPr>
+              <a:xfrm>
+                <a:off x="2457450" y="4234921"/>
+                <a:ext cx="717550" cy="670454"/>
+              </a:xfrm>
+              <a:prstGeom prst="ellipse">
+                <a:avLst/>
+              </a:prstGeom>
+              <a:solidFill>
+                <a:schemeClr val="accent6">
+                  <a:lumMod val="60000"/>
+                  <a:lumOff val="40000"/>
+                </a:schemeClr>
+              </a:solidFill>
+              <a:ln>
+                <a:solidFill>
+                  <a:schemeClr val="tx1"/>
+                </a:solidFill>
+              </a:ln>
+            </p:spPr>
+            <p:style>
+              <a:lnRef idx="2">
+                <a:schemeClr val="accent1">
+                  <a:shade val="50000"/>
+                </a:schemeClr>
+              </a:lnRef>
+              <a:fillRef idx="1">
+                <a:schemeClr val="accent1"/>
+              </a:fillRef>
+              <a:effectRef idx="0">
+                <a:schemeClr val="accent1"/>
+              </a:effectRef>
+              <a:fontRef idx="minor">
+                <a:schemeClr val="lt1"/>
+              </a:fontRef>
+            </p:style>
+            <p:txBody>
+              <a:bodyPr rtlCol="0" anchor="ctr"/>
+              <a:lstStyle/>
+              <a:p>
+                <a:pPr algn="ctr"/>
+                <a:endParaRPr kumimoji="1" lang="ja-JP" altLang="en-US"/>
+              </a:p>
+            </p:txBody>
+          </p:sp>
+        </p:grpSp>
+        <p:grpSp>
+          <p:nvGrpSpPr>
+            <p:cNvPr id="38" name="グループ化 37">
+              <a:extLst>
+                <a:ext uri="{FF2B5EF4-FFF2-40B4-BE49-F238E27FC236}">
+                  <a16:creationId xmlns:a16="http://schemas.microsoft.com/office/drawing/2014/main" id="{05B3A651-B748-40C6-A09D-823EF47CED2B}"/>
+                </a:ext>
+              </a:extLst>
+            </p:cNvPr>
+            <p:cNvGrpSpPr/>
+            <p:nvPr/>
+          </p:nvGrpSpPr>
+          <p:grpSpPr>
+            <a:xfrm>
+              <a:off x="3508693" y="3998074"/>
+              <a:ext cx="717550" cy="1497280"/>
+              <a:chOff x="2457450" y="4173273"/>
+              <a:chExt cx="717550" cy="1338527"/>
+            </a:xfrm>
+          </p:grpSpPr>
+          <p:sp>
+            <p:nvSpPr>
+              <p:cNvPr id="64" name="正方形/長方形 63">
+                <a:extLst>
+                  <a:ext uri="{FF2B5EF4-FFF2-40B4-BE49-F238E27FC236}">
+                    <a16:creationId xmlns:a16="http://schemas.microsoft.com/office/drawing/2014/main" id="{4768C74C-B910-422B-8477-F2DF99C50D83}"/>
+                  </a:ext>
+                </a:extLst>
+              </p:cNvPr>
+              <p:cNvSpPr/>
+              <p:nvPr/>
+            </p:nvSpPr>
+            <p:spPr>
+              <a:xfrm>
+                <a:off x="2717800" y="4508500"/>
+                <a:ext cx="196850" cy="1003300"/>
+              </a:xfrm>
+              <a:prstGeom prst="rect">
+                <a:avLst/>
+              </a:prstGeom>
+              <a:solidFill>
+                <a:schemeClr val="accent2">
+                  <a:lumMod val="50000"/>
+                </a:schemeClr>
+              </a:solidFill>
+            </p:spPr>
+            <p:style>
+              <a:lnRef idx="2">
+                <a:schemeClr val="accent1">
+                  <a:shade val="50000"/>
+                </a:schemeClr>
+              </a:lnRef>
+              <a:fillRef idx="1">
+                <a:schemeClr val="accent1"/>
+              </a:fillRef>
+              <a:effectRef idx="0">
+                <a:schemeClr val="accent1"/>
+              </a:effectRef>
+              <a:fontRef idx="minor">
+                <a:schemeClr val="lt1"/>
+              </a:fontRef>
+            </p:style>
+            <p:txBody>
+              <a:bodyPr rtlCol="0" anchor="ctr"/>
+              <a:lstStyle/>
+              <a:p>
+                <a:pPr algn="ctr"/>
+                <a:endParaRPr kumimoji="1" lang="ja-JP" altLang="en-US"/>
+              </a:p>
+            </p:txBody>
+          </p:sp>
+          <p:sp>
+            <p:nvSpPr>
+              <p:cNvPr id="65" name="楕円 64">
+                <a:extLst>
+                  <a:ext uri="{FF2B5EF4-FFF2-40B4-BE49-F238E27FC236}">
+                    <a16:creationId xmlns:a16="http://schemas.microsoft.com/office/drawing/2014/main" id="{3F9492B5-F2D0-4AD8-B70C-10966E702819}"/>
+                  </a:ext>
+                </a:extLst>
+              </p:cNvPr>
+              <p:cNvSpPr/>
+              <p:nvPr/>
+            </p:nvSpPr>
+            <p:spPr>
+              <a:xfrm>
+                <a:off x="2457450" y="4173273"/>
+                <a:ext cx="717550" cy="670454"/>
+              </a:xfrm>
+              <a:prstGeom prst="ellipse">
+                <a:avLst/>
+              </a:prstGeom>
+              <a:solidFill>
+                <a:schemeClr val="accent6">
+                  <a:lumMod val="60000"/>
+                  <a:lumOff val="40000"/>
+                </a:schemeClr>
+              </a:solidFill>
+              <a:ln>
+                <a:solidFill>
+                  <a:schemeClr val="tx1"/>
+                </a:solidFill>
+              </a:ln>
+            </p:spPr>
+            <p:style>
+              <a:lnRef idx="2">
+                <a:schemeClr val="accent1">
+                  <a:shade val="50000"/>
+                </a:schemeClr>
+              </a:lnRef>
+              <a:fillRef idx="1">
+                <a:schemeClr val="accent1"/>
+              </a:fillRef>
+              <a:effectRef idx="0">
+                <a:schemeClr val="accent1"/>
+              </a:effectRef>
+              <a:fontRef idx="minor">
+                <a:schemeClr val="lt1"/>
+              </a:fontRef>
+            </p:style>
+            <p:txBody>
+              <a:bodyPr rtlCol="0" anchor="ctr"/>
+              <a:lstStyle/>
+              <a:p>
+                <a:pPr algn="ctr"/>
+                <a:endParaRPr kumimoji="1" lang="ja-JP" altLang="en-US"/>
+              </a:p>
+            </p:txBody>
+          </p:sp>
+        </p:grpSp>
+        <p:grpSp>
+          <p:nvGrpSpPr>
+            <p:cNvPr id="39" name="グループ化 38">
+              <a:extLst>
+                <a:ext uri="{FF2B5EF4-FFF2-40B4-BE49-F238E27FC236}">
+                  <a16:creationId xmlns:a16="http://schemas.microsoft.com/office/drawing/2014/main" id="{5ADC8DB4-388E-49C9-BEE1-4A25223DEFF0}"/>
+                </a:ext>
+              </a:extLst>
+            </p:cNvPr>
+            <p:cNvGrpSpPr/>
+            <p:nvPr/>
+          </p:nvGrpSpPr>
+          <p:grpSpPr>
+            <a:xfrm>
+              <a:off x="3359636" y="3770421"/>
+              <a:ext cx="717550" cy="1741091"/>
+              <a:chOff x="2457450" y="4173273"/>
+              <a:chExt cx="717550" cy="1338527"/>
+            </a:xfrm>
+          </p:grpSpPr>
+          <p:sp>
+            <p:nvSpPr>
+              <p:cNvPr id="62" name="正方形/長方形 61">
+                <a:extLst>
+                  <a:ext uri="{FF2B5EF4-FFF2-40B4-BE49-F238E27FC236}">
+                    <a16:creationId xmlns:a16="http://schemas.microsoft.com/office/drawing/2014/main" id="{922DD165-C2C7-41BA-8092-23C005907595}"/>
+                  </a:ext>
+                </a:extLst>
+              </p:cNvPr>
+              <p:cNvSpPr/>
+              <p:nvPr/>
+            </p:nvSpPr>
+            <p:spPr>
+              <a:xfrm>
+                <a:off x="2717800" y="4508500"/>
+                <a:ext cx="196850" cy="1003300"/>
+              </a:xfrm>
+              <a:prstGeom prst="rect">
+                <a:avLst/>
+              </a:prstGeom>
+              <a:solidFill>
+                <a:schemeClr val="accent2">
+                  <a:lumMod val="50000"/>
+                </a:schemeClr>
+              </a:solidFill>
+            </p:spPr>
+            <p:style>
+              <a:lnRef idx="2">
+                <a:schemeClr val="accent1">
+                  <a:shade val="50000"/>
+                </a:schemeClr>
+              </a:lnRef>
+              <a:fillRef idx="1">
+                <a:schemeClr val="accent1"/>
+              </a:fillRef>
+              <a:effectRef idx="0">
+                <a:schemeClr val="accent1"/>
+              </a:effectRef>
+              <a:fontRef idx="minor">
+                <a:schemeClr val="lt1"/>
+              </a:fontRef>
+            </p:style>
+            <p:txBody>
+              <a:bodyPr rtlCol="0" anchor="ctr"/>
+              <a:lstStyle/>
+              <a:p>
+                <a:pPr algn="ctr"/>
+                <a:endParaRPr kumimoji="1" lang="ja-JP" altLang="en-US"/>
+              </a:p>
+            </p:txBody>
+          </p:sp>
+          <p:sp>
+            <p:nvSpPr>
+              <p:cNvPr id="63" name="楕円 62">
+                <a:extLst>
+                  <a:ext uri="{FF2B5EF4-FFF2-40B4-BE49-F238E27FC236}">
+                    <a16:creationId xmlns:a16="http://schemas.microsoft.com/office/drawing/2014/main" id="{D28BBBF8-C968-481E-8067-9321627A3370}"/>
+                  </a:ext>
+                </a:extLst>
+              </p:cNvPr>
+              <p:cNvSpPr/>
+              <p:nvPr/>
+            </p:nvSpPr>
+            <p:spPr>
+              <a:xfrm>
+                <a:off x="2457450" y="4173273"/>
+                <a:ext cx="717550" cy="670454"/>
+              </a:xfrm>
+              <a:prstGeom prst="ellipse">
+                <a:avLst/>
+              </a:prstGeom>
+              <a:solidFill>
+                <a:schemeClr val="accent6">
+                  <a:lumMod val="60000"/>
+                  <a:lumOff val="40000"/>
+                </a:schemeClr>
+              </a:solidFill>
+              <a:ln>
+                <a:solidFill>
+                  <a:schemeClr val="tx1"/>
+                </a:solidFill>
+              </a:ln>
+            </p:spPr>
+            <p:style>
+              <a:lnRef idx="2">
+                <a:schemeClr val="accent1">
+                  <a:shade val="50000"/>
+                </a:schemeClr>
+              </a:lnRef>
+              <a:fillRef idx="1">
+                <a:schemeClr val="accent1"/>
+              </a:fillRef>
+              <a:effectRef idx="0">
+                <a:schemeClr val="accent1"/>
+              </a:effectRef>
+              <a:fontRef idx="minor">
+                <a:schemeClr val="lt1"/>
+              </a:fontRef>
+            </p:style>
+            <p:txBody>
+              <a:bodyPr rtlCol="0" anchor="ctr"/>
+              <a:lstStyle/>
+              <a:p>
+                <a:pPr algn="ctr"/>
+                <a:endParaRPr kumimoji="1" lang="ja-JP" altLang="en-US"/>
+              </a:p>
+            </p:txBody>
+          </p:sp>
+        </p:grpSp>
+        <p:grpSp>
+          <p:nvGrpSpPr>
+            <p:cNvPr id="40" name="グループ化 39">
+              <a:extLst>
+                <a:ext uri="{FF2B5EF4-FFF2-40B4-BE49-F238E27FC236}">
+                  <a16:creationId xmlns:a16="http://schemas.microsoft.com/office/drawing/2014/main" id="{D2D4F4FB-D4AA-47C1-94DD-BC407E0BA4FD}"/>
+                </a:ext>
+              </a:extLst>
+            </p:cNvPr>
+            <p:cNvGrpSpPr/>
+            <p:nvPr/>
+          </p:nvGrpSpPr>
+          <p:grpSpPr>
+            <a:xfrm>
+              <a:off x="3820795" y="4234921"/>
+              <a:ext cx="523240" cy="1276879"/>
+              <a:chOff x="2457450" y="4234921"/>
+              <a:chExt cx="717550" cy="1276879"/>
+            </a:xfrm>
+          </p:grpSpPr>
+          <p:sp>
+            <p:nvSpPr>
+              <p:cNvPr id="60" name="正方形/長方形 59">
+                <a:extLst>
+                  <a:ext uri="{FF2B5EF4-FFF2-40B4-BE49-F238E27FC236}">
+                    <a16:creationId xmlns:a16="http://schemas.microsoft.com/office/drawing/2014/main" id="{30C4B03B-7A60-4C92-8DFF-42612437A796}"/>
+                  </a:ext>
+                </a:extLst>
+              </p:cNvPr>
+              <p:cNvSpPr/>
+              <p:nvPr/>
+            </p:nvSpPr>
+            <p:spPr>
+              <a:xfrm>
+                <a:off x="2717800" y="4508500"/>
+                <a:ext cx="196850" cy="1003300"/>
+              </a:xfrm>
+              <a:prstGeom prst="rect">
+                <a:avLst/>
+              </a:prstGeom>
+              <a:solidFill>
+                <a:schemeClr val="accent2">
+                  <a:lumMod val="50000"/>
+                </a:schemeClr>
+              </a:solidFill>
+            </p:spPr>
+            <p:style>
+              <a:lnRef idx="2">
+                <a:schemeClr val="accent1">
+                  <a:shade val="50000"/>
+                </a:schemeClr>
+              </a:lnRef>
+              <a:fillRef idx="1">
+                <a:schemeClr val="accent1"/>
+              </a:fillRef>
+              <a:effectRef idx="0">
+                <a:schemeClr val="accent1"/>
+              </a:effectRef>
+              <a:fontRef idx="minor">
+                <a:schemeClr val="lt1"/>
+              </a:fontRef>
+            </p:style>
+            <p:txBody>
+              <a:bodyPr rtlCol="0" anchor="ctr"/>
+              <a:lstStyle/>
+              <a:p>
+                <a:pPr algn="ctr"/>
+                <a:endParaRPr kumimoji="1" lang="ja-JP" altLang="en-US"/>
+              </a:p>
+            </p:txBody>
+          </p:sp>
+          <p:sp>
+            <p:nvSpPr>
+              <p:cNvPr id="61" name="楕円 60">
+                <a:extLst>
+                  <a:ext uri="{FF2B5EF4-FFF2-40B4-BE49-F238E27FC236}">
+                    <a16:creationId xmlns:a16="http://schemas.microsoft.com/office/drawing/2014/main" id="{0F59AD7B-023C-476C-9FEA-DDF8DF797FA7}"/>
+                  </a:ext>
+                </a:extLst>
+              </p:cNvPr>
+              <p:cNvSpPr/>
+              <p:nvPr/>
+            </p:nvSpPr>
+            <p:spPr>
+              <a:xfrm>
+                <a:off x="2457450" y="4234921"/>
+                <a:ext cx="717550" cy="670454"/>
+              </a:xfrm>
+              <a:prstGeom prst="ellipse">
+                <a:avLst/>
+              </a:prstGeom>
+              <a:solidFill>
+                <a:schemeClr val="accent6">
+                  <a:lumMod val="60000"/>
+                  <a:lumOff val="40000"/>
+                </a:schemeClr>
+              </a:solidFill>
+              <a:ln>
+                <a:solidFill>
+                  <a:schemeClr val="tx1"/>
+                </a:solidFill>
+              </a:ln>
+            </p:spPr>
+            <p:style>
+              <a:lnRef idx="2">
+                <a:schemeClr val="accent1">
+                  <a:shade val="50000"/>
+                </a:schemeClr>
+              </a:lnRef>
+              <a:fillRef idx="1">
+                <a:schemeClr val="accent1"/>
+              </a:fillRef>
+              <a:effectRef idx="0">
+                <a:schemeClr val="accent1"/>
+              </a:effectRef>
+              <a:fontRef idx="minor">
+                <a:schemeClr val="lt1"/>
+              </a:fontRef>
+            </p:style>
+            <p:txBody>
+              <a:bodyPr rtlCol="0" anchor="ctr"/>
+              <a:lstStyle/>
+              <a:p>
+                <a:pPr algn="ctr"/>
+                <a:endParaRPr kumimoji="1" lang="ja-JP" altLang="en-US"/>
+              </a:p>
+            </p:txBody>
+          </p:sp>
+        </p:grpSp>
+        <p:grpSp>
+          <p:nvGrpSpPr>
+            <p:cNvPr id="41" name="グループ化 40">
+              <a:extLst>
+                <a:ext uri="{FF2B5EF4-FFF2-40B4-BE49-F238E27FC236}">
+                  <a16:creationId xmlns:a16="http://schemas.microsoft.com/office/drawing/2014/main" id="{CF8413C4-D32B-4F76-8795-BE915B244B38}"/>
+                </a:ext>
+              </a:extLst>
+            </p:cNvPr>
+            <p:cNvGrpSpPr/>
+            <p:nvPr/>
+          </p:nvGrpSpPr>
+          <p:grpSpPr>
+            <a:xfrm>
+              <a:off x="4043998" y="4009038"/>
+              <a:ext cx="717550" cy="1497280"/>
+              <a:chOff x="2457450" y="4173273"/>
+              <a:chExt cx="717550" cy="1338527"/>
+            </a:xfrm>
+          </p:grpSpPr>
+          <p:sp>
+            <p:nvSpPr>
+              <p:cNvPr id="58" name="正方形/長方形 57">
+                <a:extLst>
+                  <a:ext uri="{FF2B5EF4-FFF2-40B4-BE49-F238E27FC236}">
+                    <a16:creationId xmlns:a16="http://schemas.microsoft.com/office/drawing/2014/main" id="{4BCFACB1-C37B-4CE2-93DE-F58624924656}"/>
+                  </a:ext>
+                </a:extLst>
+              </p:cNvPr>
+              <p:cNvSpPr/>
+              <p:nvPr/>
+            </p:nvSpPr>
+            <p:spPr>
+              <a:xfrm>
+                <a:off x="2717800" y="4508500"/>
+                <a:ext cx="196850" cy="1003300"/>
+              </a:xfrm>
+              <a:prstGeom prst="rect">
+                <a:avLst/>
+              </a:prstGeom>
+              <a:solidFill>
+                <a:schemeClr val="accent2">
+                  <a:lumMod val="50000"/>
+                </a:schemeClr>
+              </a:solidFill>
+            </p:spPr>
+            <p:style>
+              <a:lnRef idx="2">
+                <a:schemeClr val="accent1">
+                  <a:shade val="50000"/>
+                </a:schemeClr>
+              </a:lnRef>
+              <a:fillRef idx="1">
+                <a:schemeClr val="accent1"/>
+              </a:fillRef>
+              <a:effectRef idx="0">
+                <a:schemeClr val="accent1"/>
+              </a:effectRef>
+              <a:fontRef idx="minor">
+                <a:schemeClr val="lt1"/>
+              </a:fontRef>
+            </p:style>
+            <p:txBody>
+              <a:bodyPr rtlCol="0" anchor="ctr"/>
+              <a:lstStyle/>
+              <a:p>
+                <a:pPr algn="ctr"/>
+                <a:endParaRPr kumimoji="1" lang="ja-JP" altLang="en-US"/>
+              </a:p>
+            </p:txBody>
+          </p:sp>
+          <p:sp>
+            <p:nvSpPr>
+              <p:cNvPr id="59" name="楕円 58">
+                <a:extLst>
+                  <a:ext uri="{FF2B5EF4-FFF2-40B4-BE49-F238E27FC236}">
+                    <a16:creationId xmlns:a16="http://schemas.microsoft.com/office/drawing/2014/main" id="{92876836-4827-4FB8-A613-7C7EE0A6F922}"/>
+                  </a:ext>
+                </a:extLst>
+              </p:cNvPr>
+              <p:cNvSpPr/>
+              <p:nvPr/>
+            </p:nvSpPr>
+            <p:spPr>
+              <a:xfrm>
+                <a:off x="2457450" y="4173273"/>
+                <a:ext cx="717550" cy="670454"/>
+              </a:xfrm>
+              <a:prstGeom prst="ellipse">
+                <a:avLst/>
+              </a:prstGeom>
+              <a:solidFill>
+                <a:schemeClr val="accent6">
+                  <a:lumMod val="60000"/>
+                  <a:lumOff val="40000"/>
+                </a:schemeClr>
+              </a:solidFill>
+              <a:ln>
+                <a:solidFill>
+                  <a:schemeClr val="tx1"/>
+                </a:solidFill>
+              </a:ln>
+            </p:spPr>
+            <p:style>
+              <a:lnRef idx="2">
+                <a:schemeClr val="accent1">
+                  <a:shade val="50000"/>
+                </a:schemeClr>
+              </a:lnRef>
+              <a:fillRef idx="1">
+                <a:schemeClr val="accent1"/>
+              </a:fillRef>
+              <a:effectRef idx="0">
+                <a:schemeClr val="accent1"/>
+              </a:effectRef>
+              <a:fontRef idx="minor">
+                <a:schemeClr val="lt1"/>
+              </a:fontRef>
+            </p:style>
+            <p:txBody>
+              <a:bodyPr rtlCol="0" anchor="ctr"/>
+              <a:lstStyle/>
+              <a:p>
+                <a:pPr algn="ctr"/>
+                <a:endParaRPr kumimoji="1" lang="ja-JP" altLang="en-US"/>
+              </a:p>
+            </p:txBody>
+          </p:sp>
+        </p:grpSp>
+        <p:grpSp>
+          <p:nvGrpSpPr>
+            <p:cNvPr id="42" name="グループ化 41">
+              <a:extLst>
+                <a:ext uri="{FF2B5EF4-FFF2-40B4-BE49-F238E27FC236}">
+                  <a16:creationId xmlns:a16="http://schemas.microsoft.com/office/drawing/2014/main" id="{716AE391-BC6C-43EE-A979-373629F4E1A0}"/>
+                </a:ext>
+              </a:extLst>
+            </p:cNvPr>
+            <p:cNvGrpSpPr/>
+            <p:nvPr/>
+          </p:nvGrpSpPr>
+          <p:grpSpPr>
+            <a:xfrm>
+              <a:off x="3879533" y="3759745"/>
+              <a:ext cx="717550" cy="1741091"/>
+              <a:chOff x="2457450" y="4173273"/>
+              <a:chExt cx="717550" cy="1338527"/>
+            </a:xfrm>
+          </p:grpSpPr>
+          <p:sp>
+            <p:nvSpPr>
+              <p:cNvPr id="55" name="正方形/長方形 54">
+                <a:extLst>
+                  <a:ext uri="{FF2B5EF4-FFF2-40B4-BE49-F238E27FC236}">
+                    <a16:creationId xmlns:a16="http://schemas.microsoft.com/office/drawing/2014/main" id="{AB10D4F9-A905-46C0-B3FF-8725785F435C}"/>
+                  </a:ext>
+                </a:extLst>
+              </p:cNvPr>
+              <p:cNvSpPr/>
+              <p:nvPr/>
+            </p:nvSpPr>
+            <p:spPr>
+              <a:xfrm>
+                <a:off x="2717800" y="4508500"/>
+                <a:ext cx="196850" cy="1003300"/>
+              </a:xfrm>
+              <a:prstGeom prst="rect">
+                <a:avLst/>
+              </a:prstGeom>
+              <a:solidFill>
+                <a:schemeClr val="accent2">
+                  <a:lumMod val="50000"/>
+                </a:schemeClr>
+              </a:solidFill>
+            </p:spPr>
+            <p:style>
+              <a:lnRef idx="2">
+                <a:schemeClr val="accent1">
+                  <a:shade val="50000"/>
+                </a:schemeClr>
+              </a:lnRef>
+              <a:fillRef idx="1">
+                <a:schemeClr val="accent1"/>
+              </a:fillRef>
+              <a:effectRef idx="0">
+                <a:schemeClr val="accent1"/>
+              </a:effectRef>
+              <a:fontRef idx="minor">
+                <a:schemeClr val="lt1"/>
+              </a:fontRef>
+            </p:style>
+            <p:txBody>
+              <a:bodyPr rtlCol="0" anchor="ctr"/>
+              <a:lstStyle/>
+              <a:p>
+                <a:pPr algn="ctr"/>
+                <a:endParaRPr kumimoji="1" lang="ja-JP" altLang="en-US"/>
+              </a:p>
+            </p:txBody>
+          </p:sp>
+          <p:sp>
+            <p:nvSpPr>
+              <p:cNvPr id="57" name="楕円 56">
+                <a:extLst>
+                  <a:ext uri="{FF2B5EF4-FFF2-40B4-BE49-F238E27FC236}">
+                    <a16:creationId xmlns:a16="http://schemas.microsoft.com/office/drawing/2014/main" id="{0FF67D8F-4446-4B23-AFF7-C17E5D76C1F4}"/>
+                  </a:ext>
+                </a:extLst>
+              </p:cNvPr>
+              <p:cNvSpPr/>
+              <p:nvPr/>
+            </p:nvSpPr>
+            <p:spPr>
+              <a:xfrm>
+                <a:off x="2457450" y="4173273"/>
+                <a:ext cx="717550" cy="670454"/>
+              </a:xfrm>
+              <a:prstGeom prst="ellipse">
+                <a:avLst/>
+              </a:prstGeom>
+              <a:solidFill>
+                <a:schemeClr val="accent6">
+                  <a:lumMod val="60000"/>
+                  <a:lumOff val="40000"/>
+                </a:schemeClr>
+              </a:solidFill>
+              <a:ln>
+                <a:solidFill>
+                  <a:schemeClr val="tx1"/>
+                </a:solidFill>
+              </a:ln>
+            </p:spPr>
+            <p:style>
+              <a:lnRef idx="2">
+                <a:schemeClr val="accent1">
+                  <a:shade val="50000"/>
+                </a:schemeClr>
+              </a:lnRef>
+              <a:fillRef idx="1">
+                <a:schemeClr val="accent1"/>
+              </a:fillRef>
+              <a:effectRef idx="0">
+                <a:schemeClr val="accent1"/>
+              </a:effectRef>
+              <a:fontRef idx="minor">
+                <a:schemeClr val="lt1"/>
+              </a:fontRef>
+            </p:style>
+            <p:txBody>
+              <a:bodyPr rtlCol="0" anchor="ctr"/>
+              <a:lstStyle/>
+              <a:p>
+                <a:pPr algn="ctr"/>
+                <a:endParaRPr kumimoji="1" lang="ja-JP" altLang="en-US"/>
+              </a:p>
+            </p:txBody>
+          </p:sp>
+        </p:grpSp>
+        <p:grpSp>
+          <p:nvGrpSpPr>
+            <p:cNvPr id="43" name="グループ化 42">
+              <a:extLst>
+                <a:ext uri="{FF2B5EF4-FFF2-40B4-BE49-F238E27FC236}">
+                  <a16:creationId xmlns:a16="http://schemas.microsoft.com/office/drawing/2014/main" id="{A08A37CE-3657-48BA-ADA0-ABB877994D3A}"/>
+                </a:ext>
+              </a:extLst>
+            </p:cNvPr>
+            <p:cNvGrpSpPr/>
+            <p:nvPr/>
+          </p:nvGrpSpPr>
+          <p:grpSpPr>
+            <a:xfrm>
+              <a:off x="839956" y="3567221"/>
+              <a:ext cx="131763" cy="203200"/>
+              <a:chOff x="1333500" y="5133182"/>
+              <a:chExt cx="263525" cy="375179"/>
+            </a:xfrm>
+          </p:grpSpPr>
+          <p:sp>
+            <p:nvSpPr>
+              <p:cNvPr id="51" name="二等辺三角形 50">
+                <a:extLst>
+                  <a:ext uri="{FF2B5EF4-FFF2-40B4-BE49-F238E27FC236}">
+                    <a16:creationId xmlns:a16="http://schemas.microsoft.com/office/drawing/2014/main" id="{91655F79-219A-4E9D-9425-BF4B9ED43BDC}"/>
+                  </a:ext>
+                </a:extLst>
+              </p:cNvPr>
+              <p:cNvSpPr/>
+              <p:nvPr/>
+            </p:nvSpPr>
+            <p:spPr>
+              <a:xfrm rot="5400000">
+                <a:off x="1534980" y="5222082"/>
+                <a:ext cx="66940" cy="57150"/>
+              </a:xfrm>
+              <a:prstGeom prst="triangle">
+                <a:avLst/>
+              </a:prstGeom>
+            </p:spPr>
+            <p:style>
+              <a:lnRef idx="2">
+                <a:schemeClr val="accent1">
+                  <a:shade val="50000"/>
+                </a:schemeClr>
+              </a:lnRef>
+              <a:fillRef idx="1">
+                <a:schemeClr val="accent1"/>
+              </a:fillRef>
+              <a:effectRef idx="0">
+                <a:schemeClr val="accent1"/>
+              </a:effectRef>
+              <a:fontRef idx="minor">
+                <a:schemeClr val="lt1"/>
+              </a:fontRef>
+            </p:style>
+            <p:txBody>
+              <a:bodyPr rtlCol="0" anchor="ctr"/>
+              <a:lstStyle/>
+              <a:p>
+                <a:pPr algn="ctr"/>
+                <a:endParaRPr kumimoji="1" lang="ja-JP" altLang="en-US"/>
+              </a:p>
+            </p:txBody>
+          </p:sp>
+          <p:grpSp>
+            <p:nvGrpSpPr>
+              <p:cNvPr id="52" name="グループ化 51">
+                <a:extLst>
+                  <a:ext uri="{FF2B5EF4-FFF2-40B4-BE49-F238E27FC236}">
+                    <a16:creationId xmlns:a16="http://schemas.microsoft.com/office/drawing/2014/main" id="{A18B4E79-4FA4-4DDC-89E0-81FDE1ADA809}"/>
+                  </a:ext>
+                </a:extLst>
+              </p:cNvPr>
+              <p:cNvGrpSpPr/>
+              <p:nvPr/>
+            </p:nvGrpSpPr>
+            <p:grpSpPr>
+              <a:xfrm>
+                <a:off x="1333500" y="5133182"/>
+                <a:ext cx="234950" cy="375179"/>
+                <a:chOff x="2470150" y="4146021"/>
+                <a:chExt cx="234950" cy="375179"/>
+              </a:xfrm>
+            </p:grpSpPr>
+            <p:sp>
+              <p:nvSpPr>
+                <p:cNvPr id="53" name="二等辺三角形 52">
+                  <a:extLst>
+                    <a:ext uri="{FF2B5EF4-FFF2-40B4-BE49-F238E27FC236}">
+                      <a16:creationId xmlns:a16="http://schemas.microsoft.com/office/drawing/2014/main" id="{230525B3-2343-4379-85D9-3AC229FA6060}"/>
+                    </a:ext>
+                  </a:extLst>
+                </p:cNvPr>
+                <p:cNvSpPr/>
+                <p:nvPr/>
+              </p:nvSpPr>
+              <p:spPr>
+                <a:xfrm>
+                  <a:off x="2470150" y="4286250"/>
+                  <a:ext cx="234950" cy="234950"/>
+                </a:xfrm>
+                <a:prstGeom prst="triangle">
+                  <a:avLst/>
+                </a:prstGeom>
+              </p:spPr>
+              <p:style>
+                <a:lnRef idx="2">
+                  <a:schemeClr val="accent1">
+                    <a:shade val="50000"/>
+                  </a:schemeClr>
+                </a:lnRef>
+                <a:fillRef idx="1">
+                  <a:schemeClr val="accent1"/>
+                </a:fillRef>
+                <a:effectRef idx="0">
+                  <a:schemeClr val="accent1"/>
+                </a:effectRef>
+                <a:fontRef idx="minor">
+                  <a:schemeClr val="lt1"/>
+                </a:fontRef>
+              </p:style>
+              <p:txBody>
+                <a:bodyPr rtlCol="0" anchor="ctr"/>
+                <a:lstStyle/>
+                <a:p>
+                  <a:pPr algn="ctr"/>
+                  <a:endParaRPr kumimoji="1" lang="ja-JP" altLang="en-US"/>
+                </a:p>
+              </p:txBody>
+            </p:sp>
+            <p:sp>
+              <p:nvSpPr>
+                <p:cNvPr id="54" name="楕円 53">
+                  <a:extLst>
+                    <a:ext uri="{FF2B5EF4-FFF2-40B4-BE49-F238E27FC236}">
+                      <a16:creationId xmlns:a16="http://schemas.microsoft.com/office/drawing/2014/main" id="{4E34FE97-70E3-4452-B156-DACD93ABF60D}"/>
+                    </a:ext>
+                  </a:extLst>
+                </p:cNvPr>
+                <p:cNvSpPr/>
+                <p:nvPr/>
+              </p:nvSpPr>
+              <p:spPr>
+                <a:xfrm>
+                  <a:off x="2470150" y="4146021"/>
+                  <a:ext cx="234950" cy="234950"/>
+                </a:xfrm>
+                <a:prstGeom prst="ellipse">
+                  <a:avLst/>
+                </a:prstGeom>
+              </p:spPr>
+              <p:style>
+                <a:lnRef idx="2">
+                  <a:schemeClr val="accent1">
+                    <a:shade val="50000"/>
+                  </a:schemeClr>
+                </a:lnRef>
+                <a:fillRef idx="1">
+                  <a:schemeClr val="accent1"/>
+                </a:fillRef>
+                <a:effectRef idx="0">
+                  <a:schemeClr val="accent1"/>
+                </a:effectRef>
+                <a:fontRef idx="minor">
+                  <a:schemeClr val="lt1"/>
+                </a:fontRef>
+              </p:style>
+              <p:txBody>
+                <a:bodyPr rtlCol="0" anchor="ctr"/>
+                <a:lstStyle/>
+                <a:p>
+                  <a:pPr algn="ctr"/>
+                  <a:endParaRPr kumimoji="1" lang="ja-JP" altLang="en-US"/>
+                </a:p>
+              </p:txBody>
+            </p:sp>
+          </p:grpSp>
+        </p:grpSp>
+        <p:sp>
+          <p:nvSpPr>
+            <p:cNvPr id="44" name="テキスト ボックス 43">
+              <a:extLst>
+                <a:ext uri="{FF2B5EF4-FFF2-40B4-BE49-F238E27FC236}">
+                  <a16:creationId xmlns:a16="http://schemas.microsoft.com/office/drawing/2014/main" id="{03F942E3-EB57-4B48-BA20-D2B7C3261DF5}"/>
+                </a:ext>
+              </a:extLst>
+            </p:cNvPr>
+            <p:cNvSpPr txBox="1"/>
+            <p:nvPr/>
+          </p:nvSpPr>
+          <p:spPr>
+            <a:xfrm>
+              <a:off x="825666" y="3443440"/>
+              <a:ext cx="399468" cy="338554"/>
+            </a:xfrm>
+            <a:prstGeom prst="rect">
+              <a:avLst/>
+            </a:prstGeom>
+            <a:noFill/>
+          </p:spPr>
+          <p:txBody>
+            <a:bodyPr wrap="none" rtlCol="0">
+              <a:spAutoFit/>
+            </a:bodyPr>
+            <a:lstStyle/>
+            <a:p>
+              <a:r>
+                <a:rPr kumimoji="1" lang="en-US" altLang="ja-JP" sz="1600" dirty="0"/>
+                <a:t>x3</a:t>
+              </a:r>
+              <a:endParaRPr kumimoji="1" lang="en-US" altLang="ja-JP" sz="1600" b="1" dirty="0">
+                <a:solidFill>
+                  <a:srgbClr val="FF0000"/>
+                </a:solidFill>
+              </a:endParaRPr>
+            </a:p>
+          </p:txBody>
+        </p:sp>
+        <p:sp>
+          <p:nvSpPr>
+            <p:cNvPr id="45" name="四角形: 角度付き 44">
+              <a:extLst>
+                <a:ext uri="{FF2B5EF4-FFF2-40B4-BE49-F238E27FC236}">
+                  <a16:creationId xmlns:a16="http://schemas.microsoft.com/office/drawing/2014/main" id="{0578A5DD-19CC-45D4-AF5E-F85172979CB3}"/>
+                </a:ext>
+              </a:extLst>
+            </p:cNvPr>
+            <p:cNvSpPr/>
+            <p:nvPr/>
+          </p:nvSpPr>
+          <p:spPr>
+            <a:xfrm>
+              <a:off x="5045885" y="5238221"/>
+              <a:ext cx="273827" cy="265356"/>
+            </a:xfrm>
+            <a:prstGeom prst="bevel">
+              <a:avLst/>
+            </a:prstGeom>
+            <a:solidFill>
+              <a:schemeClr val="bg2"/>
+            </a:solidFill>
+            <a:ln>
+              <a:solidFill>
+                <a:schemeClr val="tx1"/>
+              </a:solidFill>
+            </a:ln>
+          </p:spPr>
+          <p:style>
+            <a:lnRef idx="2">
+              <a:schemeClr val="accent1">
+                <a:shade val="50000"/>
+              </a:schemeClr>
+            </a:lnRef>
+            <a:fillRef idx="1">
+              <a:schemeClr val="accent1"/>
+            </a:fillRef>
+            <a:effectRef idx="0">
+              <a:schemeClr val="accent1"/>
+            </a:effectRef>
+            <a:fontRef idx="minor">
+              <a:schemeClr val="lt1"/>
+            </a:fontRef>
+          </p:style>
+          <p:txBody>
+            <a:bodyPr rtlCol="0" anchor="ctr"/>
+            <a:lstStyle/>
+            <a:p>
+              <a:pPr algn="ctr"/>
+              <a:endParaRPr kumimoji="1" lang="ja-JP" altLang="en-US"/>
+            </a:p>
+          </p:txBody>
+        </p:sp>
+        <p:sp>
+          <p:nvSpPr>
+            <p:cNvPr id="46" name="四角形: 角度付き 45">
+              <a:extLst>
+                <a:ext uri="{FF2B5EF4-FFF2-40B4-BE49-F238E27FC236}">
+                  <a16:creationId xmlns:a16="http://schemas.microsoft.com/office/drawing/2014/main" id="{CC76B786-EF94-4B7B-9D15-0F887A958AC9}"/>
+                </a:ext>
+              </a:extLst>
+            </p:cNvPr>
+            <p:cNvSpPr/>
+            <p:nvPr/>
+          </p:nvSpPr>
+          <p:spPr>
+            <a:xfrm>
+              <a:off x="5332746" y="5238539"/>
+              <a:ext cx="273827" cy="265356"/>
+            </a:xfrm>
+            <a:prstGeom prst="bevel">
+              <a:avLst/>
+            </a:prstGeom>
+            <a:solidFill>
+              <a:schemeClr val="bg2"/>
+            </a:solidFill>
+            <a:ln>
+              <a:solidFill>
+                <a:schemeClr val="tx1"/>
+              </a:solidFill>
+            </a:ln>
+          </p:spPr>
+          <p:style>
+            <a:lnRef idx="2">
+              <a:schemeClr val="accent1">
+                <a:shade val="50000"/>
+              </a:schemeClr>
+            </a:lnRef>
+            <a:fillRef idx="1">
+              <a:schemeClr val="accent1"/>
+            </a:fillRef>
+            <a:effectRef idx="0">
+              <a:schemeClr val="accent1"/>
+            </a:effectRef>
+            <a:fontRef idx="minor">
+              <a:schemeClr val="lt1"/>
+            </a:fontRef>
+          </p:style>
+          <p:txBody>
+            <a:bodyPr rtlCol="0" anchor="ctr"/>
+            <a:lstStyle/>
+            <a:p>
+              <a:pPr algn="ctr"/>
+              <a:endParaRPr kumimoji="1" lang="ja-JP" altLang="en-US"/>
+            </a:p>
+          </p:txBody>
+        </p:sp>
+        <p:sp>
+          <p:nvSpPr>
+            <p:cNvPr id="47" name="四角形: 角度付き 46">
+              <a:extLst>
+                <a:ext uri="{FF2B5EF4-FFF2-40B4-BE49-F238E27FC236}">
+                  <a16:creationId xmlns:a16="http://schemas.microsoft.com/office/drawing/2014/main" id="{7F3FCF2B-2C3C-4C8B-96D8-8D84F120931F}"/>
+                </a:ext>
+              </a:extLst>
+            </p:cNvPr>
+            <p:cNvSpPr/>
+            <p:nvPr/>
+          </p:nvSpPr>
+          <p:spPr>
+            <a:xfrm>
+              <a:off x="5617392" y="5238223"/>
+              <a:ext cx="273827" cy="265356"/>
+            </a:xfrm>
+            <a:prstGeom prst="bevel">
+              <a:avLst/>
+            </a:prstGeom>
+            <a:solidFill>
+              <a:schemeClr val="bg2"/>
+            </a:solidFill>
+            <a:ln>
+              <a:solidFill>
+                <a:schemeClr val="tx1"/>
+              </a:solidFill>
+            </a:ln>
+          </p:spPr>
+          <p:style>
+            <a:lnRef idx="2">
+              <a:schemeClr val="accent1">
+                <a:shade val="50000"/>
+              </a:schemeClr>
+            </a:lnRef>
+            <a:fillRef idx="1">
+              <a:schemeClr val="accent1"/>
+            </a:fillRef>
+            <a:effectRef idx="0">
+              <a:schemeClr val="accent1"/>
+            </a:effectRef>
+            <a:fontRef idx="minor">
+              <a:schemeClr val="lt1"/>
+            </a:fontRef>
+          </p:style>
+          <p:txBody>
+            <a:bodyPr rtlCol="0" anchor="ctr"/>
+            <a:lstStyle/>
+            <a:p>
+              <a:pPr algn="ctr"/>
+              <a:endParaRPr kumimoji="1" lang="ja-JP" altLang="en-US"/>
+            </a:p>
+          </p:txBody>
+        </p:sp>
+        <p:sp>
+          <p:nvSpPr>
+            <p:cNvPr id="48" name="四角形: 角度付き 47">
+              <a:extLst>
+                <a:ext uri="{FF2B5EF4-FFF2-40B4-BE49-F238E27FC236}">
+                  <a16:creationId xmlns:a16="http://schemas.microsoft.com/office/drawing/2014/main" id="{A7AD0711-224D-488B-8C2E-8F32274A4004}"/>
+                </a:ext>
+              </a:extLst>
+            </p:cNvPr>
+            <p:cNvSpPr/>
+            <p:nvPr/>
+          </p:nvSpPr>
+          <p:spPr>
+            <a:xfrm>
+              <a:off x="5904253" y="5238541"/>
+              <a:ext cx="273827" cy="265356"/>
+            </a:xfrm>
+            <a:prstGeom prst="bevel">
+              <a:avLst/>
+            </a:prstGeom>
+            <a:solidFill>
+              <a:schemeClr val="bg2"/>
+            </a:solidFill>
+            <a:ln>
+              <a:solidFill>
+                <a:schemeClr val="tx1"/>
+              </a:solidFill>
+            </a:ln>
+          </p:spPr>
+          <p:style>
+            <a:lnRef idx="2">
+              <a:schemeClr val="accent1">
+                <a:shade val="50000"/>
+              </a:schemeClr>
+            </a:lnRef>
+            <a:fillRef idx="1">
+              <a:schemeClr val="accent1"/>
+            </a:fillRef>
+            <a:effectRef idx="0">
+              <a:schemeClr val="accent1"/>
+            </a:effectRef>
+            <a:fontRef idx="minor">
+              <a:schemeClr val="lt1"/>
+            </a:fontRef>
+          </p:style>
+          <p:txBody>
+            <a:bodyPr rtlCol="0" anchor="ctr"/>
+            <a:lstStyle/>
+            <a:p>
+              <a:pPr algn="ctr"/>
+              <a:endParaRPr kumimoji="1" lang="ja-JP" altLang="en-US"/>
+            </a:p>
+          </p:txBody>
+        </p:sp>
+        <p:sp>
+          <p:nvSpPr>
+            <p:cNvPr id="49" name="四角形: 角度付き 48">
+              <a:extLst>
+                <a:ext uri="{FF2B5EF4-FFF2-40B4-BE49-F238E27FC236}">
+                  <a16:creationId xmlns:a16="http://schemas.microsoft.com/office/drawing/2014/main" id="{B5C934BA-D34A-4B4C-8A76-63B9E194E99A}"/>
+                </a:ext>
+              </a:extLst>
+            </p:cNvPr>
+            <p:cNvSpPr/>
+            <p:nvPr/>
+          </p:nvSpPr>
+          <p:spPr>
+            <a:xfrm>
+              <a:off x="5617387" y="4961993"/>
+              <a:ext cx="273827" cy="265356"/>
+            </a:xfrm>
+            <a:prstGeom prst="bevel">
+              <a:avLst/>
+            </a:prstGeom>
+            <a:solidFill>
+              <a:schemeClr val="bg2"/>
+            </a:solidFill>
+            <a:ln>
+              <a:solidFill>
+                <a:schemeClr val="tx1"/>
+              </a:solidFill>
+            </a:ln>
+          </p:spPr>
+          <p:style>
+            <a:lnRef idx="2">
+              <a:schemeClr val="accent1">
+                <a:shade val="50000"/>
+              </a:schemeClr>
+            </a:lnRef>
+            <a:fillRef idx="1">
+              <a:schemeClr val="accent1"/>
+            </a:fillRef>
+            <a:effectRef idx="0">
+              <a:schemeClr val="accent1"/>
+            </a:effectRef>
+            <a:fontRef idx="minor">
+              <a:schemeClr val="lt1"/>
+            </a:fontRef>
+          </p:style>
+          <p:txBody>
+            <a:bodyPr rtlCol="0" anchor="ctr"/>
+            <a:lstStyle/>
+            <a:p>
+              <a:pPr algn="ctr"/>
+              <a:endParaRPr kumimoji="1" lang="ja-JP" altLang="en-US"/>
+            </a:p>
+          </p:txBody>
+        </p:sp>
+        <p:sp>
+          <p:nvSpPr>
+            <p:cNvPr id="50" name="四角形: 角度付き 49">
+              <a:extLst>
+                <a:ext uri="{FF2B5EF4-FFF2-40B4-BE49-F238E27FC236}">
+                  <a16:creationId xmlns:a16="http://schemas.microsoft.com/office/drawing/2014/main" id="{DB6D8B3A-CD99-436A-85B0-ED3D9890170A}"/>
+                </a:ext>
+              </a:extLst>
+            </p:cNvPr>
+            <p:cNvSpPr/>
+            <p:nvPr/>
+          </p:nvSpPr>
+          <p:spPr>
+            <a:xfrm>
+              <a:off x="5904248" y="4962311"/>
+              <a:ext cx="273827" cy="265356"/>
+            </a:xfrm>
+            <a:prstGeom prst="bevel">
+              <a:avLst/>
+            </a:prstGeom>
+            <a:solidFill>
+              <a:schemeClr val="bg2"/>
+            </a:solidFill>
+            <a:ln>
+              <a:solidFill>
+                <a:schemeClr val="tx1"/>
+              </a:solidFill>
+            </a:ln>
+          </p:spPr>
+          <p:style>
+            <a:lnRef idx="2">
+              <a:schemeClr val="accent1">
+                <a:shade val="50000"/>
+              </a:schemeClr>
+            </a:lnRef>
+            <a:fillRef idx="1">
+              <a:schemeClr val="accent1"/>
+            </a:fillRef>
+            <a:effectRef idx="0">
+              <a:schemeClr val="accent1"/>
+            </a:effectRef>
+            <a:fontRef idx="minor">
+              <a:schemeClr val="lt1"/>
+            </a:fontRef>
+          </p:style>
+          <p:txBody>
+            <a:bodyPr rtlCol="0" anchor="ctr"/>
+            <a:lstStyle/>
+            <a:p>
+              <a:pPr algn="ctr"/>
+              <a:endParaRPr kumimoji="1" lang="ja-JP" altLang="en-US"/>
+            </a:p>
+          </p:txBody>
+        </p:sp>
+      </p:grpSp>
+      <p:sp>
+        <p:nvSpPr>
+          <p:cNvPr id="78" name="テキスト ボックス 77">
+            <a:extLst>
+              <a:ext uri="{FF2B5EF4-FFF2-40B4-BE49-F238E27FC236}">
+                <a16:creationId xmlns:a16="http://schemas.microsoft.com/office/drawing/2014/main" id="{3CF2F95C-CDEB-45B1-9F2A-54BEE0782C4B}"/>
+              </a:ext>
+            </a:extLst>
+          </p:cNvPr>
+          <p:cNvSpPr txBox="1"/>
+          <p:nvPr/>
+        </p:nvSpPr>
+        <p:spPr>
+          <a:xfrm>
+            <a:off x="3244511" y="2926867"/>
+            <a:ext cx="492443" cy="461665"/>
+          </a:xfrm>
+          <a:prstGeom prst="rect">
+            <a:avLst/>
+          </a:prstGeom>
+          <a:noFill/>
+        </p:spPr>
+        <p:txBody>
+          <a:bodyPr wrap="none" rtlCol="0">
+            <a:spAutoFit/>
+          </a:bodyPr>
+          <a:lstStyle/>
+          <a:p>
+            <a:r>
+              <a:rPr kumimoji="1" lang="ja-JP" altLang="en-US" sz="2400" b="1" dirty="0"/>
+              <a:t>裏</a:t>
+            </a:r>
+            <a:endParaRPr kumimoji="1" lang="en-US" altLang="ja-JP" sz="2400" b="1" dirty="0"/>
+          </a:p>
+        </p:txBody>
+      </p:sp>
+      <p:sp>
+        <p:nvSpPr>
+          <p:cNvPr id="79" name="テキスト ボックス 78">
+            <a:extLst>
+              <a:ext uri="{FF2B5EF4-FFF2-40B4-BE49-F238E27FC236}">
+                <a16:creationId xmlns:a16="http://schemas.microsoft.com/office/drawing/2014/main" id="{38F4EC60-8298-40C6-A523-25466855FC38}"/>
+              </a:ext>
+            </a:extLst>
+          </p:cNvPr>
+          <p:cNvSpPr txBox="1"/>
+          <p:nvPr/>
+        </p:nvSpPr>
+        <p:spPr>
+          <a:xfrm>
+            <a:off x="567542" y="5204267"/>
+            <a:ext cx="4459875" cy="1323439"/>
+          </a:xfrm>
+          <a:prstGeom prst="rect">
+            <a:avLst/>
+          </a:prstGeom>
+          <a:noFill/>
+        </p:spPr>
+        <p:txBody>
+          <a:bodyPr wrap="none" rtlCol="0">
+            <a:spAutoFit/>
+          </a:bodyPr>
+          <a:lstStyle/>
+          <a:p>
+            <a:r>
+              <a:rPr lang="en-US" altLang="ja-JP" sz="2000" b="1" dirty="0">
+                <a:solidFill>
+                  <a:srgbClr val="00B050"/>
+                </a:solidFill>
+              </a:rPr>
+              <a:t>MEMO</a:t>
+            </a:r>
+          </a:p>
+          <a:p>
+            <a:r>
+              <a:rPr kumimoji="1" lang="ja-JP" altLang="en-US" sz="2000" dirty="0"/>
+              <a:t>一般的なゲームは、</a:t>
+            </a:r>
+            <a:endParaRPr kumimoji="1" lang="en-US" altLang="ja-JP" sz="2000" dirty="0"/>
+          </a:p>
+          <a:p>
+            <a:r>
+              <a:rPr kumimoji="1" lang="en-US" altLang="ja-JP" sz="2000" dirty="0"/>
+              <a:t>1</a:t>
+            </a:r>
+            <a:r>
+              <a:rPr kumimoji="1" lang="ja-JP" altLang="en-US" sz="2000" dirty="0"/>
+              <a:t>秒間に</a:t>
+            </a:r>
+            <a:r>
+              <a:rPr kumimoji="1" lang="en-US" altLang="ja-JP" sz="2000" dirty="0"/>
+              <a:t>60</a:t>
+            </a:r>
+            <a:r>
+              <a:rPr kumimoji="1" lang="ja-JP" altLang="en-US" sz="2000" dirty="0"/>
+              <a:t>回フリップが発生します。</a:t>
+            </a:r>
+            <a:endParaRPr kumimoji="1" lang="en-US" altLang="ja-JP" sz="2000" dirty="0"/>
+          </a:p>
+          <a:p>
+            <a:r>
+              <a:rPr lang="en-US" altLang="ja-JP" sz="2000" dirty="0"/>
+              <a:t>(</a:t>
+            </a:r>
+            <a:r>
+              <a:rPr kumimoji="1" lang="en-US" altLang="ja-JP" sz="2000" dirty="0"/>
+              <a:t>FPS60)</a:t>
+            </a:r>
+          </a:p>
+        </p:txBody>
+      </p:sp>
+      <p:grpSp>
+        <p:nvGrpSpPr>
+          <p:cNvPr id="56" name="グループ化 55">
+            <a:extLst>
+              <a:ext uri="{FF2B5EF4-FFF2-40B4-BE49-F238E27FC236}">
+                <a16:creationId xmlns:a16="http://schemas.microsoft.com/office/drawing/2014/main" id="{4B83259E-6181-4D14-928B-0EF0B6D1D726}"/>
+              </a:ext>
+            </a:extLst>
+          </p:cNvPr>
+          <p:cNvGrpSpPr/>
+          <p:nvPr/>
+        </p:nvGrpSpPr>
+        <p:grpSpPr>
+          <a:xfrm>
+            <a:off x="5055277" y="2932630"/>
+            <a:ext cx="3153833" cy="2057400"/>
+            <a:chOff x="673100" y="3429000"/>
+            <a:chExt cx="6311900" cy="3200400"/>
+          </a:xfrm>
+        </p:grpSpPr>
+        <p:sp>
+          <p:nvSpPr>
+            <p:cNvPr id="80" name="正方形/長方形 79">
+              <a:extLst>
+                <a:ext uri="{FF2B5EF4-FFF2-40B4-BE49-F238E27FC236}">
+                  <a16:creationId xmlns:a16="http://schemas.microsoft.com/office/drawing/2014/main" id="{1633196F-DE98-4663-812C-2CBC6FE71776}"/>
+                </a:ext>
+              </a:extLst>
+            </p:cNvPr>
+            <p:cNvSpPr/>
+            <p:nvPr/>
+          </p:nvSpPr>
+          <p:spPr>
+            <a:xfrm>
+              <a:off x="673100" y="3429000"/>
+              <a:ext cx="6311900" cy="3200400"/>
+            </a:xfrm>
+            <a:prstGeom prst="rect">
+              <a:avLst/>
+            </a:prstGeom>
+            <a:solidFill>
+              <a:schemeClr val="accent4">
+                <a:lumMod val="40000"/>
+                <a:lumOff val="60000"/>
+              </a:schemeClr>
+            </a:solidFill>
+          </p:spPr>
+          <p:style>
+            <a:lnRef idx="2">
+              <a:schemeClr val="accent1">
+                <a:shade val="50000"/>
+              </a:schemeClr>
+            </a:lnRef>
+            <a:fillRef idx="1">
+              <a:schemeClr val="accent1"/>
+            </a:fillRef>
+            <a:effectRef idx="0">
+              <a:schemeClr val="accent1"/>
+            </a:effectRef>
+            <a:fontRef idx="minor">
+              <a:schemeClr val="lt1"/>
+            </a:fontRef>
+          </p:style>
+          <p:txBody>
+            <a:bodyPr rtlCol="0" anchor="ctr"/>
+            <a:lstStyle/>
+            <a:p>
+              <a:pPr algn="ctr"/>
+              <a:endParaRPr kumimoji="1" lang="ja-JP" altLang="en-US"/>
+            </a:p>
+          </p:txBody>
+        </p:sp>
+        <p:sp>
+          <p:nvSpPr>
+            <p:cNvPr id="81" name="正方形/長方形 80">
+              <a:extLst>
+                <a:ext uri="{FF2B5EF4-FFF2-40B4-BE49-F238E27FC236}">
+                  <a16:creationId xmlns:a16="http://schemas.microsoft.com/office/drawing/2014/main" id="{C0CEE341-C7D0-4FF9-B2B8-C6D26C3A4900}"/>
+                </a:ext>
+              </a:extLst>
+            </p:cNvPr>
+            <p:cNvSpPr/>
+            <p:nvPr/>
+          </p:nvSpPr>
+          <p:spPr>
+            <a:xfrm>
+              <a:off x="673100" y="5715000"/>
+              <a:ext cx="6311900" cy="914400"/>
+            </a:xfrm>
+            <a:prstGeom prst="rect">
+              <a:avLst/>
+            </a:prstGeom>
+            <a:solidFill>
+              <a:schemeClr val="accent2">
+                <a:lumMod val="75000"/>
+              </a:schemeClr>
+            </a:solidFill>
+          </p:spPr>
+          <p:style>
+            <a:lnRef idx="2">
+              <a:schemeClr val="accent1">
+                <a:shade val="50000"/>
+              </a:schemeClr>
+            </a:lnRef>
+            <a:fillRef idx="1">
+              <a:schemeClr val="accent1"/>
+            </a:fillRef>
+            <a:effectRef idx="0">
+              <a:schemeClr val="accent1"/>
+            </a:effectRef>
+            <a:fontRef idx="minor">
+              <a:schemeClr val="lt1"/>
+            </a:fontRef>
+          </p:style>
+          <p:txBody>
+            <a:bodyPr rtlCol="0" anchor="ctr"/>
+            <a:lstStyle/>
+            <a:p>
+              <a:pPr algn="ctr"/>
+              <a:endParaRPr kumimoji="1" lang="ja-JP" altLang="en-US"/>
+            </a:p>
+          </p:txBody>
+        </p:sp>
+        <p:sp>
+          <p:nvSpPr>
+            <p:cNvPr id="82" name="正方形/長方形 81">
+              <a:extLst>
+                <a:ext uri="{FF2B5EF4-FFF2-40B4-BE49-F238E27FC236}">
+                  <a16:creationId xmlns:a16="http://schemas.microsoft.com/office/drawing/2014/main" id="{5DD54EFA-5EF0-4B52-9773-98D0CCC74C8E}"/>
+                </a:ext>
+              </a:extLst>
+            </p:cNvPr>
+            <p:cNvSpPr/>
+            <p:nvPr/>
+          </p:nvSpPr>
+          <p:spPr>
+            <a:xfrm>
+              <a:off x="673100" y="5511800"/>
+              <a:ext cx="6311900" cy="203200"/>
+            </a:xfrm>
+            <a:prstGeom prst="rect">
+              <a:avLst/>
+            </a:prstGeom>
+            <a:solidFill>
+              <a:schemeClr val="accent6">
+                <a:lumMod val="75000"/>
+              </a:schemeClr>
+            </a:solidFill>
+          </p:spPr>
+          <p:style>
+            <a:lnRef idx="2">
+              <a:schemeClr val="accent1">
+                <a:shade val="50000"/>
+              </a:schemeClr>
+            </a:lnRef>
+            <a:fillRef idx="1">
+              <a:schemeClr val="accent1"/>
+            </a:fillRef>
+            <a:effectRef idx="0">
+              <a:schemeClr val="accent1"/>
+            </a:effectRef>
+            <a:fontRef idx="minor">
+              <a:schemeClr val="lt1"/>
+            </a:fontRef>
+          </p:style>
+          <p:txBody>
+            <a:bodyPr rtlCol="0" anchor="ctr"/>
+            <a:lstStyle/>
+            <a:p>
+              <a:pPr algn="ctr"/>
+              <a:endParaRPr kumimoji="1" lang="ja-JP" altLang="en-US"/>
+            </a:p>
+          </p:txBody>
+        </p:sp>
+        <p:grpSp>
+          <p:nvGrpSpPr>
+            <p:cNvPr id="83" name="グループ化 82">
+              <a:extLst>
+                <a:ext uri="{FF2B5EF4-FFF2-40B4-BE49-F238E27FC236}">
+                  <a16:creationId xmlns:a16="http://schemas.microsoft.com/office/drawing/2014/main" id="{3B61D716-B173-40EA-8D71-6189B5494480}"/>
+                </a:ext>
+              </a:extLst>
+            </p:cNvPr>
+            <p:cNvGrpSpPr/>
+            <p:nvPr/>
+          </p:nvGrpSpPr>
+          <p:grpSpPr>
+            <a:xfrm>
+              <a:off x="1333500" y="5133182"/>
+              <a:ext cx="263525" cy="375179"/>
+              <a:chOff x="1333500" y="5133182"/>
+              <a:chExt cx="263525" cy="375179"/>
+            </a:xfrm>
+          </p:grpSpPr>
+          <p:sp>
+            <p:nvSpPr>
+              <p:cNvPr id="123" name="二等辺三角形 122">
+                <a:extLst>
+                  <a:ext uri="{FF2B5EF4-FFF2-40B4-BE49-F238E27FC236}">
+                    <a16:creationId xmlns:a16="http://schemas.microsoft.com/office/drawing/2014/main" id="{BDA5838E-17F0-475A-BC1C-111AF0004A0C}"/>
+                  </a:ext>
+                </a:extLst>
+              </p:cNvPr>
+              <p:cNvSpPr/>
+              <p:nvPr/>
+            </p:nvSpPr>
+            <p:spPr>
+              <a:xfrm rot="5400000">
+                <a:off x="1534980" y="5222082"/>
+                <a:ext cx="66940" cy="57150"/>
+              </a:xfrm>
+              <a:prstGeom prst="triangle">
+                <a:avLst/>
+              </a:prstGeom>
+            </p:spPr>
+            <p:style>
+              <a:lnRef idx="2">
+                <a:schemeClr val="accent1">
+                  <a:shade val="50000"/>
+                </a:schemeClr>
+              </a:lnRef>
+              <a:fillRef idx="1">
+                <a:schemeClr val="accent1"/>
+              </a:fillRef>
+              <a:effectRef idx="0">
+                <a:schemeClr val="accent1"/>
+              </a:effectRef>
+              <a:fontRef idx="minor">
+                <a:schemeClr val="lt1"/>
+              </a:fontRef>
+            </p:style>
+            <p:txBody>
+              <a:bodyPr rtlCol="0" anchor="ctr"/>
+              <a:lstStyle/>
+              <a:p>
+                <a:pPr algn="ctr"/>
+                <a:endParaRPr kumimoji="1" lang="ja-JP" altLang="en-US"/>
+              </a:p>
+            </p:txBody>
+          </p:sp>
+          <p:grpSp>
+            <p:nvGrpSpPr>
+              <p:cNvPr id="124" name="グループ化 123">
+                <a:extLst>
+                  <a:ext uri="{FF2B5EF4-FFF2-40B4-BE49-F238E27FC236}">
+                    <a16:creationId xmlns:a16="http://schemas.microsoft.com/office/drawing/2014/main" id="{0917D843-0CA4-4517-8E4D-E33AC17AC9B6}"/>
+                  </a:ext>
+                </a:extLst>
+              </p:cNvPr>
+              <p:cNvGrpSpPr/>
+              <p:nvPr/>
+            </p:nvGrpSpPr>
+            <p:grpSpPr>
+              <a:xfrm>
+                <a:off x="1333500" y="5133182"/>
+                <a:ext cx="234950" cy="375179"/>
+                <a:chOff x="2470150" y="4146021"/>
+                <a:chExt cx="234950" cy="375179"/>
+              </a:xfrm>
+            </p:grpSpPr>
+            <p:sp>
+              <p:nvSpPr>
+                <p:cNvPr id="125" name="二等辺三角形 124">
+                  <a:extLst>
+                    <a:ext uri="{FF2B5EF4-FFF2-40B4-BE49-F238E27FC236}">
+                      <a16:creationId xmlns:a16="http://schemas.microsoft.com/office/drawing/2014/main" id="{B415E6D2-FBE4-4F26-85B4-7B4021B5E581}"/>
+                    </a:ext>
+                  </a:extLst>
+                </p:cNvPr>
+                <p:cNvSpPr/>
+                <p:nvPr/>
+              </p:nvSpPr>
+              <p:spPr>
+                <a:xfrm>
+                  <a:off x="2470150" y="4286250"/>
+                  <a:ext cx="234950" cy="234950"/>
+                </a:xfrm>
+                <a:prstGeom prst="triangle">
+                  <a:avLst/>
+                </a:prstGeom>
+              </p:spPr>
+              <p:style>
+                <a:lnRef idx="2">
+                  <a:schemeClr val="accent1">
+                    <a:shade val="50000"/>
+                  </a:schemeClr>
+                </a:lnRef>
+                <a:fillRef idx="1">
+                  <a:schemeClr val="accent1"/>
+                </a:fillRef>
+                <a:effectRef idx="0">
+                  <a:schemeClr val="accent1"/>
+                </a:effectRef>
+                <a:fontRef idx="minor">
+                  <a:schemeClr val="lt1"/>
+                </a:fontRef>
+              </p:style>
+              <p:txBody>
+                <a:bodyPr rtlCol="0" anchor="ctr"/>
+                <a:lstStyle/>
+                <a:p>
+                  <a:pPr algn="ctr"/>
+                  <a:endParaRPr kumimoji="1" lang="ja-JP" altLang="en-US"/>
+                </a:p>
+              </p:txBody>
+            </p:sp>
+            <p:sp>
+              <p:nvSpPr>
+                <p:cNvPr id="126" name="楕円 125">
+                  <a:extLst>
+                    <a:ext uri="{FF2B5EF4-FFF2-40B4-BE49-F238E27FC236}">
+                      <a16:creationId xmlns:a16="http://schemas.microsoft.com/office/drawing/2014/main" id="{9770BEB2-AF0B-4689-87A0-735C6D6AF48E}"/>
+                    </a:ext>
+                  </a:extLst>
+                </p:cNvPr>
+                <p:cNvSpPr/>
+                <p:nvPr/>
+              </p:nvSpPr>
+              <p:spPr>
+                <a:xfrm>
+                  <a:off x="2470150" y="4146021"/>
+                  <a:ext cx="234950" cy="234950"/>
+                </a:xfrm>
+                <a:prstGeom prst="ellipse">
+                  <a:avLst/>
+                </a:prstGeom>
+              </p:spPr>
+              <p:style>
+                <a:lnRef idx="2">
+                  <a:schemeClr val="accent1">
+                    <a:shade val="50000"/>
+                  </a:schemeClr>
+                </a:lnRef>
+                <a:fillRef idx="1">
+                  <a:schemeClr val="accent1"/>
+                </a:fillRef>
+                <a:effectRef idx="0">
+                  <a:schemeClr val="accent1"/>
+                </a:effectRef>
+                <a:fontRef idx="minor">
+                  <a:schemeClr val="lt1"/>
+                </a:fontRef>
+              </p:style>
+              <p:txBody>
+                <a:bodyPr rtlCol="0" anchor="ctr"/>
+                <a:lstStyle/>
+                <a:p>
+                  <a:pPr algn="ctr"/>
+                  <a:endParaRPr kumimoji="1" lang="ja-JP" altLang="en-US"/>
+                </a:p>
+              </p:txBody>
+            </p:sp>
+          </p:grpSp>
+        </p:grpSp>
+        <p:grpSp>
+          <p:nvGrpSpPr>
+            <p:cNvPr id="84" name="グループ化 83">
+              <a:extLst>
+                <a:ext uri="{FF2B5EF4-FFF2-40B4-BE49-F238E27FC236}">
+                  <a16:creationId xmlns:a16="http://schemas.microsoft.com/office/drawing/2014/main" id="{BC82F7A1-FDB1-478E-B072-7E12E1289A9E}"/>
+                </a:ext>
+              </a:extLst>
+            </p:cNvPr>
+            <p:cNvGrpSpPr/>
+            <p:nvPr/>
+          </p:nvGrpSpPr>
+          <p:grpSpPr>
+            <a:xfrm>
+              <a:off x="2651760" y="4234921"/>
+              <a:ext cx="523240" cy="1276879"/>
+              <a:chOff x="2457450" y="4234921"/>
+              <a:chExt cx="717550" cy="1276879"/>
+            </a:xfrm>
+          </p:grpSpPr>
+          <p:sp>
+            <p:nvSpPr>
+              <p:cNvPr id="121" name="正方形/長方形 120">
+                <a:extLst>
+                  <a:ext uri="{FF2B5EF4-FFF2-40B4-BE49-F238E27FC236}">
+                    <a16:creationId xmlns:a16="http://schemas.microsoft.com/office/drawing/2014/main" id="{3B031256-06DC-43CE-90BD-EC24AE9A4E2C}"/>
+                  </a:ext>
+                </a:extLst>
+              </p:cNvPr>
+              <p:cNvSpPr/>
+              <p:nvPr/>
+            </p:nvSpPr>
+            <p:spPr>
+              <a:xfrm>
+                <a:off x="2717800" y="4508500"/>
+                <a:ext cx="196850" cy="1003300"/>
+              </a:xfrm>
+              <a:prstGeom prst="rect">
+                <a:avLst/>
+              </a:prstGeom>
+              <a:solidFill>
+                <a:schemeClr val="accent2">
+                  <a:lumMod val="50000"/>
+                </a:schemeClr>
+              </a:solidFill>
+            </p:spPr>
+            <p:style>
+              <a:lnRef idx="2">
+                <a:schemeClr val="accent1">
+                  <a:shade val="50000"/>
+                </a:schemeClr>
+              </a:lnRef>
+              <a:fillRef idx="1">
+                <a:schemeClr val="accent1"/>
+              </a:fillRef>
+              <a:effectRef idx="0">
+                <a:schemeClr val="accent1"/>
+              </a:effectRef>
+              <a:fontRef idx="minor">
+                <a:schemeClr val="lt1"/>
+              </a:fontRef>
+            </p:style>
+            <p:txBody>
+              <a:bodyPr rtlCol="0" anchor="ctr"/>
+              <a:lstStyle/>
+              <a:p>
+                <a:pPr algn="ctr"/>
+                <a:endParaRPr kumimoji="1" lang="ja-JP" altLang="en-US"/>
+              </a:p>
+            </p:txBody>
+          </p:sp>
+          <p:sp>
+            <p:nvSpPr>
+              <p:cNvPr id="122" name="楕円 121">
+                <a:extLst>
+                  <a:ext uri="{FF2B5EF4-FFF2-40B4-BE49-F238E27FC236}">
+                    <a16:creationId xmlns:a16="http://schemas.microsoft.com/office/drawing/2014/main" id="{E3109902-E9EA-4D61-88FE-31E0BAB48CFA}"/>
+                  </a:ext>
+                </a:extLst>
+              </p:cNvPr>
+              <p:cNvSpPr/>
+              <p:nvPr/>
+            </p:nvSpPr>
+            <p:spPr>
+              <a:xfrm>
+                <a:off x="2457450" y="4234921"/>
+                <a:ext cx="717550" cy="670454"/>
+              </a:xfrm>
+              <a:prstGeom prst="ellipse">
+                <a:avLst/>
+              </a:prstGeom>
+              <a:solidFill>
+                <a:schemeClr val="accent6">
+                  <a:lumMod val="60000"/>
+                  <a:lumOff val="40000"/>
+                </a:schemeClr>
+              </a:solidFill>
+              <a:ln>
+                <a:solidFill>
+                  <a:schemeClr val="tx1"/>
+                </a:solidFill>
+              </a:ln>
+            </p:spPr>
+            <p:style>
+              <a:lnRef idx="2">
+                <a:schemeClr val="accent1">
+                  <a:shade val="50000"/>
+                </a:schemeClr>
+              </a:lnRef>
+              <a:fillRef idx="1">
+                <a:schemeClr val="accent1"/>
+              </a:fillRef>
+              <a:effectRef idx="0">
+                <a:schemeClr val="accent1"/>
+              </a:effectRef>
+              <a:fontRef idx="minor">
+                <a:schemeClr val="lt1"/>
+              </a:fontRef>
+            </p:style>
+            <p:txBody>
+              <a:bodyPr rtlCol="0" anchor="ctr"/>
+              <a:lstStyle/>
+              <a:p>
+                <a:pPr algn="ctr"/>
+                <a:endParaRPr kumimoji="1" lang="ja-JP" altLang="en-US"/>
+              </a:p>
+            </p:txBody>
+          </p:sp>
+        </p:grpSp>
+        <p:grpSp>
+          <p:nvGrpSpPr>
+            <p:cNvPr id="85" name="グループ化 84">
+              <a:extLst>
+                <a:ext uri="{FF2B5EF4-FFF2-40B4-BE49-F238E27FC236}">
+                  <a16:creationId xmlns:a16="http://schemas.microsoft.com/office/drawing/2014/main" id="{223DD4AF-6E4E-4DCB-A41E-3BBF528A8722}"/>
+                </a:ext>
+              </a:extLst>
+            </p:cNvPr>
+            <p:cNvGrpSpPr/>
+            <p:nvPr/>
+          </p:nvGrpSpPr>
+          <p:grpSpPr>
+            <a:xfrm>
+              <a:off x="2874963" y="4009038"/>
+              <a:ext cx="717550" cy="1497280"/>
+              <a:chOff x="2457450" y="4173273"/>
+              <a:chExt cx="717550" cy="1338527"/>
+            </a:xfrm>
+          </p:grpSpPr>
+          <p:sp>
+            <p:nvSpPr>
+              <p:cNvPr id="119" name="正方形/長方形 118">
+                <a:extLst>
+                  <a:ext uri="{FF2B5EF4-FFF2-40B4-BE49-F238E27FC236}">
+                    <a16:creationId xmlns:a16="http://schemas.microsoft.com/office/drawing/2014/main" id="{FE059C08-AAAA-42AB-B877-14C96CBD3200}"/>
+                  </a:ext>
+                </a:extLst>
+              </p:cNvPr>
+              <p:cNvSpPr/>
+              <p:nvPr/>
+            </p:nvSpPr>
+            <p:spPr>
+              <a:xfrm>
+                <a:off x="2717800" y="4508500"/>
+                <a:ext cx="196850" cy="1003300"/>
+              </a:xfrm>
+              <a:prstGeom prst="rect">
+                <a:avLst/>
+              </a:prstGeom>
+              <a:solidFill>
+                <a:schemeClr val="accent2">
+                  <a:lumMod val="50000"/>
+                </a:schemeClr>
+              </a:solidFill>
+            </p:spPr>
+            <p:style>
+              <a:lnRef idx="2">
+                <a:schemeClr val="accent1">
+                  <a:shade val="50000"/>
+                </a:schemeClr>
+              </a:lnRef>
+              <a:fillRef idx="1">
+                <a:schemeClr val="accent1"/>
+              </a:fillRef>
+              <a:effectRef idx="0">
+                <a:schemeClr val="accent1"/>
+              </a:effectRef>
+              <a:fontRef idx="minor">
+                <a:schemeClr val="lt1"/>
+              </a:fontRef>
+            </p:style>
+            <p:txBody>
+              <a:bodyPr rtlCol="0" anchor="ctr"/>
+              <a:lstStyle/>
+              <a:p>
+                <a:pPr algn="ctr"/>
+                <a:endParaRPr kumimoji="1" lang="ja-JP" altLang="en-US"/>
+              </a:p>
+            </p:txBody>
+          </p:sp>
+          <p:sp>
+            <p:nvSpPr>
+              <p:cNvPr id="120" name="楕円 119">
+                <a:extLst>
+                  <a:ext uri="{FF2B5EF4-FFF2-40B4-BE49-F238E27FC236}">
+                    <a16:creationId xmlns:a16="http://schemas.microsoft.com/office/drawing/2014/main" id="{64411113-3956-4498-BE6F-97F8683B1982}"/>
+                  </a:ext>
+                </a:extLst>
+              </p:cNvPr>
+              <p:cNvSpPr/>
+              <p:nvPr/>
+            </p:nvSpPr>
+            <p:spPr>
+              <a:xfrm>
+                <a:off x="2457450" y="4173273"/>
+                <a:ext cx="717550" cy="670454"/>
+              </a:xfrm>
+              <a:prstGeom prst="ellipse">
+                <a:avLst/>
+              </a:prstGeom>
+              <a:solidFill>
+                <a:schemeClr val="accent6">
+                  <a:lumMod val="60000"/>
+                  <a:lumOff val="40000"/>
+                </a:schemeClr>
+              </a:solidFill>
+              <a:ln>
+                <a:solidFill>
+                  <a:schemeClr val="tx1"/>
+                </a:solidFill>
+              </a:ln>
+            </p:spPr>
+            <p:style>
+              <a:lnRef idx="2">
+                <a:schemeClr val="accent1">
+                  <a:shade val="50000"/>
+                </a:schemeClr>
+              </a:lnRef>
+              <a:fillRef idx="1">
+                <a:schemeClr val="accent1"/>
+              </a:fillRef>
+              <a:effectRef idx="0">
+                <a:schemeClr val="accent1"/>
+              </a:effectRef>
+              <a:fontRef idx="minor">
+                <a:schemeClr val="lt1"/>
+              </a:fontRef>
+            </p:style>
+            <p:txBody>
+              <a:bodyPr rtlCol="0" anchor="ctr"/>
+              <a:lstStyle/>
+              <a:p>
+                <a:pPr algn="ctr"/>
+                <a:endParaRPr kumimoji="1" lang="ja-JP" altLang="en-US"/>
+              </a:p>
+            </p:txBody>
+          </p:sp>
+        </p:grpSp>
+        <p:grpSp>
+          <p:nvGrpSpPr>
+            <p:cNvPr id="86" name="グループ化 85">
+              <a:extLst>
+                <a:ext uri="{FF2B5EF4-FFF2-40B4-BE49-F238E27FC236}">
+                  <a16:creationId xmlns:a16="http://schemas.microsoft.com/office/drawing/2014/main" id="{F5BB80B7-C7F7-457A-BA28-6F39E35EB9C7}"/>
+                </a:ext>
+              </a:extLst>
+            </p:cNvPr>
+            <p:cNvGrpSpPr/>
+            <p:nvPr/>
+          </p:nvGrpSpPr>
+          <p:grpSpPr>
+            <a:xfrm>
+              <a:off x="2710498" y="3759745"/>
+              <a:ext cx="717550" cy="1741091"/>
+              <a:chOff x="2457450" y="4173273"/>
+              <a:chExt cx="717550" cy="1338527"/>
+            </a:xfrm>
+          </p:grpSpPr>
+          <p:sp>
+            <p:nvSpPr>
+              <p:cNvPr id="117" name="正方形/長方形 116">
+                <a:extLst>
+                  <a:ext uri="{FF2B5EF4-FFF2-40B4-BE49-F238E27FC236}">
+                    <a16:creationId xmlns:a16="http://schemas.microsoft.com/office/drawing/2014/main" id="{D310D07E-7C65-424C-9394-5E27366A91E4}"/>
+                  </a:ext>
+                </a:extLst>
+              </p:cNvPr>
+              <p:cNvSpPr/>
+              <p:nvPr/>
+            </p:nvSpPr>
+            <p:spPr>
+              <a:xfrm>
+                <a:off x="2717800" y="4508500"/>
+                <a:ext cx="196850" cy="1003300"/>
+              </a:xfrm>
+              <a:prstGeom prst="rect">
+                <a:avLst/>
+              </a:prstGeom>
+              <a:solidFill>
+                <a:schemeClr val="accent2">
+                  <a:lumMod val="50000"/>
+                </a:schemeClr>
+              </a:solidFill>
+            </p:spPr>
+            <p:style>
+              <a:lnRef idx="2">
+                <a:schemeClr val="accent1">
+                  <a:shade val="50000"/>
+                </a:schemeClr>
+              </a:lnRef>
+              <a:fillRef idx="1">
+                <a:schemeClr val="accent1"/>
+              </a:fillRef>
+              <a:effectRef idx="0">
+                <a:schemeClr val="accent1"/>
+              </a:effectRef>
+              <a:fontRef idx="minor">
+                <a:schemeClr val="lt1"/>
+              </a:fontRef>
+            </p:style>
+            <p:txBody>
+              <a:bodyPr rtlCol="0" anchor="ctr"/>
+              <a:lstStyle/>
+              <a:p>
+                <a:pPr algn="ctr"/>
+                <a:endParaRPr kumimoji="1" lang="ja-JP" altLang="en-US"/>
+              </a:p>
+            </p:txBody>
+          </p:sp>
+          <p:sp>
+            <p:nvSpPr>
+              <p:cNvPr id="118" name="楕円 117">
+                <a:extLst>
+                  <a:ext uri="{FF2B5EF4-FFF2-40B4-BE49-F238E27FC236}">
+                    <a16:creationId xmlns:a16="http://schemas.microsoft.com/office/drawing/2014/main" id="{D00276AB-1BA3-4600-969F-EC3F706EF5DA}"/>
+                  </a:ext>
+                </a:extLst>
+              </p:cNvPr>
+              <p:cNvSpPr/>
+              <p:nvPr/>
+            </p:nvSpPr>
+            <p:spPr>
+              <a:xfrm>
+                <a:off x="2457450" y="4173273"/>
+                <a:ext cx="717550" cy="670454"/>
+              </a:xfrm>
+              <a:prstGeom prst="ellipse">
+                <a:avLst/>
+              </a:prstGeom>
+              <a:solidFill>
+                <a:schemeClr val="accent6">
+                  <a:lumMod val="60000"/>
+                  <a:lumOff val="40000"/>
+                </a:schemeClr>
+              </a:solidFill>
+              <a:ln>
+                <a:solidFill>
+                  <a:schemeClr val="tx1"/>
+                </a:solidFill>
+              </a:ln>
+            </p:spPr>
+            <p:style>
+              <a:lnRef idx="2">
+                <a:schemeClr val="accent1">
+                  <a:shade val="50000"/>
+                </a:schemeClr>
+              </a:lnRef>
+              <a:fillRef idx="1">
+                <a:schemeClr val="accent1"/>
+              </a:fillRef>
+              <a:effectRef idx="0">
+                <a:schemeClr val="accent1"/>
+              </a:effectRef>
+              <a:fontRef idx="minor">
+                <a:schemeClr val="lt1"/>
+              </a:fontRef>
+            </p:style>
+            <p:txBody>
+              <a:bodyPr rtlCol="0" anchor="ctr"/>
+              <a:lstStyle/>
+              <a:p>
+                <a:pPr algn="ctr"/>
+                <a:endParaRPr kumimoji="1" lang="ja-JP" altLang="en-US"/>
+              </a:p>
+            </p:txBody>
+          </p:sp>
+        </p:grpSp>
+        <p:grpSp>
+          <p:nvGrpSpPr>
+            <p:cNvPr id="87" name="グループ化 86">
+              <a:extLst>
+                <a:ext uri="{FF2B5EF4-FFF2-40B4-BE49-F238E27FC236}">
+                  <a16:creationId xmlns:a16="http://schemas.microsoft.com/office/drawing/2014/main" id="{0DEA29D0-216E-4453-BB3D-84227E661726}"/>
+                </a:ext>
+              </a:extLst>
+            </p:cNvPr>
+            <p:cNvGrpSpPr/>
+            <p:nvPr/>
+          </p:nvGrpSpPr>
+          <p:grpSpPr>
+            <a:xfrm>
+              <a:off x="3285490" y="4223957"/>
+              <a:ext cx="523240" cy="1276879"/>
+              <a:chOff x="2457450" y="4234921"/>
+              <a:chExt cx="717550" cy="1276879"/>
+            </a:xfrm>
+          </p:grpSpPr>
+          <p:sp>
+            <p:nvSpPr>
+              <p:cNvPr id="115" name="正方形/長方形 114">
+                <a:extLst>
+                  <a:ext uri="{FF2B5EF4-FFF2-40B4-BE49-F238E27FC236}">
+                    <a16:creationId xmlns:a16="http://schemas.microsoft.com/office/drawing/2014/main" id="{8A1C25E1-61F6-4DEF-9B78-B5259CFD8853}"/>
+                  </a:ext>
+                </a:extLst>
+              </p:cNvPr>
+              <p:cNvSpPr/>
+              <p:nvPr/>
+            </p:nvSpPr>
+            <p:spPr>
+              <a:xfrm>
+                <a:off x="2717800" y="4508500"/>
+                <a:ext cx="196850" cy="1003300"/>
+              </a:xfrm>
+              <a:prstGeom prst="rect">
+                <a:avLst/>
+              </a:prstGeom>
+              <a:solidFill>
+                <a:schemeClr val="accent2">
+                  <a:lumMod val="50000"/>
+                </a:schemeClr>
+              </a:solidFill>
+            </p:spPr>
+            <p:style>
+              <a:lnRef idx="2">
+                <a:schemeClr val="accent1">
+                  <a:shade val="50000"/>
+                </a:schemeClr>
+              </a:lnRef>
+              <a:fillRef idx="1">
+                <a:schemeClr val="accent1"/>
+              </a:fillRef>
+              <a:effectRef idx="0">
+                <a:schemeClr val="accent1"/>
+              </a:effectRef>
+              <a:fontRef idx="minor">
+                <a:schemeClr val="lt1"/>
+              </a:fontRef>
+            </p:style>
+            <p:txBody>
+              <a:bodyPr rtlCol="0" anchor="ctr"/>
+              <a:lstStyle/>
+              <a:p>
+                <a:pPr algn="ctr"/>
+                <a:endParaRPr kumimoji="1" lang="ja-JP" altLang="en-US"/>
+              </a:p>
+            </p:txBody>
+          </p:sp>
+          <p:sp>
+            <p:nvSpPr>
+              <p:cNvPr id="116" name="楕円 115">
+                <a:extLst>
+                  <a:ext uri="{FF2B5EF4-FFF2-40B4-BE49-F238E27FC236}">
+                    <a16:creationId xmlns:a16="http://schemas.microsoft.com/office/drawing/2014/main" id="{5AF568C7-612B-46E9-9D85-B0FC8FEB42A7}"/>
+                  </a:ext>
+                </a:extLst>
+              </p:cNvPr>
+              <p:cNvSpPr/>
+              <p:nvPr/>
+            </p:nvSpPr>
+            <p:spPr>
+              <a:xfrm>
+                <a:off x="2457450" y="4234921"/>
+                <a:ext cx="717550" cy="670454"/>
+              </a:xfrm>
+              <a:prstGeom prst="ellipse">
+                <a:avLst/>
+              </a:prstGeom>
+              <a:solidFill>
+                <a:schemeClr val="accent6">
+                  <a:lumMod val="60000"/>
+                  <a:lumOff val="40000"/>
+                </a:schemeClr>
+              </a:solidFill>
+              <a:ln>
+                <a:solidFill>
+                  <a:schemeClr val="tx1"/>
+                </a:solidFill>
+              </a:ln>
+            </p:spPr>
+            <p:style>
+              <a:lnRef idx="2">
+                <a:schemeClr val="accent1">
+                  <a:shade val="50000"/>
+                </a:schemeClr>
+              </a:lnRef>
+              <a:fillRef idx="1">
+                <a:schemeClr val="accent1"/>
+              </a:fillRef>
+              <a:effectRef idx="0">
+                <a:schemeClr val="accent1"/>
+              </a:effectRef>
+              <a:fontRef idx="minor">
+                <a:schemeClr val="lt1"/>
+              </a:fontRef>
+            </p:style>
+            <p:txBody>
+              <a:bodyPr rtlCol="0" anchor="ctr"/>
+              <a:lstStyle/>
+              <a:p>
+                <a:pPr algn="ctr"/>
+                <a:endParaRPr kumimoji="1" lang="ja-JP" altLang="en-US"/>
+              </a:p>
+            </p:txBody>
+          </p:sp>
+        </p:grpSp>
+        <p:grpSp>
+          <p:nvGrpSpPr>
+            <p:cNvPr id="88" name="グループ化 87">
+              <a:extLst>
+                <a:ext uri="{FF2B5EF4-FFF2-40B4-BE49-F238E27FC236}">
+                  <a16:creationId xmlns:a16="http://schemas.microsoft.com/office/drawing/2014/main" id="{1061E4C9-1B3F-4EBF-B966-315C85291497}"/>
+                </a:ext>
+              </a:extLst>
+            </p:cNvPr>
+            <p:cNvGrpSpPr/>
+            <p:nvPr/>
+          </p:nvGrpSpPr>
+          <p:grpSpPr>
+            <a:xfrm>
+              <a:off x="3508693" y="3998074"/>
+              <a:ext cx="717550" cy="1497280"/>
+              <a:chOff x="2457450" y="4173273"/>
+              <a:chExt cx="717550" cy="1338527"/>
+            </a:xfrm>
+          </p:grpSpPr>
+          <p:sp>
+            <p:nvSpPr>
+              <p:cNvPr id="113" name="正方形/長方形 112">
+                <a:extLst>
+                  <a:ext uri="{FF2B5EF4-FFF2-40B4-BE49-F238E27FC236}">
+                    <a16:creationId xmlns:a16="http://schemas.microsoft.com/office/drawing/2014/main" id="{025112C1-57E0-455C-9670-2E5F29BAACC3}"/>
+                  </a:ext>
+                </a:extLst>
+              </p:cNvPr>
+              <p:cNvSpPr/>
+              <p:nvPr/>
+            </p:nvSpPr>
+            <p:spPr>
+              <a:xfrm>
+                <a:off x="2717800" y="4508500"/>
+                <a:ext cx="196850" cy="1003300"/>
+              </a:xfrm>
+              <a:prstGeom prst="rect">
+                <a:avLst/>
+              </a:prstGeom>
+              <a:solidFill>
+                <a:schemeClr val="accent2">
+                  <a:lumMod val="50000"/>
+                </a:schemeClr>
+              </a:solidFill>
+            </p:spPr>
+            <p:style>
+              <a:lnRef idx="2">
+                <a:schemeClr val="accent1">
+                  <a:shade val="50000"/>
+                </a:schemeClr>
+              </a:lnRef>
+              <a:fillRef idx="1">
+                <a:schemeClr val="accent1"/>
+              </a:fillRef>
+              <a:effectRef idx="0">
+                <a:schemeClr val="accent1"/>
+              </a:effectRef>
+              <a:fontRef idx="minor">
+                <a:schemeClr val="lt1"/>
+              </a:fontRef>
+            </p:style>
+            <p:txBody>
+              <a:bodyPr rtlCol="0" anchor="ctr"/>
+              <a:lstStyle/>
+              <a:p>
+                <a:pPr algn="ctr"/>
+                <a:endParaRPr kumimoji="1" lang="ja-JP" altLang="en-US"/>
+              </a:p>
+            </p:txBody>
+          </p:sp>
+          <p:sp>
+            <p:nvSpPr>
+              <p:cNvPr id="114" name="楕円 113">
+                <a:extLst>
+                  <a:ext uri="{FF2B5EF4-FFF2-40B4-BE49-F238E27FC236}">
+                    <a16:creationId xmlns:a16="http://schemas.microsoft.com/office/drawing/2014/main" id="{4B834CB4-9D33-4419-8853-5EEA3AAB3044}"/>
+                  </a:ext>
+                </a:extLst>
+              </p:cNvPr>
+              <p:cNvSpPr/>
+              <p:nvPr/>
+            </p:nvSpPr>
+            <p:spPr>
+              <a:xfrm>
+                <a:off x="2457450" y="4173273"/>
+                <a:ext cx="717550" cy="670454"/>
+              </a:xfrm>
+              <a:prstGeom prst="ellipse">
+                <a:avLst/>
+              </a:prstGeom>
+              <a:solidFill>
+                <a:schemeClr val="accent6">
+                  <a:lumMod val="60000"/>
+                  <a:lumOff val="40000"/>
+                </a:schemeClr>
+              </a:solidFill>
+              <a:ln>
+                <a:solidFill>
+                  <a:schemeClr val="tx1"/>
+                </a:solidFill>
+              </a:ln>
+            </p:spPr>
+            <p:style>
+              <a:lnRef idx="2">
+                <a:schemeClr val="accent1">
+                  <a:shade val="50000"/>
+                </a:schemeClr>
+              </a:lnRef>
+              <a:fillRef idx="1">
+                <a:schemeClr val="accent1"/>
+              </a:fillRef>
+              <a:effectRef idx="0">
+                <a:schemeClr val="accent1"/>
+              </a:effectRef>
+              <a:fontRef idx="minor">
+                <a:schemeClr val="lt1"/>
+              </a:fontRef>
+            </p:style>
+            <p:txBody>
+              <a:bodyPr rtlCol="0" anchor="ctr"/>
+              <a:lstStyle/>
+              <a:p>
+                <a:pPr algn="ctr"/>
+                <a:endParaRPr kumimoji="1" lang="ja-JP" altLang="en-US"/>
+              </a:p>
+            </p:txBody>
+          </p:sp>
+        </p:grpSp>
+        <p:grpSp>
+          <p:nvGrpSpPr>
+            <p:cNvPr id="89" name="グループ化 88">
+              <a:extLst>
+                <a:ext uri="{FF2B5EF4-FFF2-40B4-BE49-F238E27FC236}">
+                  <a16:creationId xmlns:a16="http://schemas.microsoft.com/office/drawing/2014/main" id="{570C5798-6FC7-454C-9195-5C24407BEF4F}"/>
+                </a:ext>
+              </a:extLst>
+            </p:cNvPr>
+            <p:cNvGrpSpPr/>
+            <p:nvPr/>
+          </p:nvGrpSpPr>
+          <p:grpSpPr>
+            <a:xfrm>
+              <a:off x="3359636" y="3770421"/>
+              <a:ext cx="717550" cy="1741091"/>
+              <a:chOff x="2457450" y="4173273"/>
+              <a:chExt cx="717550" cy="1338527"/>
+            </a:xfrm>
+          </p:grpSpPr>
+          <p:sp>
+            <p:nvSpPr>
+              <p:cNvPr id="111" name="正方形/長方形 110">
+                <a:extLst>
+                  <a:ext uri="{FF2B5EF4-FFF2-40B4-BE49-F238E27FC236}">
+                    <a16:creationId xmlns:a16="http://schemas.microsoft.com/office/drawing/2014/main" id="{CECB6DC3-5392-46B3-9A32-F66C8C9F7FB2}"/>
+                  </a:ext>
+                </a:extLst>
+              </p:cNvPr>
+              <p:cNvSpPr/>
+              <p:nvPr/>
+            </p:nvSpPr>
+            <p:spPr>
+              <a:xfrm>
+                <a:off x="2717800" y="4508500"/>
+                <a:ext cx="196850" cy="1003300"/>
+              </a:xfrm>
+              <a:prstGeom prst="rect">
+                <a:avLst/>
+              </a:prstGeom>
+              <a:solidFill>
+                <a:schemeClr val="accent2">
+                  <a:lumMod val="50000"/>
+                </a:schemeClr>
+              </a:solidFill>
+            </p:spPr>
+            <p:style>
+              <a:lnRef idx="2">
+                <a:schemeClr val="accent1">
+                  <a:shade val="50000"/>
+                </a:schemeClr>
+              </a:lnRef>
+              <a:fillRef idx="1">
+                <a:schemeClr val="accent1"/>
+              </a:fillRef>
+              <a:effectRef idx="0">
+                <a:schemeClr val="accent1"/>
+              </a:effectRef>
+              <a:fontRef idx="minor">
+                <a:schemeClr val="lt1"/>
+              </a:fontRef>
+            </p:style>
+            <p:txBody>
+              <a:bodyPr rtlCol="0" anchor="ctr"/>
+              <a:lstStyle/>
+              <a:p>
+                <a:pPr algn="ctr"/>
+                <a:endParaRPr kumimoji="1" lang="ja-JP" altLang="en-US"/>
+              </a:p>
+            </p:txBody>
+          </p:sp>
+          <p:sp>
+            <p:nvSpPr>
+              <p:cNvPr id="112" name="楕円 111">
+                <a:extLst>
+                  <a:ext uri="{FF2B5EF4-FFF2-40B4-BE49-F238E27FC236}">
+                    <a16:creationId xmlns:a16="http://schemas.microsoft.com/office/drawing/2014/main" id="{5D299C06-14D9-4438-AD1B-001542482A62}"/>
+                  </a:ext>
+                </a:extLst>
+              </p:cNvPr>
+              <p:cNvSpPr/>
+              <p:nvPr/>
+            </p:nvSpPr>
+            <p:spPr>
+              <a:xfrm>
+                <a:off x="2457450" y="4173273"/>
+                <a:ext cx="717550" cy="670454"/>
+              </a:xfrm>
+              <a:prstGeom prst="ellipse">
+                <a:avLst/>
+              </a:prstGeom>
+              <a:solidFill>
+                <a:schemeClr val="accent6">
+                  <a:lumMod val="60000"/>
+                  <a:lumOff val="40000"/>
+                </a:schemeClr>
+              </a:solidFill>
+              <a:ln>
+                <a:solidFill>
+                  <a:schemeClr val="tx1"/>
+                </a:solidFill>
+              </a:ln>
+            </p:spPr>
+            <p:style>
+              <a:lnRef idx="2">
+                <a:schemeClr val="accent1">
+                  <a:shade val="50000"/>
+                </a:schemeClr>
+              </a:lnRef>
+              <a:fillRef idx="1">
+                <a:schemeClr val="accent1"/>
+              </a:fillRef>
+              <a:effectRef idx="0">
+                <a:schemeClr val="accent1"/>
+              </a:effectRef>
+              <a:fontRef idx="minor">
+                <a:schemeClr val="lt1"/>
+              </a:fontRef>
+            </p:style>
+            <p:txBody>
+              <a:bodyPr rtlCol="0" anchor="ctr"/>
+              <a:lstStyle/>
+              <a:p>
+                <a:pPr algn="ctr"/>
+                <a:endParaRPr kumimoji="1" lang="ja-JP" altLang="en-US"/>
+              </a:p>
+            </p:txBody>
+          </p:sp>
+        </p:grpSp>
+        <p:grpSp>
+          <p:nvGrpSpPr>
+            <p:cNvPr id="90" name="グループ化 89">
+              <a:extLst>
+                <a:ext uri="{FF2B5EF4-FFF2-40B4-BE49-F238E27FC236}">
+                  <a16:creationId xmlns:a16="http://schemas.microsoft.com/office/drawing/2014/main" id="{3A769AF1-A7DE-4DDC-8CB6-769C7D73D3F0}"/>
+                </a:ext>
+              </a:extLst>
+            </p:cNvPr>
+            <p:cNvGrpSpPr/>
+            <p:nvPr/>
+          </p:nvGrpSpPr>
+          <p:grpSpPr>
+            <a:xfrm>
+              <a:off x="3820795" y="4234921"/>
+              <a:ext cx="523240" cy="1276879"/>
+              <a:chOff x="2457450" y="4234921"/>
+              <a:chExt cx="717550" cy="1276879"/>
+            </a:xfrm>
+          </p:grpSpPr>
+          <p:sp>
+            <p:nvSpPr>
+              <p:cNvPr id="109" name="正方形/長方形 108">
+                <a:extLst>
+                  <a:ext uri="{FF2B5EF4-FFF2-40B4-BE49-F238E27FC236}">
+                    <a16:creationId xmlns:a16="http://schemas.microsoft.com/office/drawing/2014/main" id="{135E8D2E-5BC1-41A4-A67A-4C742C43DEEC}"/>
+                  </a:ext>
+                </a:extLst>
+              </p:cNvPr>
+              <p:cNvSpPr/>
+              <p:nvPr/>
+            </p:nvSpPr>
+            <p:spPr>
+              <a:xfrm>
+                <a:off x="2717800" y="4508500"/>
+                <a:ext cx="196850" cy="1003300"/>
+              </a:xfrm>
+              <a:prstGeom prst="rect">
+                <a:avLst/>
+              </a:prstGeom>
+              <a:solidFill>
+                <a:schemeClr val="accent2">
+                  <a:lumMod val="50000"/>
+                </a:schemeClr>
+              </a:solidFill>
+            </p:spPr>
+            <p:style>
+              <a:lnRef idx="2">
+                <a:schemeClr val="accent1">
+                  <a:shade val="50000"/>
+                </a:schemeClr>
+              </a:lnRef>
+              <a:fillRef idx="1">
+                <a:schemeClr val="accent1"/>
+              </a:fillRef>
+              <a:effectRef idx="0">
+                <a:schemeClr val="accent1"/>
+              </a:effectRef>
+              <a:fontRef idx="minor">
+                <a:schemeClr val="lt1"/>
+              </a:fontRef>
+            </p:style>
+            <p:txBody>
+              <a:bodyPr rtlCol="0" anchor="ctr"/>
+              <a:lstStyle/>
+              <a:p>
+                <a:pPr algn="ctr"/>
+                <a:endParaRPr kumimoji="1" lang="ja-JP" altLang="en-US"/>
+              </a:p>
+            </p:txBody>
+          </p:sp>
+          <p:sp>
+            <p:nvSpPr>
+              <p:cNvPr id="110" name="楕円 109">
+                <a:extLst>
+                  <a:ext uri="{FF2B5EF4-FFF2-40B4-BE49-F238E27FC236}">
+                    <a16:creationId xmlns:a16="http://schemas.microsoft.com/office/drawing/2014/main" id="{317154C8-740E-4C53-A583-7EF29D7DE4C6}"/>
+                  </a:ext>
+                </a:extLst>
+              </p:cNvPr>
+              <p:cNvSpPr/>
+              <p:nvPr/>
+            </p:nvSpPr>
+            <p:spPr>
+              <a:xfrm>
+                <a:off x="2457450" y="4234921"/>
+                <a:ext cx="717550" cy="670454"/>
+              </a:xfrm>
+              <a:prstGeom prst="ellipse">
+                <a:avLst/>
+              </a:prstGeom>
+              <a:solidFill>
+                <a:schemeClr val="accent6">
+                  <a:lumMod val="60000"/>
+                  <a:lumOff val="40000"/>
+                </a:schemeClr>
+              </a:solidFill>
+              <a:ln>
+                <a:solidFill>
+                  <a:schemeClr val="tx1"/>
+                </a:solidFill>
+              </a:ln>
+            </p:spPr>
+            <p:style>
+              <a:lnRef idx="2">
+                <a:schemeClr val="accent1">
+                  <a:shade val="50000"/>
+                </a:schemeClr>
+              </a:lnRef>
+              <a:fillRef idx="1">
+                <a:schemeClr val="accent1"/>
+              </a:fillRef>
+              <a:effectRef idx="0">
+                <a:schemeClr val="accent1"/>
+              </a:effectRef>
+              <a:fontRef idx="minor">
+                <a:schemeClr val="lt1"/>
+              </a:fontRef>
+            </p:style>
+            <p:txBody>
+              <a:bodyPr rtlCol="0" anchor="ctr"/>
+              <a:lstStyle/>
+              <a:p>
+                <a:pPr algn="ctr"/>
+                <a:endParaRPr kumimoji="1" lang="ja-JP" altLang="en-US"/>
+              </a:p>
+            </p:txBody>
+          </p:sp>
+        </p:grpSp>
+        <p:grpSp>
+          <p:nvGrpSpPr>
+            <p:cNvPr id="91" name="グループ化 90">
+              <a:extLst>
+                <a:ext uri="{FF2B5EF4-FFF2-40B4-BE49-F238E27FC236}">
+                  <a16:creationId xmlns:a16="http://schemas.microsoft.com/office/drawing/2014/main" id="{A75BBEAA-6AB8-4D8A-8AED-DE729AEA2009}"/>
+                </a:ext>
+              </a:extLst>
+            </p:cNvPr>
+            <p:cNvGrpSpPr/>
+            <p:nvPr/>
+          </p:nvGrpSpPr>
+          <p:grpSpPr>
+            <a:xfrm>
+              <a:off x="4043998" y="4009038"/>
+              <a:ext cx="717550" cy="1497280"/>
+              <a:chOff x="2457450" y="4173273"/>
+              <a:chExt cx="717550" cy="1338527"/>
+            </a:xfrm>
+          </p:grpSpPr>
+          <p:sp>
+            <p:nvSpPr>
+              <p:cNvPr id="107" name="正方形/長方形 106">
+                <a:extLst>
+                  <a:ext uri="{FF2B5EF4-FFF2-40B4-BE49-F238E27FC236}">
+                    <a16:creationId xmlns:a16="http://schemas.microsoft.com/office/drawing/2014/main" id="{D73E9F9A-8868-4304-938F-930D9314C52C}"/>
+                  </a:ext>
+                </a:extLst>
+              </p:cNvPr>
+              <p:cNvSpPr/>
+              <p:nvPr/>
+            </p:nvSpPr>
+            <p:spPr>
+              <a:xfrm>
+                <a:off x="2717800" y="4508500"/>
+                <a:ext cx="196850" cy="1003300"/>
+              </a:xfrm>
+              <a:prstGeom prst="rect">
+                <a:avLst/>
+              </a:prstGeom>
+              <a:solidFill>
+                <a:schemeClr val="accent2">
+                  <a:lumMod val="50000"/>
+                </a:schemeClr>
+              </a:solidFill>
+            </p:spPr>
+            <p:style>
+              <a:lnRef idx="2">
+                <a:schemeClr val="accent1">
+                  <a:shade val="50000"/>
+                </a:schemeClr>
+              </a:lnRef>
+              <a:fillRef idx="1">
+                <a:schemeClr val="accent1"/>
+              </a:fillRef>
+              <a:effectRef idx="0">
+                <a:schemeClr val="accent1"/>
+              </a:effectRef>
+              <a:fontRef idx="minor">
+                <a:schemeClr val="lt1"/>
+              </a:fontRef>
+            </p:style>
+            <p:txBody>
+              <a:bodyPr rtlCol="0" anchor="ctr"/>
+              <a:lstStyle/>
+              <a:p>
+                <a:pPr algn="ctr"/>
+                <a:endParaRPr kumimoji="1" lang="ja-JP" altLang="en-US"/>
+              </a:p>
+            </p:txBody>
+          </p:sp>
+          <p:sp>
+            <p:nvSpPr>
+              <p:cNvPr id="108" name="楕円 107">
+                <a:extLst>
+                  <a:ext uri="{FF2B5EF4-FFF2-40B4-BE49-F238E27FC236}">
+                    <a16:creationId xmlns:a16="http://schemas.microsoft.com/office/drawing/2014/main" id="{A4DF2EFB-5119-4671-AB6F-818B4D7684F8}"/>
+                  </a:ext>
+                </a:extLst>
+              </p:cNvPr>
+              <p:cNvSpPr/>
+              <p:nvPr/>
+            </p:nvSpPr>
+            <p:spPr>
+              <a:xfrm>
+                <a:off x="2457450" y="4173273"/>
+                <a:ext cx="717550" cy="670454"/>
+              </a:xfrm>
+              <a:prstGeom prst="ellipse">
+                <a:avLst/>
+              </a:prstGeom>
+              <a:solidFill>
+                <a:schemeClr val="accent6">
+                  <a:lumMod val="60000"/>
+                  <a:lumOff val="40000"/>
+                </a:schemeClr>
+              </a:solidFill>
+              <a:ln>
+                <a:solidFill>
+                  <a:schemeClr val="tx1"/>
+                </a:solidFill>
+              </a:ln>
+            </p:spPr>
+            <p:style>
+              <a:lnRef idx="2">
+                <a:schemeClr val="accent1">
+                  <a:shade val="50000"/>
+                </a:schemeClr>
+              </a:lnRef>
+              <a:fillRef idx="1">
+                <a:schemeClr val="accent1"/>
+              </a:fillRef>
+              <a:effectRef idx="0">
+                <a:schemeClr val="accent1"/>
+              </a:effectRef>
+              <a:fontRef idx="minor">
+                <a:schemeClr val="lt1"/>
+              </a:fontRef>
+            </p:style>
+            <p:txBody>
+              <a:bodyPr rtlCol="0" anchor="ctr"/>
+              <a:lstStyle/>
+              <a:p>
+                <a:pPr algn="ctr"/>
+                <a:endParaRPr kumimoji="1" lang="ja-JP" altLang="en-US"/>
+              </a:p>
+            </p:txBody>
+          </p:sp>
+        </p:grpSp>
+        <p:grpSp>
+          <p:nvGrpSpPr>
+            <p:cNvPr id="92" name="グループ化 91">
+              <a:extLst>
+                <a:ext uri="{FF2B5EF4-FFF2-40B4-BE49-F238E27FC236}">
+                  <a16:creationId xmlns:a16="http://schemas.microsoft.com/office/drawing/2014/main" id="{D82644FF-0855-4E23-8F04-EDECEA372A1F}"/>
+                </a:ext>
+              </a:extLst>
+            </p:cNvPr>
+            <p:cNvGrpSpPr/>
+            <p:nvPr/>
+          </p:nvGrpSpPr>
+          <p:grpSpPr>
+            <a:xfrm>
+              <a:off x="3879533" y="3759745"/>
+              <a:ext cx="717550" cy="1741091"/>
+              <a:chOff x="2457450" y="4173273"/>
+              <a:chExt cx="717550" cy="1338527"/>
+            </a:xfrm>
+          </p:grpSpPr>
+          <p:sp>
+            <p:nvSpPr>
+              <p:cNvPr id="105" name="正方形/長方形 104">
+                <a:extLst>
+                  <a:ext uri="{FF2B5EF4-FFF2-40B4-BE49-F238E27FC236}">
+                    <a16:creationId xmlns:a16="http://schemas.microsoft.com/office/drawing/2014/main" id="{13591C23-BFB8-4404-A240-5DBE183F5805}"/>
+                  </a:ext>
+                </a:extLst>
+              </p:cNvPr>
+              <p:cNvSpPr/>
+              <p:nvPr/>
+            </p:nvSpPr>
+            <p:spPr>
+              <a:xfrm>
+                <a:off x="2717800" y="4508500"/>
+                <a:ext cx="196850" cy="1003300"/>
+              </a:xfrm>
+              <a:prstGeom prst="rect">
+                <a:avLst/>
+              </a:prstGeom>
+              <a:solidFill>
+                <a:schemeClr val="accent2">
+                  <a:lumMod val="50000"/>
+                </a:schemeClr>
+              </a:solidFill>
+            </p:spPr>
+            <p:style>
+              <a:lnRef idx="2">
+                <a:schemeClr val="accent1">
+                  <a:shade val="50000"/>
+                </a:schemeClr>
+              </a:lnRef>
+              <a:fillRef idx="1">
+                <a:schemeClr val="accent1"/>
+              </a:fillRef>
+              <a:effectRef idx="0">
+                <a:schemeClr val="accent1"/>
+              </a:effectRef>
+              <a:fontRef idx="minor">
+                <a:schemeClr val="lt1"/>
+              </a:fontRef>
+            </p:style>
+            <p:txBody>
+              <a:bodyPr rtlCol="0" anchor="ctr"/>
+              <a:lstStyle/>
+              <a:p>
+                <a:pPr algn="ctr"/>
+                <a:endParaRPr kumimoji="1" lang="ja-JP" altLang="en-US"/>
+              </a:p>
+            </p:txBody>
+          </p:sp>
+          <p:sp>
+            <p:nvSpPr>
+              <p:cNvPr id="106" name="楕円 105">
+                <a:extLst>
+                  <a:ext uri="{FF2B5EF4-FFF2-40B4-BE49-F238E27FC236}">
+                    <a16:creationId xmlns:a16="http://schemas.microsoft.com/office/drawing/2014/main" id="{D5C59C4B-2DD8-4948-B66B-216C46516A19}"/>
+                  </a:ext>
+                </a:extLst>
+              </p:cNvPr>
+              <p:cNvSpPr/>
+              <p:nvPr/>
+            </p:nvSpPr>
+            <p:spPr>
+              <a:xfrm>
+                <a:off x="2457450" y="4173273"/>
+                <a:ext cx="717550" cy="670454"/>
+              </a:xfrm>
+              <a:prstGeom prst="ellipse">
+                <a:avLst/>
+              </a:prstGeom>
+              <a:solidFill>
+                <a:schemeClr val="accent6">
+                  <a:lumMod val="60000"/>
+                  <a:lumOff val="40000"/>
+                </a:schemeClr>
+              </a:solidFill>
+              <a:ln>
+                <a:solidFill>
+                  <a:schemeClr val="tx1"/>
+                </a:solidFill>
+              </a:ln>
+            </p:spPr>
+            <p:style>
+              <a:lnRef idx="2">
+                <a:schemeClr val="accent1">
+                  <a:shade val="50000"/>
+                </a:schemeClr>
+              </a:lnRef>
+              <a:fillRef idx="1">
+                <a:schemeClr val="accent1"/>
+              </a:fillRef>
+              <a:effectRef idx="0">
+                <a:schemeClr val="accent1"/>
+              </a:effectRef>
+              <a:fontRef idx="minor">
+                <a:schemeClr val="lt1"/>
+              </a:fontRef>
+            </p:style>
+            <p:txBody>
+              <a:bodyPr rtlCol="0" anchor="ctr"/>
+              <a:lstStyle/>
+              <a:p>
+                <a:pPr algn="ctr"/>
+                <a:endParaRPr kumimoji="1" lang="ja-JP" altLang="en-US"/>
+              </a:p>
+            </p:txBody>
+          </p:sp>
+        </p:grpSp>
+        <p:grpSp>
+          <p:nvGrpSpPr>
+            <p:cNvPr id="93" name="グループ化 92">
+              <a:extLst>
+                <a:ext uri="{FF2B5EF4-FFF2-40B4-BE49-F238E27FC236}">
+                  <a16:creationId xmlns:a16="http://schemas.microsoft.com/office/drawing/2014/main" id="{29131A81-BADF-4B9D-86F9-5EBF50D11380}"/>
+                </a:ext>
+              </a:extLst>
+            </p:cNvPr>
+            <p:cNvGrpSpPr/>
+            <p:nvPr/>
+          </p:nvGrpSpPr>
+          <p:grpSpPr>
+            <a:xfrm>
+              <a:off x="839956" y="3567221"/>
+              <a:ext cx="131763" cy="203200"/>
+              <a:chOff x="1333500" y="5133182"/>
+              <a:chExt cx="263525" cy="375179"/>
+            </a:xfrm>
+          </p:grpSpPr>
+          <p:sp>
+            <p:nvSpPr>
+              <p:cNvPr id="101" name="二等辺三角形 100">
+                <a:extLst>
+                  <a:ext uri="{FF2B5EF4-FFF2-40B4-BE49-F238E27FC236}">
+                    <a16:creationId xmlns:a16="http://schemas.microsoft.com/office/drawing/2014/main" id="{5E8BF420-4F7A-4627-9202-0E7030EA120D}"/>
+                  </a:ext>
+                </a:extLst>
+              </p:cNvPr>
+              <p:cNvSpPr/>
+              <p:nvPr/>
+            </p:nvSpPr>
+            <p:spPr>
+              <a:xfrm rot="5400000">
+                <a:off x="1534980" y="5222082"/>
+                <a:ext cx="66940" cy="57150"/>
+              </a:xfrm>
+              <a:prstGeom prst="triangle">
+                <a:avLst/>
+              </a:prstGeom>
+            </p:spPr>
+            <p:style>
+              <a:lnRef idx="2">
+                <a:schemeClr val="accent1">
+                  <a:shade val="50000"/>
+                </a:schemeClr>
+              </a:lnRef>
+              <a:fillRef idx="1">
+                <a:schemeClr val="accent1"/>
+              </a:fillRef>
+              <a:effectRef idx="0">
+                <a:schemeClr val="accent1"/>
+              </a:effectRef>
+              <a:fontRef idx="minor">
+                <a:schemeClr val="lt1"/>
+              </a:fontRef>
+            </p:style>
+            <p:txBody>
+              <a:bodyPr rtlCol="0" anchor="ctr"/>
+              <a:lstStyle/>
+              <a:p>
+                <a:pPr algn="ctr"/>
+                <a:endParaRPr kumimoji="1" lang="ja-JP" altLang="en-US"/>
+              </a:p>
+            </p:txBody>
+          </p:sp>
+          <p:grpSp>
+            <p:nvGrpSpPr>
+              <p:cNvPr id="102" name="グループ化 101">
+                <a:extLst>
+                  <a:ext uri="{FF2B5EF4-FFF2-40B4-BE49-F238E27FC236}">
+                    <a16:creationId xmlns:a16="http://schemas.microsoft.com/office/drawing/2014/main" id="{43EFACBD-E7B9-4053-99F0-059D2C7A3F3A}"/>
+                  </a:ext>
+                </a:extLst>
+              </p:cNvPr>
+              <p:cNvGrpSpPr/>
+              <p:nvPr/>
+            </p:nvGrpSpPr>
+            <p:grpSpPr>
+              <a:xfrm>
+                <a:off x="1333500" y="5133182"/>
+                <a:ext cx="234950" cy="375179"/>
+                <a:chOff x="2470150" y="4146021"/>
+                <a:chExt cx="234950" cy="375179"/>
+              </a:xfrm>
+            </p:grpSpPr>
+            <p:sp>
+              <p:nvSpPr>
+                <p:cNvPr id="103" name="二等辺三角形 102">
+                  <a:extLst>
+                    <a:ext uri="{FF2B5EF4-FFF2-40B4-BE49-F238E27FC236}">
+                      <a16:creationId xmlns:a16="http://schemas.microsoft.com/office/drawing/2014/main" id="{4F8C347F-55C0-4289-BF88-274102C2A700}"/>
+                    </a:ext>
+                  </a:extLst>
+                </p:cNvPr>
+                <p:cNvSpPr/>
+                <p:nvPr/>
+              </p:nvSpPr>
+              <p:spPr>
+                <a:xfrm>
+                  <a:off x="2470150" y="4286250"/>
+                  <a:ext cx="234950" cy="234950"/>
+                </a:xfrm>
+                <a:prstGeom prst="triangle">
+                  <a:avLst/>
+                </a:prstGeom>
+              </p:spPr>
+              <p:style>
+                <a:lnRef idx="2">
+                  <a:schemeClr val="accent1">
+                    <a:shade val="50000"/>
+                  </a:schemeClr>
+                </a:lnRef>
+                <a:fillRef idx="1">
+                  <a:schemeClr val="accent1"/>
+                </a:fillRef>
+                <a:effectRef idx="0">
+                  <a:schemeClr val="accent1"/>
+                </a:effectRef>
+                <a:fontRef idx="minor">
+                  <a:schemeClr val="lt1"/>
+                </a:fontRef>
+              </p:style>
+              <p:txBody>
+                <a:bodyPr rtlCol="0" anchor="ctr"/>
+                <a:lstStyle/>
+                <a:p>
+                  <a:pPr algn="ctr"/>
+                  <a:endParaRPr kumimoji="1" lang="ja-JP" altLang="en-US"/>
+                </a:p>
+              </p:txBody>
+            </p:sp>
+            <p:sp>
+              <p:nvSpPr>
+                <p:cNvPr id="104" name="楕円 103">
+                  <a:extLst>
+                    <a:ext uri="{FF2B5EF4-FFF2-40B4-BE49-F238E27FC236}">
+                      <a16:creationId xmlns:a16="http://schemas.microsoft.com/office/drawing/2014/main" id="{8C084254-469E-4467-99B9-B2BD78F0C373}"/>
+                    </a:ext>
+                  </a:extLst>
+                </p:cNvPr>
+                <p:cNvSpPr/>
+                <p:nvPr/>
+              </p:nvSpPr>
+              <p:spPr>
+                <a:xfrm>
+                  <a:off x="2470150" y="4146021"/>
+                  <a:ext cx="234950" cy="234950"/>
+                </a:xfrm>
+                <a:prstGeom prst="ellipse">
+                  <a:avLst/>
+                </a:prstGeom>
+              </p:spPr>
+              <p:style>
+                <a:lnRef idx="2">
+                  <a:schemeClr val="accent1">
+                    <a:shade val="50000"/>
+                  </a:schemeClr>
+                </a:lnRef>
+                <a:fillRef idx="1">
+                  <a:schemeClr val="accent1"/>
+                </a:fillRef>
+                <a:effectRef idx="0">
+                  <a:schemeClr val="accent1"/>
+                </a:effectRef>
+                <a:fontRef idx="minor">
+                  <a:schemeClr val="lt1"/>
+                </a:fontRef>
+              </p:style>
+              <p:txBody>
+                <a:bodyPr rtlCol="0" anchor="ctr"/>
+                <a:lstStyle/>
+                <a:p>
+                  <a:pPr algn="ctr"/>
+                  <a:endParaRPr kumimoji="1" lang="ja-JP" altLang="en-US"/>
+                </a:p>
+              </p:txBody>
+            </p:sp>
+          </p:grpSp>
+        </p:grpSp>
+        <p:sp>
+          <p:nvSpPr>
+            <p:cNvPr id="94" name="テキスト ボックス 93">
+              <a:extLst>
+                <a:ext uri="{FF2B5EF4-FFF2-40B4-BE49-F238E27FC236}">
+                  <a16:creationId xmlns:a16="http://schemas.microsoft.com/office/drawing/2014/main" id="{AF3CCF87-96E8-4DB1-A234-BEABA7E4BF55}"/>
+                </a:ext>
+              </a:extLst>
+            </p:cNvPr>
+            <p:cNvSpPr txBox="1"/>
+            <p:nvPr/>
+          </p:nvSpPr>
+          <p:spPr>
+            <a:xfrm>
+              <a:off x="825666" y="3443440"/>
+              <a:ext cx="399468" cy="338554"/>
+            </a:xfrm>
+            <a:prstGeom prst="rect">
+              <a:avLst/>
+            </a:prstGeom>
+            <a:noFill/>
+          </p:spPr>
+          <p:txBody>
+            <a:bodyPr wrap="none" rtlCol="0">
+              <a:spAutoFit/>
+            </a:bodyPr>
+            <a:lstStyle/>
+            <a:p>
+              <a:r>
+                <a:rPr kumimoji="1" lang="en-US" altLang="ja-JP" sz="1600" dirty="0"/>
+                <a:t>x3</a:t>
+              </a:r>
+              <a:endParaRPr kumimoji="1" lang="en-US" altLang="ja-JP" sz="1600" b="1" dirty="0">
+                <a:solidFill>
+                  <a:srgbClr val="FF0000"/>
+                </a:solidFill>
+              </a:endParaRPr>
+            </a:p>
+          </p:txBody>
+        </p:sp>
+        <p:sp>
+          <p:nvSpPr>
+            <p:cNvPr id="95" name="四角形: 角度付き 94">
+              <a:extLst>
+                <a:ext uri="{FF2B5EF4-FFF2-40B4-BE49-F238E27FC236}">
+                  <a16:creationId xmlns:a16="http://schemas.microsoft.com/office/drawing/2014/main" id="{FCA36158-B1E8-4A36-8940-CB5FAF1CC9DD}"/>
+                </a:ext>
+              </a:extLst>
+            </p:cNvPr>
+            <p:cNvSpPr/>
+            <p:nvPr/>
+          </p:nvSpPr>
+          <p:spPr>
+            <a:xfrm>
+              <a:off x="5045885" y="5238221"/>
+              <a:ext cx="273827" cy="265356"/>
+            </a:xfrm>
+            <a:prstGeom prst="bevel">
+              <a:avLst/>
+            </a:prstGeom>
+            <a:solidFill>
+              <a:schemeClr val="bg2"/>
+            </a:solidFill>
+            <a:ln>
+              <a:solidFill>
+                <a:schemeClr val="tx1"/>
+              </a:solidFill>
+            </a:ln>
+          </p:spPr>
+          <p:style>
+            <a:lnRef idx="2">
+              <a:schemeClr val="accent1">
+                <a:shade val="50000"/>
+              </a:schemeClr>
+            </a:lnRef>
+            <a:fillRef idx="1">
+              <a:schemeClr val="accent1"/>
+            </a:fillRef>
+            <a:effectRef idx="0">
+              <a:schemeClr val="accent1"/>
+            </a:effectRef>
+            <a:fontRef idx="minor">
+              <a:schemeClr val="lt1"/>
+            </a:fontRef>
+          </p:style>
+          <p:txBody>
+            <a:bodyPr rtlCol="0" anchor="ctr"/>
+            <a:lstStyle/>
+            <a:p>
+              <a:pPr algn="ctr"/>
+              <a:endParaRPr kumimoji="1" lang="ja-JP" altLang="en-US"/>
+            </a:p>
+          </p:txBody>
+        </p:sp>
+        <p:sp>
+          <p:nvSpPr>
+            <p:cNvPr id="96" name="四角形: 角度付き 95">
+              <a:extLst>
+                <a:ext uri="{FF2B5EF4-FFF2-40B4-BE49-F238E27FC236}">
+                  <a16:creationId xmlns:a16="http://schemas.microsoft.com/office/drawing/2014/main" id="{7878EC96-D673-4FF5-8004-2809A0870E04}"/>
+                </a:ext>
+              </a:extLst>
+            </p:cNvPr>
+            <p:cNvSpPr/>
+            <p:nvPr/>
+          </p:nvSpPr>
+          <p:spPr>
+            <a:xfrm>
+              <a:off x="5332746" y="5238539"/>
+              <a:ext cx="273827" cy="265356"/>
+            </a:xfrm>
+            <a:prstGeom prst="bevel">
+              <a:avLst/>
+            </a:prstGeom>
+            <a:solidFill>
+              <a:schemeClr val="bg2"/>
+            </a:solidFill>
+            <a:ln>
+              <a:solidFill>
+                <a:schemeClr val="tx1"/>
+              </a:solidFill>
+            </a:ln>
+          </p:spPr>
+          <p:style>
+            <a:lnRef idx="2">
+              <a:schemeClr val="accent1">
+                <a:shade val="50000"/>
+              </a:schemeClr>
+            </a:lnRef>
+            <a:fillRef idx="1">
+              <a:schemeClr val="accent1"/>
+            </a:fillRef>
+            <a:effectRef idx="0">
+              <a:schemeClr val="accent1"/>
+            </a:effectRef>
+            <a:fontRef idx="minor">
+              <a:schemeClr val="lt1"/>
+            </a:fontRef>
+          </p:style>
+          <p:txBody>
+            <a:bodyPr rtlCol="0" anchor="ctr"/>
+            <a:lstStyle/>
+            <a:p>
+              <a:pPr algn="ctr"/>
+              <a:endParaRPr kumimoji="1" lang="ja-JP" altLang="en-US"/>
+            </a:p>
+          </p:txBody>
+        </p:sp>
+        <p:sp>
+          <p:nvSpPr>
+            <p:cNvPr id="97" name="四角形: 角度付き 96">
+              <a:extLst>
+                <a:ext uri="{FF2B5EF4-FFF2-40B4-BE49-F238E27FC236}">
+                  <a16:creationId xmlns:a16="http://schemas.microsoft.com/office/drawing/2014/main" id="{B6BF1836-8C10-4387-9465-9619127AA55C}"/>
+                </a:ext>
+              </a:extLst>
+            </p:cNvPr>
+            <p:cNvSpPr/>
+            <p:nvPr/>
+          </p:nvSpPr>
+          <p:spPr>
+            <a:xfrm>
+              <a:off x="5617392" y="5238223"/>
+              <a:ext cx="273827" cy="265356"/>
+            </a:xfrm>
+            <a:prstGeom prst="bevel">
+              <a:avLst/>
+            </a:prstGeom>
+            <a:solidFill>
+              <a:schemeClr val="bg2"/>
+            </a:solidFill>
+            <a:ln>
+              <a:solidFill>
+                <a:schemeClr val="tx1"/>
+              </a:solidFill>
+            </a:ln>
+          </p:spPr>
+          <p:style>
+            <a:lnRef idx="2">
+              <a:schemeClr val="accent1">
+                <a:shade val="50000"/>
+              </a:schemeClr>
+            </a:lnRef>
+            <a:fillRef idx="1">
+              <a:schemeClr val="accent1"/>
+            </a:fillRef>
+            <a:effectRef idx="0">
+              <a:schemeClr val="accent1"/>
+            </a:effectRef>
+            <a:fontRef idx="minor">
+              <a:schemeClr val="lt1"/>
+            </a:fontRef>
+          </p:style>
+          <p:txBody>
+            <a:bodyPr rtlCol="0" anchor="ctr"/>
+            <a:lstStyle/>
+            <a:p>
+              <a:pPr algn="ctr"/>
+              <a:endParaRPr kumimoji="1" lang="ja-JP" altLang="en-US"/>
+            </a:p>
+          </p:txBody>
+        </p:sp>
+        <p:sp>
+          <p:nvSpPr>
+            <p:cNvPr id="98" name="四角形: 角度付き 97">
+              <a:extLst>
+                <a:ext uri="{FF2B5EF4-FFF2-40B4-BE49-F238E27FC236}">
+                  <a16:creationId xmlns:a16="http://schemas.microsoft.com/office/drawing/2014/main" id="{AB0EB1F7-A115-44C8-91CB-710026329121}"/>
+                </a:ext>
+              </a:extLst>
+            </p:cNvPr>
+            <p:cNvSpPr/>
+            <p:nvPr/>
+          </p:nvSpPr>
+          <p:spPr>
+            <a:xfrm>
+              <a:off x="5904253" y="5238541"/>
+              <a:ext cx="273827" cy="265356"/>
+            </a:xfrm>
+            <a:prstGeom prst="bevel">
+              <a:avLst/>
+            </a:prstGeom>
+            <a:solidFill>
+              <a:schemeClr val="bg2"/>
+            </a:solidFill>
+            <a:ln>
+              <a:solidFill>
+                <a:schemeClr val="tx1"/>
+              </a:solidFill>
+            </a:ln>
+          </p:spPr>
+          <p:style>
+            <a:lnRef idx="2">
+              <a:schemeClr val="accent1">
+                <a:shade val="50000"/>
+              </a:schemeClr>
+            </a:lnRef>
+            <a:fillRef idx="1">
+              <a:schemeClr val="accent1"/>
+            </a:fillRef>
+            <a:effectRef idx="0">
+              <a:schemeClr val="accent1"/>
+            </a:effectRef>
+            <a:fontRef idx="minor">
+              <a:schemeClr val="lt1"/>
+            </a:fontRef>
+          </p:style>
+          <p:txBody>
+            <a:bodyPr rtlCol="0" anchor="ctr"/>
+            <a:lstStyle/>
+            <a:p>
+              <a:pPr algn="ctr"/>
+              <a:endParaRPr kumimoji="1" lang="ja-JP" altLang="en-US"/>
+            </a:p>
+          </p:txBody>
+        </p:sp>
+        <p:sp>
+          <p:nvSpPr>
+            <p:cNvPr id="99" name="四角形: 角度付き 98">
+              <a:extLst>
+                <a:ext uri="{FF2B5EF4-FFF2-40B4-BE49-F238E27FC236}">
+                  <a16:creationId xmlns:a16="http://schemas.microsoft.com/office/drawing/2014/main" id="{7FA2D2C8-9C34-44CC-865A-DFC44B46621B}"/>
+                </a:ext>
+              </a:extLst>
+            </p:cNvPr>
+            <p:cNvSpPr/>
+            <p:nvPr/>
+          </p:nvSpPr>
+          <p:spPr>
+            <a:xfrm>
+              <a:off x="5617387" y="4961993"/>
+              <a:ext cx="273827" cy="265356"/>
+            </a:xfrm>
+            <a:prstGeom prst="bevel">
+              <a:avLst/>
+            </a:prstGeom>
+            <a:solidFill>
+              <a:schemeClr val="bg2"/>
+            </a:solidFill>
+            <a:ln>
+              <a:solidFill>
+                <a:schemeClr val="tx1"/>
+              </a:solidFill>
+            </a:ln>
+          </p:spPr>
+          <p:style>
+            <a:lnRef idx="2">
+              <a:schemeClr val="accent1">
+                <a:shade val="50000"/>
+              </a:schemeClr>
+            </a:lnRef>
+            <a:fillRef idx="1">
+              <a:schemeClr val="accent1"/>
+            </a:fillRef>
+            <a:effectRef idx="0">
+              <a:schemeClr val="accent1"/>
+            </a:effectRef>
+            <a:fontRef idx="minor">
+              <a:schemeClr val="lt1"/>
+            </a:fontRef>
+          </p:style>
+          <p:txBody>
+            <a:bodyPr rtlCol="0" anchor="ctr"/>
+            <a:lstStyle/>
+            <a:p>
+              <a:pPr algn="ctr"/>
+              <a:endParaRPr kumimoji="1" lang="ja-JP" altLang="en-US"/>
+            </a:p>
+          </p:txBody>
+        </p:sp>
+        <p:sp>
+          <p:nvSpPr>
+            <p:cNvPr id="100" name="四角形: 角度付き 99">
+              <a:extLst>
+                <a:ext uri="{FF2B5EF4-FFF2-40B4-BE49-F238E27FC236}">
+                  <a16:creationId xmlns:a16="http://schemas.microsoft.com/office/drawing/2014/main" id="{F0CA3883-A0B1-4C3C-A15D-D7A4BC0F9F1A}"/>
+                </a:ext>
+              </a:extLst>
+            </p:cNvPr>
+            <p:cNvSpPr/>
+            <p:nvPr/>
+          </p:nvSpPr>
+          <p:spPr>
+            <a:xfrm>
+              <a:off x="5904248" y="4962311"/>
+              <a:ext cx="273827" cy="265356"/>
+            </a:xfrm>
+            <a:prstGeom prst="bevel">
+              <a:avLst/>
+            </a:prstGeom>
+            <a:solidFill>
+              <a:schemeClr val="bg2"/>
+            </a:solidFill>
+            <a:ln>
+              <a:solidFill>
+                <a:schemeClr val="tx1"/>
+              </a:solidFill>
+            </a:ln>
+          </p:spPr>
+          <p:style>
+            <a:lnRef idx="2">
+              <a:schemeClr val="accent1">
+                <a:shade val="50000"/>
+              </a:schemeClr>
+            </a:lnRef>
+            <a:fillRef idx="1">
+              <a:schemeClr val="accent1"/>
+            </a:fillRef>
+            <a:effectRef idx="0">
+              <a:schemeClr val="accent1"/>
+            </a:effectRef>
+            <a:fontRef idx="minor">
+              <a:schemeClr val="lt1"/>
+            </a:fontRef>
+          </p:style>
+          <p:txBody>
+            <a:bodyPr rtlCol="0" anchor="ctr"/>
+            <a:lstStyle/>
+            <a:p>
+              <a:pPr algn="ctr"/>
+              <a:endParaRPr kumimoji="1" lang="ja-JP" altLang="en-US"/>
+            </a:p>
+          </p:txBody>
+        </p:sp>
+      </p:grpSp>
+      <p:sp>
+        <p:nvSpPr>
+          <p:cNvPr id="127" name="テキスト ボックス 126">
+            <a:extLst>
+              <a:ext uri="{FF2B5EF4-FFF2-40B4-BE49-F238E27FC236}">
+                <a16:creationId xmlns:a16="http://schemas.microsoft.com/office/drawing/2014/main" id="{D15D42AD-9664-4227-BA51-35615B4021ED}"/>
+              </a:ext>
+            </a:extLst>
+          </p:cNvPr>
+          <p:cNvSpPr txBox="1"/>
+          <p:nvPr/>
+        </p:nvSpPr>
+        <p:spPr>
+          <a:xfrm>
+            <a:off x="7738364" y="2925789"/>
+            <a:ext cx="492443" cy="461665"/>
+          </a:xfrm>
+          <a:prstGeom prst="rect">
+            <a:avLst/>
+          </a:prstGeom>
+          <a:noFill/>
+        </p:spPr>
+        <p:txBody>
+          <a:bodyPr wrap="none" rtlCol="0">
+            <a:spAutoFit/>
+          </a:bodyPr>
+          <a:lstStyle/>
+          <a:p>
+            <a:r>
+              <a:rPr kumimoji="1" lang="ja-JP" altLang="en-US" sz="2400" b="1" dirty="0"/>
+              <a:t>表</a:t>
+            </a:r>
+            <a:endParaRPr kumimoji="1" lang="en-US" altLang="ja-JP" sz="2400" b="1" dirty="0"/>
+          </a:p>
+        </p:txBody>
+      </p:sp>
+      <p:sp>
+        <p:nvSpPr>
+          <p:cNvPr id="2" name="矢印: 下カーブ 1">
+            <a:extLst>
+              <a:ext uri="{FF2B5EF4-FFF2-40B4-BE49-F238E27FC236}">
+                <a16:creationId xmlns:a16="http://schemas.microsoft.com/office/drawing/2014/main" id="{69A32D5F-0139-4601-8F4C-9C253BA1FAC8}"/>
+              </a:ext>
+            </a:extLst>
+          </p:cNvPr>
+          <p:cNvSpPr/>
+          <p:nvPr/>
+        </p:nvSpPr>
+        <p:spPr>
+          <a:xfrm>
+            <a:off x="3932889" y="3154883"/>
+            <a:ext cx="1064354" cy="482125"/>
+          </a:xfrm>
+          <a:prstGeom prst="curvedDownArrow">
+            <a:avLst/>
+          </a:prstGeom>
+        </p:spPr>
+        <p:style>
+          <a:lnRef idx="2">
+            <a:schemeClr val="accent1">
+              <a:shade val="50000"/>
+            </a:schemeClr>
+          </a:lnRef>
+          <a:fillRef idx="1">
+            <a:schemeClr val="accent1"/>
+          </a:fillRef>
+          <a:effectRef idx="0">
+            <a:schemeClr val="accent1"/>
+          </a:effectRef>
+          <a:fontRef idx="minor">
+            <a:schemeClr val="lt1"/>
+          </a:fontRef>
+        </p:style>
+        <p:txBody>
+          <a:bodyPr rtlCol="0" anchor="ctr"/>
+          <a:lstStyle/>
+          <a:p>
+            <a:pPr algn="ctr"/>
+            <a:endParaRPr kumimoji="1" lang="ja-JP" altLang="en-US">
+              <a:solidFill>
+                <a:schemeClr val="tx1"/>
+              </a:solidFill>
+            </a:endParaRPr>
+          </a:p>
+        </p:txBody>
+      </p:sp>
+      <p:sp>
+        <p:nvSpPr>
+          <p:cNvPr id="128" name="矢印: 下カーブ 127">
+            <a:extLst>
+              <a:ext uri="{FF2B5EF4-FFF2-40B4-BE49-F238E27FC236}">
+                <a16:creationId xmlns:a16="http://schemas.microsoft.com/office/drawing/2014/main" id="{16401D55-0EBB-4BE4-B60F-B5983F49FAC3}"/>
+              </a:ext>
+            </a:extLst>
+          </p:cNvPr>
+          <p:cNvSpPr/>
+          <p:nvPr/>
+        </p:nvSpPr>
+        <p:spPr>
+          <a:xfrm rot="10800000">
+            <a:off x="3873211" y="4300741"/>
+            <a:ext cx="1064354" cy="482125"/>
+          </a:xfrm>
+          <a:prstGeom prst="curvedDownArrow">
+            <a:avLst/>
+          </a:prstGeom>
+        </p:spPr>
+        <p:style>
+          <a:lnRef idx="2">
+            <a:schemeClr val="accent1">
+              <a:shade val="50000"/>
+            </a:schemeClr>
+          </a:lnRef>
+          <a:fillRef idx="1">
+            <a:schemeClr val="accent1"/>
+          </a:fillRef>
+          <a:effectRef idx="0">
+            <a:schemeClr val="accent1"/>
+          </a:effectRef>
+          <a:fontRef idx="minor">
+            <a:schemeClr val="lt1"/>
+          </a:fontRef>
+        </p:style>
+        <p:txBody>
+          <a:bodyPr rtlCol="0" anchor="ctr"/>
+          <a:lstStyle/>
+          <a:p>
+            <a:pPr algn="ctr"/>
+            <a:endParaRPr kumimoji="1" lang="ja-JP" altLang="en-US">
+              <a:solidFill>
+                <a:schemeClr val="tx1"/>
+              </a:solidFill>
+            </a:endParaRPr>
+          </a:p>
+        </p:txBody>
+      </p:sp>
+    </p:spTree>
+    <p:extLst>
+      <p:ext uri="{BB962C8B-B14F-4D97-AF65-F5344CB8AC3E}">
+        <p14:creationId xmlns:p14="http://schemas.microsoft.com/office/powerpoint/2010/main" val="3296136134"/>
+      </p:ext>
+    </p:extLst>
+  </p:cSld>
+  <p:clrMapOvr>
+    <a:masterClrMapping/>
+  </p:clrMapOvr>
+</p:sld>
+</file>
+
+<file path=ppt/slides/slide9.xml><?xml version="1.0" encoding="utf-8"?>
 <p:sld xmlns:a="http://schemas.openxmlformats.org/drawingml/2006/main" xmlns:r="http://schemas.openxmlformats.org/officeDocument/2006/relationships" xmlns:p="http://schemas.openxmlformats.org/presentationml/2006/main">
   <p:cSld>
     <p:spTree>
@@ -10978,248 +16313,6 @@
     <p:extLst>
       <p:ext uri="{BB962C8B-B14F-4D97-AF65-F5344CB8AC3E}">
         <p14:creationId xmlns:p14="http://schemas.microsoft.com/office/powerpoint/2010/main" val="1376642818"/>
-      </p:ext>
-    </p:extLst>
-  </p:cSld>
-  <p:clrMapOvr>
-    <a:masterClrMapping/>
-  </p:clrMapOvr>
-</p:sld>
-</file>
-
-<file path=ppt/slides/slide9.xml><?xml version="1.0" encoding="utf-8"?>
-<p:sld xmlns:a="http://schemas.openxmlformats.org/drawingml/2006/main" xmlns:r="http://schemas.openxmlformats.org/officeDocument/2006/relationships" xmlns:p="http://schemas.openxmlformats.org/presentationml/2006/main">
-  <p:cSld>
-    <p:spTree>
-      <p:nvGrpSpPr>
-        <p:cNvPr id="1" name=""/>
-        <p:cNvGrpSpPr/>
-        <p:nvPr/>
-      </p:nvGrpSpPr>
-      <p:grpSpPr>
-        <a:xfrm>
-          <a:off x="0" y="0"/>
-          <a:ext cx="0" cy="0"/>
-          <a:chOff x="0" y="0"/>
-          <a:chExt cx="0" cy="0"/>
-        </a:xfrm>
-      </p:grpSpPr>
-      <p:sp>
-        <p:nvSpPr>
-          <p:cNvPr id="4" name="テキスト ボックス 3">
-            <a:extLst>
-              <a:ext uri="{FF2B5EF4-FFF2-40B4-BE49-F238E27FC236}">
-                <a16:creationId xmlns:a16="http://schemas.microsoft.com/office/drawing/2014/main" id="{5A13BF46-B8C5-48AA-8308-C9ECFF431A18}"/>
-              </a:ext>
-            </a:extLst>
-          </p:cNvPr>
-          <p:cNvSpPr txBox="1"/>
-          <p:nvPr/>
-        </p:nvSpPr>
-        <p:spPr>
-          <a:xfrm>
-            <a:off x="567542" y="491954"/>
-            <a:ext cx="4815742" cy="584775"/>
-          </a:xfrm>
-          <a:prstGeom prst="rect">
-            <a:avLst/>
-          </a:prstGeom>
-          <a:noFill/>
-        </p:spPr>
-        <p:txBody>
-          <a:bodyPr wrap="none" rtlCol="0">
-            <a:spAutoFit/>
-          </a:bodyPr>
-          <a:lstStyle/>
-          <a:p>
-            <a:r>
-              <a:rPr kumimoji="1" lang="ja-JP" altLang="en-US" sz="3200" b="1" u="sng" dirty="0"/>
-              <a:t>最低限のプログラム 解説</a:t>
-            </a:r>
-          </a:p>
-        </p:txBody>
-      </p:sp>
-      <p:sp>
-        <p:nvSpPr>
-          <p:cNvPr id="6" name="テキスト ボックス 5">
-            <a:extLst>
-              <a:ext uri="{FF2B5EF4-FFF2-40B4-BE49-F238E27FC236}">
-                <a16:creationId xmlns:a16="http://schemas.microsoft.com/office/drawing/2014/main" id="{55830AD6-028B-4C4E-80BF-B70DFC1C3A46}"/>
-              </a:ext>
-            </a:extLst>
-          </p:cNvPr>
-          <p:cNvSpPr txBox="1"/>
-          <p:nvPr/>
-        </p:nvSpPr>
-        <p:spPr>
-          <a:xfrm>
-            <a:off x="567542" y="1216429"/>
-            <a:ext cx="3262432" cy="461665"/>
-          </a:xfrm>
-          <a:prstGeom prst="rect">
-            <a:avLst/>
-          </a:prstGeom>
-          <a:noFill/>
-        </p:spPr>
-        <p:txBody>
-          <a:bodyPr wrap="none" rtlCol="0">
-            <a:spAutoFit/>
-          </a:bodyPr>
-          <a:lstStyle/>
-          <a:p>
-            <a:r>
-              <a:rPr lang="ja-JP" altLang="en-US" sz="2400" dirty="0"/>
-              <a:t>ループ文になります。</a:t>
-            </a:r>
-            <a:endParaRPr kumimoji="1" lang="en-US" altLang="ja-JP" sz="2400" dirty="0"/>
-          </a:p>
-        </p:txBody>
-      </p:sp>
-      <p:pic>
-        <p:nvPicPr>
-          <p:cNvPr id="5" name="図 4">
-            <a:extLst>
-              <a:ext uri="{FF2B5EF4-FFF2-40B4-BE49-F238E27FC236}">
-                <a16:creationId xmlns:a16="http://schemas.microsoft.com/office/drawing/2014/main" id="{566B14F4-A437-40DD-AB80-98211DA5A98B}"/>
-              </a:ext>
-            </a:extLst>
-          </p:cNvPr>
-          <p:cNvPicPr>
-            <a:picLocks noChangeAspect="1"/>
-          </p:cNvPicPr>
-          <p:nvPr/>
-        </p:nvPicPr>
-        <p:blipFill>
-          <a:blip r:embed="rId2">
-            <a:extLst>
-              <a:ext uri="{28A0092B-C50C-407E-A947-70E740481C1C}">
-                <a14:useLocalDpi xmlns:a14="http://schemas.microsoft.com/office/drawing/2010/main" val="0"/>
-              </a:ext>
-            </a:extLst>
-          </a:blip>
-          <a:stretch>
-            <a:fillRect/>
-          </a:stretch>
-        </p:blipFill>
-        <p:spPr>
-          <a:xfrm>
-            <a:off x="567541" y="1817794"/>
-            <a:ext cx="5361265" cy="1230206"/>
-          </a:xfrm>
-          <a:prstGeom prst="rect">
-            <a:avLst/>
-          </a:prstGeom>
-        </p:spPr>
-      </p:pic>
-      <p:sp>
-        <p:nvSpPr>
-          <p:cNvPr id="8" name="テキスト ボックス 7">
-            <a:extLst>
-              <a:ext uri="{FF2B5EF4-FFF2-40B4-BE49-F238E27FC236}">
-                <a16:creationId xmlns:a16="http://schemas.microsoft.com/office/drawing/2014/main" id="{F8D103E3-5102-42E0-9CDB-309B97844FA3}"/>
-              </a:ext>
-            </a:extLst>
-          </p:cNvPr>
-          <p:cNvSpPr txBox="1"/>
-          <p:nvPr/>
-        </p:nvSpPr>
-        <p:spPr>
-          <a:xfrm>
-            <a:off x="567541" y="3187700"/>
-            <a:ext cx="10722807" cy="3046988"/>
-          </a:xfrm>
-          <a:prstGeom prst="rect">
-            <a:avLst/>
-          </a:prstGeom>
-          <a:noFill/>
-        </p:spPr>
-        <p:txBody>
-          <a:bodyPr wrap="none" rtlCol="0">
-            <a:spAutoFit/>
-          </a:bodyPr>
-          <a:lstStyle/>
-          <a:p>
-            <a:r>
-              <a:rPr lang="en-US" altLang="ja-JP" sz="2400" b="1" dirty="0" err="1">
-                <a:solidFill>
-                  <a:srgbClr val="FF0000"/>
-                </a:solidFill>
-              </a:rPr>
-              <a:t>ProcessMessage</a:t>
-            </a:r>
-            <a:r>
-              <a:rPr lang="ja-JP" altLang="en-US" sz="2400" b="1" dirty="0">
-                <a:solidFill>
-                  <a:srgbClr val="FF0000"/>
-                </a:solidFill>
-              </a:rPr>
-              <a:t>関数</a:t>
-            </a:r>
-            <a:r>
-              <a:rPr lang="ja-JP" altLang="en-US" sz="2400" dirty="0"/>
-              <a:t>は、ゲームが正常に動いているかを見張る関数です。</a:t>
-            </a:r>
-            <a:endParaRPr lang="en-US" altLang="ja-JP" sz="2400" dirty="0"/>
-          </a:p>
-          <a:p>
-            <a:r>
-              <a:rPr kumimoji="1" lang="en-US" altLang="ja-JP" sz="2400" dirty="0"/>
-              <a:t>while</a:t>
-            </a:r>
-            <a:r>
-              <a:rPr kumimoji="1" lang="ja-JP" altLang="en-US" sz="2400" dirty="0"/>
-              <a:t>文の中に書かれているので、何度も呼ばれることになります。</a:t>
-            </a:r>
-            <a:endParaRPr kumimoji="1" lang="en-US" altLang="ja-JP" sz="2400" dirty="0"/>
-          </a:p>
-          <a:p>
-            <a:endParaRPr kumimoji="1" lang="en-US" altLang="ja-JP" sz="2400" dirty="0"/>
-          </a:p>
-          <a:p>
-            <a:r>
-              <a:rPr kumimoji="1" lang="ja-JP" altLang="en-US" sz="2400" dirty="0"/>
-              <a:t>何らかの原因で問題が発生した場合はこのループを抜けて、</a:t>
-            </a:r>
-            <a:endParaRPr kumimoji="1" lang="en-US" altLang="ja-JP" sz="2400" dirty="0"/>
-          </a:p>
-          <a:p>
-            <a:r>
-              <a:rPr lang="ja-JP" altLang="en-US" sz="2400" dirty="0"/>
-              <a:t>ゲームが終了します。</a:t>
-            </a:r>
-            <a:endParaRPr kumimoji="1" lang="en-US" altLang="ja-JP" sz="2400" dirty="0"/>
-          </a:p>
-          <a:p>
-            <a:r>
-              <a:rPr lang="ja-JP" altLang="en-US" sz="2400" dirty="0"/>
-              <a:t>逆に問題がなければ無限にループします。</a:t>
-            </a:r>
-            <a:endParaRPr lang="en-US" altLang="ja-JP" sz="2400" dirty="0"/>
-          </a:p>
-          <a:p>
-            <a:endParaRPr kumimoji="1" lang="en-US" altLang="ja-JP" sz="2400" dirty="0"/>
-          </a:p>
-          <a:p>
-            <a:r>
-              <a:rPr kumimoji="1" lang="ja-JP" altLang="en-US" sz="2400" b="1" dirty="0">
-                <a:solidFill>
-                  <a:srgbClr val="00B050"/>
-                </a:solidFill>
-              </a:rPr>
-              <a:t>補足：もともとゲームは無限ループの中で動いています。</a:t>
-            </a:r>
-            <a:endParaRPr kumimoji="1" lang="en-US" altLang="ja-JP" sz="2400" b="1" dirty="0">
-              <a:solidFill>
-                <a:srgbClr val="00B050"/>
-              </a:solidFill>
-            </a:endParaRPr>
-          </a:p>
-        </p:txBody>
-      </p:sp>
-    </p:spTree>
-    <p:extLst>
-      <p:ext uri="{BB962C8B-B14F-4D97-AF65-F5344CB8AC3E}">
-        <p14:creationId xmlns:p14="http://schemas.microsoft.com/office/powerpoint/2010/main" val="1967729018"/>
       </p:ext>
     </p:extLst>
   </p:cSld>

--- a/ゲーム科1年/00_前期/ゲームプログラミングⅠ/02_ひな形(最低限のプログラム).pptx
+++ b/ゲーム科1年/00_前期/ゲームプログラミングⅠ/02_ひな形(最低限のプログラム).pptx
@@ -273,7 +273,7 @@
           <a:p>
             <a:fld id="{E9CC885B-4903-4D54-9A93-00025F12DED9}" type="datetimeFigureOut">
               <a:rPr kumimoji="1" lang="ja-JP" altLang="en-US" smtClean="0"/>
-              <a:t>2026/6/4</a:t>
+              <a:t>2026/6/22</a:t>
             </a:fld>
             <a:endParaRPr kumimoji="1" lang="ja-JP" altLang="en-US"/>
           </a:p>
@@ -503,7 +503,7 @@
           <a:p>
             <a:fld id="{E9CC885B-4903-4D54-9A93-00025F12DED9}" type="datetimeFigureOut">
               <a:rPr kumimoji="1" lang="ja-JP" altLang="en-US" smtClean="0"/>
-              <a:t>2026/6/4</a:t>
+              <a:t>2026/6/22</a:t>
             </a:fld>
             <a:endParaRPr kumimoji="1" lang="ja-JP" altLang="en-US"/>
           </a:p>
@@ -743,7 +743,7 @@
           <a:p>
             <a:fld id="{E9CC885B-4903-4D54-9A93-00025F12DED9}" type="datetimeFigureOut">
               <a:rPr kumimoji="1" lang="ja-JP" altLang="en-US" smtClean="0"/>
-              <a:t>2026/6/4</a:t>
+              <a:t>2026/6/22</a:t>
             </a:fld>
             <a:endParaRPr kumimoji="1" lang="ja-JP" altLang="en-US"/>
           </a:p>
@@ -973,7 +973,7 @@
           <a:p>
             <a:fld id="{E9CC885B-4903-4D54-9A93-00025F12DED9}" type="datetimeFigureOut">
               <a:rPr kumimoji="1" lang="ja-JP" altLang="en-US" smtClean="0"/>
-              <a:t>2026/6/4</a:t>
+              <a:t>2026/6/22</a:t>
             </a:fld>
             <a:endParaRPr kumimoji="1" lang="ja-JP" altLang="en-US"/>
           </a:p>
@@ -1248,7 +1248,7 @@
           <a:p>
             <a:fld id="{E9CC885B-4903-4D54-9A93-00025F12DED9}" type="datetimeFigureOut">
               <a:rPr kumimoji="1" lang="ja-JP" altLang="en-US" smtClean="0"/>
-              <a:t>2026/6/4</a:t>
+              <a:t>2026/6/22</a:t>
             </a:fld>
             <a:endParaRPr kumimoji="1" lang="ja-JP" altLang="en-US"/>
           </a:p>
@@ -1577,7 +1577,7 @@
           <a:p>
             <a:fld id="{E9CC885B-4903-4D54-9A93-00025F12DED9}" type="datetimeFigureOut">
               <a:rPr kumimoji="1" lang="ja-JP" altLang="en-US" smtClean="0"/>
-              <a:t>2026/6/4</a:t>
+              <a:t>2026/6/22</a:t>
             </a:fld>
             <a:endParaRPr kumimoji="1" lang="ja-JP" altLang="en-US"/>
           </a:p>
@@ -2053,7 +2053,7 @@
           <a:p>
             <a:fld id="{E9CC885B-4903-4D54-9A93-00025F12DED9}" type="datetimeFigureOut">
               <a:rPr kumimoji="1" lang="ja-JP" altLang="en-US" smtClean="0"/>
-              <a:t>2026/6/4</a:t>
+              <a:t>2026/6/22</a:t>
             </a:fld>
             <a:endParaRPr kumimoji="1" lang="ja-JP" altLang="en-US"/>
           </a:p>
@@ -2194,7 +2194,7 @@
           <a:p>
             <a:fld id="{E9CC885B-4903-4D54-9A93-00025F12DED9}" type="datetimeFigureOut">
               <a:rPr kumimoji="1" lang="ja-JP" altLang="en-US" smtClean="0"/>
-              <a:t>2026/6/4</a:t>
+              <a:t>2026/6/22</a:t>
             </a:fld>
             <a:endParaRPr kumimoji="1" lang="ja-JP" altLang="en-US"/>
           </a:p>
@@ -2307,7 +2307,7 @@
           <a:p>
             <a:fld id="{E9CC885B-4903-4D54-9A93-00025F12DED9}" type="datetimeFigureOut">
               <a:rPr kumimoji="1" lang="ja-JP" altLang="en-US" smtClean="0"/>
-              <a:t>2026/6/4</a:t>
+              <a:t>2026/6/22</a:t>
             </a:fld>
             <a:endParaRPr kumimoji="1" lang="ja-JP" altLang="en-US"/>
           </a:p>
@@ -2650,7 +2650,7 @@
           <a:p>
             <a:fld id="{E9CC885B-4903-4D54-9A93-00025F12DED9}" type="datetimeFigureOut">
               <a:rPr kumimoji="1" lang="ja-JP" altLang="en-US" smtClean="0"/>
-              <a:t>2026/6/4</a:t>
+              <a:t>2026/6/22</a:t>
             </a:fld>
             <a:endParaRPr kumimoji="1" lang="ja-JP" altLang="en-US"/>
           </a:p>
@@ -2938,7 +2938,7 @@
           <a:p>
             <a:fld id="{E9CC885B-4903-4D54-9A93-00025F12DED9}" type="datetimeFigureOut">
               <a:rPr kumimoji="1" lang="ja-JP" altLang="en-US" smtClean="0"/>
-              <a:t>2026/6/4</a:t>
+              <a:t>2026/6/22</a:t>
             </a:fld>
             <a:endParaRPr kumimoji="1" lang="ja-JP" altLang="en-US"/>
           </a:p>
@@ -3211,7 +3211,7 @@
           <a:p>
             <a:fld id="{E9CC885B-4903-4D54-9A93-00025F12DED9}" type="datetimeFigureOut">
               <a:rPr kumimoji="1" lang="ja-JP" altLang="en-US" smtClean="0"/>
-              <a:t>2026/6/4</a:t>
+              <a:t>2026/6/22</a:t>
             </a:fld>
             <a:endParaRPr kumimoji="1" lang="ja-JP" altLang="en-US"/>
           </a:p>
@@ -3904,7 +3904,7 @@
         <p:spPr>
           <a:xfrm>
             <a:off x="567541" y="3187700"/>
-            <a:ext cx="10722807" cy="3046988"/>
+            <a:ext cx="10722807" cy="3416320"/>
           </a:xfrm>
           <a:prstGeom prst="rect">
             <a:avLst/>
@@ -3979,18 +3979,20 @@
           </a:p>
           <a:p>
             <a:r>
-              <a:rPr kumimoji="1" lang="ja-JP" altLang="en-US" sz="2400" b="1" dirty="0">
+              <a:rPr kumimoji="1" lang="en-US" altLang="ja-JP" sz="2400" b="1" dirty="0">
                 <a:solidFill>
                   <a:srgbClr val="00B050"/>
                 </a:solidFill>
               </a:rPr>
-              <a:t>補足：もともとゲームは無限ループの中で動いています。</a:t>
-            </a:r>
-            <a:endParaRPr kumimoji="1" lang="en-US" altLang="ja-JP" sz="2400" b="1" dirty="0">
-              <a:solidFill>
-                <a:srgbClr val="00B050"/>
-              </a:solidFill>
-            </a:endParaRPr>
+              <a:t>MEMO</a:t>
+            </a:r>
+          </a:p>
+          <a:p>
+            <a:r>
+              <a:rPr kumimoji="1" lang="ja-JP" altLang="en-US" sz="2400" dirty="0"/>
+              <a:t>もともとゲームは無限ループの中で動いています。</a:t>
+            </a:r>
+            <a:endParaRPr kumimoji="1" lang="en-US" altLang="ja-JP" sz="2400" dirty="0"/>
           </a:p>
         </p:txBody>
       </p:sp>
@@ -13880,7 +13882,7 @@
         <p:spPr>
           <a:xfrm>
             <a:off x="567542" y="5204267"/>
-            <a:ext cx="4459875" cy="1323439"/>
+            <a:ext cx="9592691" cy="1323439"/>
           </a:xfrm>
           <a:prstGeom prst="rect">
             <a:avLst/>
@@ -13904,39 +13906,84 @@
           </a:p>
           <a:p>
             <a:r>
+              <a:rPr kumimoji="1" lang="ja-JP" altLang="en-US" sz="2000" b="1" dirty="0">
+                <a:solidFill>
+                  <a:srgbClr val="FF0000"/>
+                </a:solidFill>
+              </a:rPr>
+              <a:t>フリップ１回にかかる時間を１フレーム</a:t>
+            </a:r>
+            <a:r>
               <a:rPr kumimoji="1" lang="ja-JP" altLang="en-US" sz="2000" dirty="0"/>
-              <a:t>一般的なゲームは、</a:t>
+              <a:t>と言います。</a:t>
             </a:r>
             <a:endParaRPr kumimoji="1" lang="en-US" altLang="ja-JP" sz="2000" dirty="0"/>
           </a:p>
           <a:p>
             <a:r>
+              <a:rPr lang="ja-JP" altLang="en-US" sz="2000" dirty="0"/>
+              <a:t>また</a:t>
+            </a:r>
+            <a:r>
+              <a:rPr lang="ja-JP" altLang="en-US" sz="2000" b="1" dirty="0">
+                <a:solidFill>
+                  <a:srgbClr val="FF0000"/>
+                </a:solidFill>
+              </a:rPr>
+              <a:t>１秒間中のフレーム数のことをフレームレート（</a:t>
+            </a:r>
+            <a:r>
+              <a:rPr lang="en-US" altLang="ja-JP" sz="2000" b="1" dirty="0">
+                <a:solidFill>
+                  <a:srgbClr val="FF0000"/>
+                </a:solidFill>
+              </a:rPr>
+              <a:t>FPS</a:t>
+            </a:r>
+            <a:r>
+              <a:rPr lang="ja-JP" altLang="en-US" sz="2000" b="1" dirty="0">
+                <a:solidFill>
+                  <a:srgbClr val="FF0000"/>
+                </a:solidFill>
+              </a:rPr>
+              <a:t>）</a:t>
+            </a:r>
+            <a:r>
+              <a:rPr lang="ja-JP" altLang="en-US" sz="2000" dirty="0"/>
+              <a:t>といい、</a:t>
+            </a:r>
+            <a:endParaRPr kumimoji="1" lang="en-US" altLang="ja-JP" sz="2000" dirty="0"/>
+          </a:p>
+          <a:p>
+            <a:r>
+              <a:rPr kumimoji="1" lang="ja-JP" altLang="en-US" sz="2000" dirty="0"/>
+              <a:t>ゲームのフレームレートは</a:t>
+            </a:r>
+            <a:r>
               <a:rPr kumimoji="1" lang="en-US" altLang="ja-JP" sz="2000" dirty="0"/>
-              <a:t>1</a:t>
+              <a:t>30</a:t>
             </a:r>
             <a:r>
               <a:rPr kumimoji="1" lang="ja-JP" altLang="en-US" sz="2000" dirty="0"/>
-              <a:t>秒間に</a:t>
+              <a:t>～</a:t>
             </a:r>
             <a:r>
               <a:rPr kumimoji="1" lang="en-US" altLang="ja-JP" sz="2000" dirty="0"/>
-              <a:t>60</a:t>
+              <a:t>120FPS</a:t>
             </a:r>
             <a:r>
               <a:rPr kumimoji="1" lang="ja-JP" altLang="en-US" sz="2000" dirty="0"/>
-              <a:t>回フリップが発生します。</a:t>
-            </a:r>
-            <a:endParaRPr kumimoji="1" lang="en-US" altLang="ja-JP" sz="2000" dirty="0"/>
-          </a:p>
-          <a:p>
-            <a:r>
-              <a:rPr lang="en-US" altLang="ja-JP" sz="2000" dirty="0"/>
-              <a:t>(</a:t>
+              <a:t>で動作します。（特に</a:t>
             </a:r>
             <a:r>
               <a:rPr kumimoji="1" lang="en-US" altLang="ja-JP" sz="2000" dirty="0"/>
-              <a:t>FPS60)</a:t>
-            </a:r>
+              <a:t>60FPS</a:t>
+            </a:r>
+            <a:r>
+              <a:rPr kumimoji="1" lang="ja-JP" altLang="en-US" sz="2000" dirty="0"/>
+              <a:t>が一般的）</a:t>
+            </a:r>
+            <a:endParaRPr lang="en-US" altLang="ja-JP" sz="2000" dirty="0"/>
           </a:p>
         </p:txBody>
       </p:sp>
